--- a/docs/presentation/COE444_Progress_Report_Final.pptx
+++ b/docs/presentation/COE444_Progress_Report_Final.pptx
@@ -2,17 +2,17 @@
 <file path=ppt/presentation.xml><?xml version="1.0" encoding="utf-8"?>
 <p:presentation xmlns:p="http://schemas.openxmlformats.org/presentationml/2006/main">
   <p:sldMasterIdLst>
-    <p:sldMasterId xmlns:r="http://schemas.openxmlformats.org/officeDocument/2006/relationships" id="2147483648" r:id="R4669480c5ef54973"/>
+    <p:sldMasterId xmlns:r="http://schemas.openxmlformats.org/officeDocument/2006/relationships" id="2147483648" r:id="R70a378df7ac0475f"/>
   </p:sldMasterIdLst>
   <p:notesMasterIdLst>
-    <p:notesMasterId xmlns:r="http://schemas.openxmlformats.org/officeDocument/2006/relationships" r:id="R0369791b6ecd4cc6"/>
+    <p:notesMasterId xmlns:r="http://schemas.openxmlformats.org/officeDocument/2006/relationships" r:id="R137275f153734463"/>
   </p:notesMasterIdLst>
   <p:sldIdLst>
-    <p:sldId xmlns:r="http://schemas.openxmlformats.org/officeDocument/2006/relationships" id="256" r:id="Rfa7d0e8792084712"/>
-    <p:sldId xmlns:r="http://schemas.openxmlformats.org/officeDocument/2006/relationships" id="257" r:id="Rc5fe5caf6f7845c4"/>
-    <p:sldId xmlns:r="http://schemas.openxmlformats.org/officeDocument/2006/relationships" id="258" r:id="R7b365cc0eeb04605"/>
-    <p:sldId xmlns:r="http://schemas.openxmlformats.org/officeDocument/2006/relationships" id="259" r:id="Redac5090be9e4a0c"/>
-    <p:sldId xmlns:r="http://schemas.openxmlformats.org/officeDocument/2006/relationships" id="260" r:id="R31db6d14145644b9"/>
+    <p:sldId xmlns:r="http://schemas.openxmlformats.org/officeDocument/2006/relationships" id="256" r:id="R265ce9279d544879"/>
+    <p:sldId xmlns:r="http://schemas.openxmlformats.org/officeDocument/2006/relationships" id="257" r:id="Rd1ad5be034e0444e"/>
+    <p:sldId xmlns:r="http://schemas.openxmlformats.org/officeDocument/2006/relationships" id="258" r:id="R9d2bd871a43a431b"/>
+    <p:sldId xmlns:r="http://schemas.openxmlformats.org/officeDocument/2006/relationships" id="259" r:id="R5fa22e7c034b4551"/>
+    <p:sldId xmlns:r="http://schemas.openxmlformats.org/officeDocument/2006/relationships" id="260" r:id="R40b46a9352754f2e"/>
   </p:sldIdLst>
   <p:sldSz cx="12192000" cy="6858000"/>
   <p:notesSz cx="6858000" cy="9144000"/>
@@ -587,7 +587,7 @@
           <a:lstStyle xmlns:a="http://schemas.openxmlformats.org/drawingml/2006/main"/>
           <a:p xmlns:a="http://schemas.openxmlformats.org/drawingml/2006/main">
             <a:r>
-              <a:t>Progress review prepared October 21, 2026. Exact presentation date next week remains to be confirmed. Team names copied from COE444_Proposal_Final.pptx. Presenter allocations follow the existing progress deck and should be confirmed by the team.</a:t>
+              <a:t>Team names come from the proposal. This deck has one speaking part per slide. Choose the speaker names before presenting. October 2026 is the report month. The exact presentation date is not yet confirmed. Progress review prepared October 21, 2026. Exact presentation date next week remains to be confirmed. Team names copied from COE444_Proposal_Final.pptx. Presenter allocations follow the existing progress deck and should be confirmed by the team.</a:t>
             </a:r>
             <a:endParaRPr/>
           </a:p>
@@ -658,7 +658,7 @@
           <a:lstStyle xmlns:a="http://schemas.openxmlformats.org/drawingml/2006/main"/>
           <a:p xmlns:a="http://schemas.openxmlformats.org/drawingml/2006/main">
             <a:r>
-              <a:t>Sources: COE444_Proposal_Final.pptx slides 2–5; agent/tools.py; defense/detection.py; defense/prevention.py; METHODOLOGY.md. The code implements inference using a hosted model, not fine-tuning. Original web scope was explicitly first to cut. Four conditions are offline policies on shared trajectories. Byte provenance establishes source, not user intent. The original gate-v1 policy is unchanged for research comparability; protected live mailbox sends now also require explicit review. That adds a user interaction and is outside the old scoring protocol.</a:t>
+              <a:t>Explain that the model chooses tool calls, reads results and chooses its next step, up to six model turns. This is bounded autonomy. An attacker can insert instructions into retrieved text. The original recipient gate checks source, not full user intent. Live approval adds human supervision for the final protected send. Web is deferred, and the detector uses an existing hosted model without training. Sources: COE444_Proposal_Final.pptx slides 2–5; agent/tools.py; defense/detection.py; defense/prevention.py; METHODOLOGY.md. The code implements inference using a hosted model, not fine-tuning. Original web scope was explicitly first to cut. Four conditions are offline policies on shared trajectories. Byte provenance establishes source, not user intent. The original gate-v1 policy is unchanged for research comparability; protected live mailbox sends now also require explicit review. That adds a user interaction and is outside the old scoring protocol.</a:t>
             </a:r>
             <a:endParaRPr/>
           </a:p>
@@ -729,7 +729,7 @@
           <a:lstStyle xmlns:a="http://schemas.openxmlformats.org/drawingml/2006/main"/>
           <a:p xmlns:a="http://schemas.openxmlformats.org/drawingml/2006/main">
             <a:r>
-              <a:t>Source: logs/run-20261013T100754Z.jsonl, independently rescored October 21. 51 records = (10 attack payloads + 7 benign tasks) x 3 trials. Rates collapse trials by payload/task majority with ties against defense. A 6/10, B 1/10, C 3/10, D 1/10. Historical software check count was 246. After ten added regression cases, the combined suite has 256 passing checks, including all 61 original defense specifications. Inventory: attacks/payloads.json has 10 dev + 13 test = 23 custom attacks; attacks/external_llmail.json has 200 external attacks. Total 223 stored. Only ten custom attacks form this table, to keep 13 custom examples held out. Fifty external attacks have a separate saved agent run; the remaining 150 external examples are not in that saved evaluation. These counts are not interchangeable. 7/7 is a task-level majority, not every trial. Development ASR 95% Wilson intervals: A 31.3–83.2%, B/D 1.8–40.4%, C 10.8–60.3%. Benign completion interval 64.6–100%. All 240 detector judgments in the dev log are cached. Same-family agent/detector is another limitation. Offline replay is preliminary evidence pending live validation. New config.py defaults OMP_NUM_THREADS to 1; local real retrieval passed. New explicit-review live flow passed deterministic tests and browser approve/reject checks with scripted model responses. No fresh hosted-model sweep ran. Source log: logs/run-20261013T100754Z.jsonl. Total 51 agent trajectories, 204 offline policy outcomes, not 204 independent agent runs.</a:t>
+              <a:t>DATA ORIGIN: We found Microsoft LLMail-Inject on Hugging Face: https://huggingface.co/datasets/microsoft/llmail-inject-challenge . It is MIT licensed. Our converter selected and adapted 200 originally successful attacks, placing email subject/body in a policy excerpt and rewriting ordinary addresses to reserved test domains where the rule applies. Source revision 1063bdf01ec8762b812d5e06ee768a06faa5a6f7. Our task, model and scoring differ, so results cannot be compared directly with the original challenge. Separately, the project has 23 custom attacks, 14 custom normal tasks and fictional company documents/contacts. The 10 custom development attacks form this table. Thirteen custom attacks remain held out. The 200 external attacks are inventory, not 200 completed experiments. Fifty have saved agent runs, with two errors. The detector check also uses 203 clean emails from the dataset. A dataset supplies examples. A log records our own runs and provides our results. Software checks mostly use scripted model responses. Source: logs/run-20261013T100754Z.jsonl, independently rescored October 21. 51 records = (10 attack payloads + 7 benign tasks) x 3 trials. Rates collapse trials by payload/task majority with ties against defense. A 6/10, B 1/10, C 3/10, D 1/10. Historical software check count was 246. After ten added regression cases, the combined suite has 256 passing checks, including all 61 original defense specifications. Inventory: attacks/payloads.json has 10 dev + 13 test = 23 custom attacks; attacks/external_llmail.json has 200 external attacks. Total 223 stored. Only ten custom attacks form this table, to keep 13 custom examples held out. Fifty external attacks have a separate saved agent run; the remaining 150 external examples are not in that saved evaluation. These counts are not interchangeable. 7/7 is a task-level majority, not every trial. Development ASR 95% Wilson intervals: A 31.3–83.2%, B/D 1.8–40.4%, C 10.8–60.3%. Benign completion interval 64.6–100%. All 240 detector judgments in the dev log are cached. Same-family agent/detector is another limitation. Offline replay is preliminary evidence pending live validation. New config.py defaults OMP_NUM_THREADS to 1; local real retrieval passed. New explicit-review live flow passed deterministic tests and browser approve/reject checks with scripted model responses. No fresh hosted-model sweep ran. Source log: logs/run-20261013T100754Z.jsonl. Total 51 agent trajectories, 204 offline policy outcomes, not 204 independent agent runs.</a:t>
             </a:r>
             <a:endParaRPr/>
           </a:p>
@@ -800,7 +800,7 @@
           <a:lstStyle xmlns:a="http://schemas.openxmlformats.org/drawingml/2006/main"/>
           <a:p xmlns:a="http://schemas.openxmlformats.org/drawingml/2006/main">
             <a:r>
-              <a:t>Sources: logs/detector-external-20261012T215514Z.jsonl; results/detector_outofsample.md; results/progress_summary.md. Out-of-sample miss-rate Wilson interval 2.1–16.2%, false-alarm interval 0–1.9%. These are excerpt-classification results, not end-to-end attack success. PI-040 remains successful under both defenses because aborting the request meets its denial-of-service objective. Gate alone does not cover body or reply-channel leakage. Existing LLMail prevention evidence 0/48 excludes two agent errors; upper Wilson bound 7.4% exceeds 5%. Do not claim final combined goal achieved. Demo PI-101 trial 1: gate removes wfc@nw-partner.invalid, keeps hr@northwind.example. Attribution does not prove intent. Added live review requires user approval outside the tool surface, using exact server-stored draft bytes. Regression probes cover injected directory lookups, address mentions, tampering, replay, reject/reset and retries. This does not make gate-v1 an intent validator and does not demonstrate autonomous protection. Source of external agent figures: logs/run-20261012T202019Z.jsonl; its detector was a stub and only A/C are meaningful. Two errors excluded from 48 valid runs. No claim that all 200 external attacks were evaluated.</a:t>
+              <a:t>Speaking explanation: We want useful agent work with fewer attacker-directed actions. The main combined result is 10%, so the below-5% target remains unmet. Detection and combined defenses tie in this small sample. Our final demo and held-out evaluation remain planned. The extra live approval means a person authorizes the protected send. The proposal also targets detector misses below 20% and false alarms below 15%. The separate detector sample had 3/50 misses and 0/203 false alarms. Keep external and custom results separate. Sources: logs/detector-external-20261012T215514Z.jsonl; results/detector_outofsample.md; results/progress_summary.md. Out-of-sample miss-rate Wilson interval 2.1–16.2%, false-alarm interval 0–1.9%. These are excerpt-classification results, not end-to-end attack success. PI-040 remains successful under both defenses because aborting the request meets its denial-of-service objective. Gate alone does not cover body or reply-channel leakage. Existing LLMail prevention evidence 0/48 excludes two agent errors; upper Wilson bound 7.4% exceeds 5%. Do not claim final combined goal achieved. Demo PI-101 trial 1: gate removes wfc@nw-partner.invalid, keeps hr@northwind.example. Attribution does not prove intent. Added live review requires user approval outside the tool surface, using exact server-stored draft bytes. Regression probes cover injected directory lookups, address mentions, tampering, replay, reject/reset and retries. This does not make gate-v1 an intent validator and does not demonstrate autonomous protection. Source of external agent figures: logs/run-20261012T202019Z.jsonl; its detector was a stub and only A/C are meaningful. Two errors excluded from 48 valid runs. No claim that all 200 external attacks were evaluated.</a:t>
             </a:r>
             <a:endParaRPr/>
           </a:p>
@@ -871,7 +871,7 @@
           <a:lstStyle xmlns:a="http://schemas.openxmlformats.org/drawingml/2006/main"/>
           <a:p xmlns:a="http://schemas.openxmlformats.org/drawingml/2006/main">
             <a:r>
-              <a:t>Sources: proposal timeline; repository state October 21; existing TEAM-PLAN.md and progress deck. Proposed recovery plan is a recommendation, not a record of work assigned or completed. Corpus has 23 custom payloads and external LLMail records. Do not assert all original milestones are fully done: custom count and training scope changed, and no held-out confirmatory run exists. Keep the held-out split unopened while tuning. Final guidelines say Week 14, while the proposal targets November 11; verify the actual course date. Added runtime default and explicit live review are locally tested. Hosted API verification and evaluation of the new live behavior are still pending. Avoid prioritizing Gmail or extra defenses before validation. Keep old logs and held-out split unchanged.</a:t>
+              <a:t>The timeline uses collective team ownership because detailed task allocations need team confirmation. Asterisk: November 11 is a proposed team target. The guidelines say Week 14, so confirm the exact official date. Core implementation is done, while fresh hosted-model validation, the full rehearsal and final held-out testing are pending. Sources: proposal timeline; repository state October 21; existing TEAM-PLAN.md and progress deck. Proposed recovery plan is a recommendation, not a record of work assigned or completed. Corpus has 23 custom payloads and external LLMail records. Do not assert all original milestones are fully done: custom count and training scope changed, and no held-out confirmatory run exists. Keep the held-out split unopened while tuning. Final guidelines say Week 14, while the proposal targets November 11; verify the actual course date. Added runtime default and explicit live review are locally tested. Hosted API verification and evaluation of the new live behavior are still pending. Avoid prioritizing Gmail or extra defenses before validation. Keep old logs and held-out split unchanged.</a:t>
             </a:r>
             <a:endParaRPr/>
           </a:p>
@@ -940,7 +940,7 @@
   </p:cSld>
   <p:clrMap bg1="lt1" tx1="dk1" bg2="lt2" tx2="dk2" accent1="accent1" accent2="accent2" accent3="accent3" accent4="accent4" accent5="accent5" accent6="accent6" hlink="hlink" folHlink="folHlink"/>
   <p:sldLayoutIdLst>
-    <p:sldLayoutId xmlns:r="http://schemas.openxmlformats.org/officeDocument/2006/relationships" id="2147483649" r:id="R9f40e01225ad402a"/>
+    <p:sldLayoutId xmlns:r="http://schemas.openxmlformats.org/officeDocument/2006/relationships" id="2147483649" r:id="Rce72ea840a2147c5"/>
   </p:sldLayoutIdLst>
   <p:hf sldNum="0" hdr="0" ftr="0" dt="0"/>
   <p:txStyles>
@@ -1511,7 +1511,7 @@
           <p:cNvPr id="2" name="Shape 0">
             <a:extLst xmlns:a="http://schemas.openxmlformats.org/drawingml/2006/main">
               <a:ext uri="{FF2B5EF4-FFF2-40B4-BE49-F238E27FC236}">
-                <a16:creationId xmlns:a16="http://schemas.microsoft.com/office/drawing/2014/main" id="{13FEC3B2-109F-4985-9BD7-6763718F397E}"/>
+                <a16:creationId xmlns:a16="http://schemas.microsoft.com/office/drawing/2014/main" id="{DF8400B6-0449-459F-BF07-73AD8ED86F34}"/>
               </a:ext>
             </a:extLst>
           </p:cNvPr>
@@ -1538,7 +1538,7 @@
           <p:cNvPr id="3" name="Text 1">
             <a:extLst xmlns:a="http://schemas.openxmlformats.org/drawingml/2006/main">
               <a:ext uri="{FF2B5EF4-FFF2-40B4-BE49-F238E27FC236}">
-                <a16:creationId xmlns:a16="http://schemas.microsoft.com/office/drawing/2014/main" id="{F23ECD83-8457-44FF-959C-3164C5BCB657}"/>
+                <a16:creationId xmlns:a16="http://schemas.microsoft.com/office/drawing/2014/main" id="{89AEE735-7A03-49D0-B26A-49FFDA591D58}"/>
               </a:ext>
             </a:extLst>
           </p:cNvPr>
@@ -1682,7 +1682,7 @@
           <p:cNvPr id="4" name="Text 2">
             <a:extLst xmlns:a="http://schemas.openxmlformats.org/drawingml/2006/main">
               <a:ext uri="{FF2B5EF4-FFF2-40B4-BE49-F238E27FC236}">
-                <a16:creationId xmlns:a16="http://schemas.microsoft.com/office/drawing/2014/main" id="{09DEFB10-78FF-4E65-84E3-98E8A894909A}"/>
+                <a16:creationId xmlns:a16="http://schemas.microsoft.com/office/drawing/2014/main" id="{B30EC614-F94D-4124-B781-AD66DC77CC96}"/>
               </a:ext>
             </a:extLst>
           </p:cNvPr>
@@ -1717,7 +1717,7 @@
                 <a:ea typeface="Calibri"/>
                 <a:cs typeface="Calibri"/>
               </a:rPr>
-              <a:t>Progress Presentation  |  October 2026</a:t>
+              <a:t>Progress Presentation  ·  October 2026</a:t>
             </a:r>
             <a:endParaRPr sz="1800"/>
           </a:p>
@@ -1728,7 +1728,7 @@
           <p:cNvPr id="5" name="Text 3">
             <a:extLst xmlns:a="http://schemas.openxmlformats.org/drawingml/2006/main">
               <a:ext uri="{FF2B5EF4-FFF2-40B4-BE49-F238E27FC236}">
-                <a16:creationId xmlns:a16="http://schemas.microsoft.com/office/drawing/2014/main" id="{51150566-EEBD-4171-96A2-94BC2A2105F0}"/>
+                <a16:creationId xmlns:a16="http://schemas.microsoft.com/office/drawing/2014/main" id="{70FB2AF9-F8F1-441E-AD20-82781B3C2C66}"/>
               </a:ext>
             </a:extLst>
           </p:cNvPr>
@@ -1774,7 +1774,7 @@
           <p:cNvPr id="6" name="Text 4">
             <a:extLst xmlns:a="http://schemas.openxmlformats.org/drawingml/2006/main">
               <a:ext uri="{FF2B5EF4-FFF2-40B4-BE49-F238E27FC236}">
-                <a16:creationId xmlns:a16="http://schemas.microsoft.com/office/drawing/2014/main" id="{AA32536B-15DE-49CB-B860-3EE9796907AF}"/>
+                <a16:creationId xmlns:a16="http://schemas.microsoft.com/office/drawing/2014/main" id="{06A8F4B8-7874-477A-AE95-3E3120E7A762}"/>
               </a:ext>
             </a:extLst>
           </p:cNvPr>
@@ -1820,7 +1820,7 @@
           <p:cNvPr id="7" name="Text 5">
             <a:extLst xmlns:a="http://schemas.openxmlformats.org/drawingml/2006/main">
               <a:ext uri="{FF2B5EF4-FFF2-40B4-BE49-F238E27FC236}">
-                <a16:creationId xmlns:a16="http://schemas.microsoft.com/office/drawing/2014/main" id="{0DED6867-0261-49CB-8B79-5B378FE95137}"/>
+                <a16:creationId xmlns:a16="http://schemas.microsoft.com/office/drawing/2014/main" id="{E8BE516D-1E92-41BF-8652-82AF03DD0B07}"/>
               </a:ext>
             </a:extLst>
           </p:cNvPr>
@@ -1866,7 +1866,7 @@
           <p:cNvPr id="8" name="Text 6">
             <a:extLst xmlns:a="http://schemas.openxmlformats.org/drawingml/2006/main">
               <a:ext uri="{FF2B5EF4-FFF2-40B4-BE49-F238E27FC236}">
-                <a16:creationId xmlns:a16="http://schemas.microsoft.com/office/drawing/2014/main" id="{855EDB05-3F9E-46E8-9718-A8CE2CA96210}"/>
+                <a16:creationId xmlns:a16="http://schemas.microsoft.com/office/drawing/2014/main" id="{793A6A2C-679C-48AC-BF2A-F929590CE135}"/>
               </a:ext>
             </a:extLst>
           </p:cNvPr>
@@ -2010,7 +2010,7 @@
           <p:cNvPr id="9" name="Text 7">
             <a:extLst xmlns:a="http://schemas.openxmlformats.org/drawingml/2006/main">
               <a:ext uri="{FF2B5EF4-FFF2-40B4-BE49-F238E27FC236}">
-                <a16:creationId xmlns:a16="http://schemas.microsoft.com/office/drawing/2014/main" id="{FA0C1F00-5A71-4106-BD16-69A77346BE4A}"/>
+                <a16:creationId xmlns:a16="http://schemas.microsoft.com/office/drawing/2014/main" id="{6EA5CCC6-88F8-4922-B6A5-EB712C6299A5}"/>
               </a:ext>
             </a:extLst>
           </p:cNvPr>
@@ -2056,7 +2056,7 @@
           <p:cNvPr id="10" name="Text 8">
             <a:extLst xmlns:a="http://schemas.openxmlformats.org/drawingml/2006/main">
               <a:ext uri="{FF2B5EF4-FFF2-40B4-BE49-F238E27FC236}">
-                <a16:creationId xmlns:a16="http://schemas.microsoft.com/office/drawing/2014/main" id="{9BA80109-6A22-4D55-BCA5-4B199B10D642}"/>
+                <a16:creationId xmlns:a16="http://schemas.microsoft.com/office/drawing/2014/main" id="{4821F314-A1E7-44DD-A780-31BB855C84E4}"/>
               </a:ext>
             </a:extLst>
           </p:cNvPr>
@@ -2102,7 +2102,7 @@
           <p:cNvPr id="11" name="Text 9">
             <a:extLst xmlns:a="http://schemas.openxmlformats.org/drawingml/2006/main">
               <a:ext uri="{FF2B5EF4-FFF2-40B4-BE49-F238E27FC236}">
-                <a16:creationId xmlns:a16="http://schemas.microsoft.com/office/drawing/2014/main" id="{62326D00-257A-4FE1-8450-FA67252E902D}"/>
+                <a16:creationId xmlns:a16="http://schemas.microsoft.com/office/drawing/2014/main" id="{D954B445-82C4-4BD8-A02D-7E523CCD2903}"/>
               </a:ext>
             </a:extLst>
           </p:cNvPr>
@@ -2148,7 +2148,7 @@
           <p:cNvPr id="12" name="Text 10">
             <a:extLst xmlns:a="http://schemas.openxmlformats.org/drawingml/2006/main">
               <a:ext uri="{FF2B5EF4-FFF2-40B4-BE49-F238E27FC236}">
-                <a16:creationId xmlns:a16="http://schemas.microsoft.com/office/drawing/2014/main" id="{518EABA6-F046-424A-8A75-2ED41B024262}"/>
+                <a16:creationId xmlns:a16="http://schemas.microsoft.com/office/drawing/2014/main" id="{0910AB33-8BD1-448C-9F44-985F959746CA}"/>
               </a:ext>
             </a:extLst>
           </p:cNvPr>
@@ -2194,7 +2194,7 @@
           <p:cNvPr id="13" name="Text 11">
             <a:extLst xmlns:a="http://schemas.openxmlformats.org/drawingml/2006/main">
               <a:ext uri="{FF2B5EF4-FFF2-40B4-BE49-F238E27FC236}">
-                <a16:creationId xmlns:a16="http://schemas.microsoft.com/office/drawing/2014/main" id="{1C66F075-2F85-40FA-8125-44F9B8D7388B}"/>
+                <a16:creationId xmlns:a16="http://schemas.microsoft.com/office/drawing/2014/main" id="{7778FD06-2696-41B2-AB87-F0B6621CD4D9}"/>
               </a:ext>
             </a:extLst>
           </p:cNvPr>
@@ -2240,7 +2240,7 @@
           <p:cNvPr id="14" name="Text 12">
             <a:extLst xmlns:a="http://schemas.openxmlformats.org/drawingml/2006/main">
               <a:ext uri="{FF2B5EF4-FFF2-40B4-BE49-F238E27FC236}">
-                <a16:creationId xmlns:a16="http://schemas.microsoft.com/office/drawing/2014/main" id="{A31BB0DC-AB87-45B8-8D91-01CD9904A847}"/>
+                <a16:creationId xmlns:a16="http://schemas.microsoft.com/office/drawing/2014/main" id="{201B333F-28CB-43DD-B748-7D66AB6C8031}"/>
               </a:ext>
             </a:extLst>
           </p:cNvPr>
@@ -2275,7 +2275,7 @@
                 <a:ea typeface="Calibri"/>
                 <a:cs typeface="Calibri"/>
               </a:rPr>
-              <a:t>Progress review: October 21, 2026</a:t>
+              <a:t>October 2026</a:t>
             </a:r>
             <a:endParaRPr sz="1400"/>
           </a:p>
@@ -2286,7 +2286,7 @@
           <p:cNvPr id="15" name="Text 13">
             <a:extLst xmlns:a="http://schemas.openxmlformats.org/drawingml/2006/main">
               <a:ext uri="{FF2B5EF4-FFF2-40B4-BE49-F238E27FC236}">
-                <a16:creationId xmlns:a16="http://schemas.microsoft.com/office/drawing/2014/main" id="{9B2E7A21-32CD-48A1-850A-B950DD7E1C4E}"/>
+                <a16:creationId xmlns:a16="http://schemas.microsoft.com/office/drawing/2014/main" id="{8C7C6EE1-7DEB-4758-9AFF-6C677C945B4B}"/>
               </a:ext>
             </a:extLst>
           </p:cNvPr>
@@ -2332,7 +2332,7 @@
           <p:cNvPr id="16" name="Text 14">
             <a:extLst xmlns:a="http://schemas.openxmlformats.org/drawingml/2006/main">
               <a:ext uri="{FF2B5EF4-FFF2-40B4-BE49-F238E27FC236}">
-                <a16:creationId xmlns:a16="http://schemas.microsoft.com/office/drawing/2014/main" id="{721A1981-0E2B-4D78-BBCC-187160D297A5}"/>
+                <a16:creationId xmlns:a16="http://schemas.microsoft.com/office/drawing/2014/main" id="{DC1B97D4-FD92-4B9E-AF92-AD0C621EB888}"/>
               </a:ext>
             </a:extLst>
           </p:cNvPr>
@@ -2376,7 +2376,7 @@
     </p:spTree>
     <p:extLst>
       <p:ext uri="{BB962C8B-B14F-4D97-AF65-F5344CB8AC3E}">
-        <p14:creationId xmlns:p14="http://schemas.microsoft.com/office/powerpoint/2010/main" val="1191299619"/>
+        <p14:creationId xmlns:p14="http://schemas.microsoft.com/office/powerpoint/2010/main" val="1783756700"/>
       </p:ext>
     </p:extLst>
   </p:cSld>
@@ -2407,7 +2407,7 @@
           <p:cNvPr id="2" name="Text 0">
             <a:extLst xmlns:a="http://schemas.openxmlformats.org/drawingml/2006/main">
               <a:ext uri="{FF2B5EF4-FFF2-40B4-BE49-F238E27FC236}">
-                <a16:creationId xmlns:a16="http://schemas.microsoft.com/office/drawing/2014/main" id="{90C98DA5-2FD3-4520-B7BB-30EFAB89E0EC}"/>
+                <a16:creationId xmlns:a16="http://schemas.microsoft.com/office/drawing/2014/main" id="{0D17828D-9DA5-4587-B7E7-3045D8747FE8}"/>
               </a:ext>
             </a:extLst>
           </p:cNvPr>
@@ -2453,7 +2453,7 @@
           <p:cNvPr id="3" name="Text 1">
             <a:extLst xmlns:a="http://schemas.openxmlformats.org/drawingml/2006/main">
               <a:ext uri="{FF2B5EF4-FFF2-40B4-BE49-F238E27FC236}">
-                <a16:creationId xmlns:a16="http://schemas.microsoft.com/office/drawing/2014/main" id="{705BBB6B-C4BA-4404-B98F-640197EA9A93}"/>
+                <a16:creationId xmlns:a16="http://schemas.microsoft.com/office/drawing/2014/main" id="{E8E7D34B-3AF4-4581-B991-B6A3E8DD0074}"/>
               </a:ext>
             </a:extLst>
           </p:cNvPr>
@@ -2488,7 +2488,7 @@
                 <a:ea typeface="Calibri"/>
                 <a:cs typeface="Calibri"/>
               </a:rPr>
-              <a:t>Presented by: Marawan Abdalla</a:t>
+              <a:t>Presented by: Speaker 2</a:t>
             </a:r>
             <a:endParaRPr sz="1100"/>
           </a:p>
@@ -2499,7 +2499,7 @@
           <p:cNvPr id="4" name="Text 2">
             <a:extLst xmlns:a="http://schemas.openxmlformats.org/drawingml/2006/main">
               <a:ext uri="{FF2B5EF4-FFF2-40B4-BE49-F238E27FC236}">
-                <a16:creationId xmlns:a16="http://schemas.microsoft.com/office/drawing/2014/main" id="{9B955165-E3D5-4C91-8F23-E40689BE22E9}"/>
+                <a16:creationId xmlns:a16="http://schemas.microsoft.com/office/drawing/2014/main" id="{C736904F-D6CE-4216-AEFD-258CD45F4B00}"/>
               </a:ext>
             </a:extLst>
           </p:cNvPr>
@@ -2545,7 +2545,7 @@
           <p:cNvPr id="5" name="Shape 3">
             <a:extLst xmlns:a="http://schemas.openxmlformats.org/drawingml/2006/main">
               <a:ext uri="{FF2B5EF4-FFF2-40B4-BE49-F238E27FC236}">
-                <a16:creationId xmlns:a16="http://schemas.microsoft.com/office/drawing/2014/main" id="{E5A50B28-D6B2-4CDC-9B7B-0937017E3AAC}"/>
+                <a16:creationId xmlns:a16="http://schemas.microsoft.com/office/drawing/2014/main" id="{74795ABD-1D2C-40ED-AD69-39EEDB2E17AD}"/>
               </a:ext>
             </a:extLst>
           </p:cNvPr>
@@ -2572,7 +2572,7 @@
           <p:cNvPr id="6" name="Text 4">
             <a:extLst xmlns:a="http://schemas.openxmlformats.org/drawingml/2006/main">
               <a:ext uri="{FF2B5EF4-FFF2-40B4-BE49-F238E27FC236}">
-                <a16:creationId xmlns:a16="http://schemas.microsoft.com/office/drawing/2014/main" id="{19EF9575-5043-4D3A-99F4-7CAD33143A29}"/>
+                <a16:creationId xmlns:a16="http://schemas.microsoft.com/office/drawing/2014/main" id="{5B6E0E35-CE7E-4C58-BF89-ADBF210D6F1A}"/>
               </a:ext>
             </a:extLst>
           </p:cNvPr>
@@ -2618,7 +2618,7 @@
           <p:cNvPr id="9" name="Text 7">
             <a:extLst xmlns:a="http://schemas.openxmlformats.org/drawingml/2006/main">
               <a:ext uri="{FF2B5EF4-FFF2-40B4-BE49-F238E27FC236}">
-                <a16:creationId xmlns:a16="http://schemas.microsoft.com/office/drawing/2014/main" id="{0B77837F-663A-461C-844F-8375AC0E7946}"/>
+                <a16:creationId xmlns:a16="http://schemas.microsoft.com/office/drawing/2014/main" id="{180912ED-31DF-48FB-A07F-3EA9F6B9B8F7}"/>
               </a:ext>
             </a:extLst>
           </p:cNvPr>
@@ -2664,7 +2664,7 @@
           <p:cNvPr id="10" name="Text 8">
             <a:extLst xmlns:a="http://schemas.openxmlformats.org/drawingml/2006/main">
               <a:ext uri="{FF2B5EF4-FFF2-40B4-BE49-F238E27FC236}">
-                <a16:creationId xmlns:a16="http://schemas.microsoft.com/office/drawing/2014/main" id="{D029AE14-02D3-494F-AE9F-9BD5C32B86C3}"/>
+                <a16:creationId xmlns:a16="http://schemas.microsoft.com/office/drawing/2014/main" id="{C7548D54-59BE-4DD0-9886-74747849DAD5}"/>
               </a:ext>
             </a:extLst>
           </p:cNvPr>
@@ -2710,7 +2710,7 @@
           <p:cNvPr id="11" name="">
             <a:extLst xmlns:a="http://schemas.openxmlformats.org/drawingml/2006/main">
               <a:ext uri="{FF2B5EF4-FFF2-40B4-BE49-F238E27FC236}">
-                <a16:creationId xmlns:a16="http://schemas.microsoft.com/office/drawing/2014/main" id="{44AB218A-688B-49AA-BD2C-8F334FF35E0C}"/>
+                <a16:creationId xmlns:a16="http://schemas.microsoft.com/office/drawing/2014/main" id="{96E562D3-087F-4A00-8FA3-D43A77567AA8}"/>
               </a:ext>
             </a:extLst>
           </p:cNvPr>
@@ -2722,7 +2722,2485 @@
         <p:spPr>
           <a:xfrm xmlns:a="http://schemas.openxmlformats.org/drawingml/2006/main">
             <a:off x="960120" y="2009775"/>
-            <a:ext cx="10271474" cy="685800"/>
+            <a:ext cx="10271474" cy="704850"/>
+          </a:xfrm>
+          <a:prstGeom xmlns:a="http://schemas.openxmlformats.org/drawingml/2006/main" prst="rect">
+            <a:avLst/>
+          </a:prstGeom>
+          <a:noFill xmlns:a="http://schemas.openxmlformats.org/drawingml/2006/main"/>
+          <a:ln xmlns:a="http://schemas.openxmlformats.org/drawingml/2006/main" w="0">
+            <a:noFill/>
+          </a:ln>
+        </p:spPr>
+        <p:txBody>
+          <a:bodyPr xmlns:a="http://schemas.openxmlformats.org/drawingml/2006/main" lIns="0" tIns="0" rIns="0" bIns="0"/>
+          <a:lstStyle xmlns:a="http://schemas.openxmlformats.org/drawingml/2006/main">
+            <a:defPPr>
+              <a:defRPr sz="1725">
+                <a:solidFill>
+                  <a:srgbClr val="1A1A1A"/>
+                </a:solidFill>
+              </a:defRPr>
+            </a:defPPr>
+            <a:lvl1pPr>
+              <a:defRPr sz="1725">
+                <a:solidFill>
+                  <a:srgbClr val="1A1A1A"/>
+                </a:solidFill>
+              </a:defRPr>
+            </a:lvl1pPr>
+            <a:lvl2pPr>
+              <a:defRPr sz="1725">
+                <a:solidFill>
+                  <a:srgbClr val="1A1A1A"/>
+                </a:solidFill>
+              </a:defRPr>
+            </a:lvl2pPr>
+            <a:lvl3pPr>
+              <a:defRPr sz="1725">
+                <a:solidFill>
+                  <a:srgbClr val="1A1A1A"/>
+                </a:solidFill>
+              </a:defRPr>
+            </a:lvl3pPr>
+            <a:lvl4pPr>
+              <a:defRPr sz="1725">
+                <a:solidFill>
+                  <a:srgbClr val="1A1A1A"/>
+                </a:solidFill>
+              </a:defRPr>
+            </a:lvl4pPr>
+            <a:lvl5pPr>
+              <a:defRPr sz="1725">
+                <a:solidFill>
+                  <a:srgbClr val="1A1A1A"/>
+                </a:solidFill>
+              </a:defRPr>
+            </a:lvl5pPr>
+            <a:lvl6pPr>
+              <a:defRPr sz="1725">
+                <a:solidFill>
+                  <a:srgbClr val="1A1A1A"/>
+                </a:solidFill>
+              </a:defRPr>
+            </a:lvl6pPr>
+            <a:lvl7pPr>
+              <a:defRPr sz="1725">
+                <a:solidFill>
+                  <a:srgbClr val="1A1A1A"/>
+                </a:solidFill>
+              </a:defRPr>
+            </a:lvl7pPr>
+            <a:lvl8pPr>
+              <a:defRPr sz="1725">
+                <a:solidFill>
+                  <a:srgbClr val="1A1A1A"/>
+                </a:solidFill>
+              </a:defRPr>
+            </a:lvl8pPr>
+            <a:lvl9pPr>
+              <a:defRPr sz="1725">
+                <a:solidFill>
+                  <a:srgbClr val="1A1A1A"/>
+                </a:solidFill>
+              </a:defRPr>
+            </a:lvl9pPr>
+          </a:lstStyle>
+          <a:p xmlns:a="http://schemas.openxmlformats.org/drawingml/2006/main">
+            <a:pPr>
+              <a:defRPr sz="1725">
+                <a:solidFill>
+                  <a:srgbClr val="1A1A1A"/>
+                </a:solidFill>
+              </a:defRPr>
+            </a:pPr>
+            <a:r>
+              <a:rPr sz="1725">
+                <a:solidFill>
+                  <a:srgbClr val="1A1A1A"/>
+                </a:solidFill>
+              </a:rPr>
+              <a:t>Our AI agent chooses tools and steps to complete a user’s task.</a:t>
+            </a:r>
+          </a:p>
+          <a:p xmlns:a="http://schemas.openxmlformats.org/drawingml/2006/main">
+            <a:pPr>
+              <a:defRPr sz="1725">
+                <a:solidFill>
+                  <a:srgbClr val="1A1A1A"/>
+                </a:solidFill>
+              </a:defRPr>
+            </a:pPr>
+            <a:r>
+              <a:rPr sz="1725">
+                <a:solidFill>
+                  <a:srgbClr val="1A1A1A"/>
+                </a:solidFill>
+              </a:rPr>
+              <a:t>An attacker hides instructions in text the agent reads and tries to change its actions.</a:t>
+            </a:r>
+          </a:p>
+        </p:txBody>
+      </p:sp>
+      <p:sp>
+        <p:nvSpPr>
+          <p:cNvPr id="12" name="">
+            <a:extLst xmlns:a="http://schemas.openxmlformats.org/drawingml/2006/main">
+              <a:ext uri="{FF2B5EF4-FFF2-40B4-BE49-F238E27FC236}">
+                <a16:creationId xmlns:a16="http://schemas.microsoft.com/office/drawing/2014/main" id="{09D59C3A-12BB-42EB-8425-323BA2D3B940}"/>
+              </a:ext>
+            </a:extLst>
+          </p:cNvPr>
+          <p:cNvSpPr>
+            <a:spLocks xmlns:a="http://schemas.openxmlformats.org/drawingml/2006/main" noGrp="1"/>
+          </p:cNvSpPr>
+          <p:nvPr/>
+        </p:nvSpPr>
+        <p:spPr>
+          <a:xfrm xmlns:a="http://schemas.openxmlformats.org/drawingml/2006/main">
+            <a:off x="960120" y="2886075"/>
+            <a:ext cx="10271474" cy="704850"/>
+          </a:xfrm>
+          <a:prstGeom xmlns:a="http://schemas.openxmlformats.org/drawingml/2006/main" prst="rect">
+            <a:avLst/>
+          </a:prstGeom>
+          <a:noFill xmlns:a="http://schemas.openxmlformats.org/drawingml/2006/main"/>
+          <a:ln xmlns:a="http://schemas.openxmlformats.org/drawingml/2006/main" w="0">
+            <a:noFill/>
+          </a:ln>
+        </p:spPr>
+        <p:txBody>
+          <a:bodyPr xmlns:a="http://schemas.openxmlformats.org/drawingml/2006/main" lIns="0" tIns="0" rIns="0" bIns="0"/>
+          <a:lstStyle xmlns:a="http://schemas.openxmlformats.org/drawingml/2006/main">
+            <a:defPPr>
+              <a:defRPr sz="1725">
+                <a:solidFill>
+                  <a:srgbClr val="1A1A1A"/>
+                </a:solidFill>
+              </a:defRPr>
+            </a:defPPr>
+            <a:lvl1pPr>
+              <a:defRPr sz="1725">
+                <a:solidFill>
+                  <a:srgbClr val="1A1A1A"/>
+                </a:solidFill>
+              </a:defRPr>
+            </a:lvl1pPr>
+            <a:lvl2pPr>
+              <a:defRPr sz="1725">
+                <a:solidFill>
+                  <a:srgbClr val="1A1A1A"/>
+                </a:solidFill>
+              </a:defRPr>
+            </a:lvl2pPr>
+            <a:lvl3pPr>
+              <a:defRPr sz="1725">
+                <a:solidFill>
+                  <a:srgbClr val="1A1A1A"/>
+                </a:solidFill>
+              </a:defRPr>
+            </a:lvl3pPr>
+            <a:lvl4pPr>
+              <a:defRPr sz="1725">
+                <a:solidFill>
+                  <a:srgbClr val="1A1A1A"/>
+                </a:solidFill>
+              </a:defRPr>
+            </a:lvl4pPr>
+            <a:lvl5pPr>
+              <a:defRPr sz="1725">
+                <a:solidFill>
+                  <a:srgbClr val="1A1A1A"/>
+                </a:solidFill>
+              </a:defRPr>
+            </a:lvl5pPr>
+            <a:lvl6pPr>
+              <a:defRPr sz="1725">
+                <a:solidFill>
+                  <a:srgbClr val="1A1A1A"/>
+                </a:solidFill>
+              </a:defRPr>
+            </a:lvl6pPr>
+            <a:lvl7pPr>
+              <a:defRPr sz="1725">
+                <a:solidFill>
+                  <a:srgbClr val="1A1A1A"/>
+                </a:solidFill>
+              </a:defRPr>
+            </a:lvl7pPr>
+            <a:lvl8pPr>
+              <a:defRPr sz="1725">
+                <a:solidFill>
+                  <a:srgbClr val="1A1A1A"/>
+                </a:solidFill>
+              </a:defRPr>
+            </a:lvl8pPr>
+            <a:lvl9pPr>
+              <a:defRPr sz="1725">
+                <a:solidFill>
+                  <a:srgbClr val="1A1A1A"/>
+                </a:solidFill>
+              </a:defRPr>
+            </a:lvl9pPr>
+          </a:lstStyle>
+          <a:p xmlns:a="http://schemas.openxmlformats.org/drawingml/2006/main">
+            <a:pPr>
+              <a:defRPr sz="1725">
+                <a:solidFill>
+                  <a:srgbClr val="1A1A1A"/>
+                </a:solidFill>
+              </a:defRPr>
+            </a:pPr>
+            <a:r>
+              <a:rPr sz="1725">
+                <a:solidFill>
+                  <a:srgbClr val="1A1A1A"/>
+                </a:solidFill>
+              </a:rPr>
+              <a:t>Example: the user asks for a policy email. A poisoned document tells the agent</a:t>
+            </a:r>
+          </a:p>
+          <a:p xmlns:a="http://schemas.openxmlformats.org/drawingml/2006/main">
+            <a:pPr>
+              <a:defRPr sz="1725">
+                <a:solidFill>
+                  <a:srgbClr val="1A1A1A"/>
+                </a:solidFill>
+              </a:defRPr>
+            </a:pPr>
+            <a:r>
+              <a:rPr sz="1725">
+                <a:solidFill>
+                  <a:srgbClr val="1A1A1A"/>
+                </a:solidFill>
+              </a:rPr>
+              <a:t>to copy an attacker. Our goal is to stop that action while keeping the task useful.</a:t>
+            </a:r>
+          </a:p>
+        </p:txBody>
+      </p:sp>
+      <p:graphicFrame>
+        <p:nvGraphicFramePr>
+          <p:cNvPr id="13" name="">
+            <a:extLst xmlns:a="http://schemas.openxmlformats.org/drawingml/2006/main">
+              <a:ext uri="{FF2B5EF4-FFF2-40B4-BE49-F238E27FC236}">
+                <a16:creationId xmlns:a16="http://schemas.microsoft.com/office/drawing/2014/main" id="{DD0A1B8F-97B6-41D1-8417-61671A374950}"/>
+              </a:ext>
+            </a:extLst>
+          </p:cNvPr>
+          <p:cNvGraphicFramePr/>
+          <p:nvPr/>
+        </p:nvGraphicFramePr>
+        <p:xfrm>
+          <a:off xmlns:a="http://schemas.openxmlformats.org/drawingml/2006/main" x="731520" y="3886200"/>
+          <a:ext xmlns:a="http://schemas.openxmlformats.org/drawingml/2006/main" cx="10728674" cy="2133600"/>
+        </p:xfrm>
+        <a:graphic xmlns:a="http://schemas.openxmlformats.org/drawingml/2006/main">
+          <a:graphicData uri="http://schemas.openxmlformats.org/drawingml/2006/table">
+            <a:tbl>
+              <a:tblPr/>
+              <a:tblGrid>
+                <a:gridCol w="2857500"/>
+                <a:gridCol w="7871174"/>
+              </a:tblGrid>
+              <a:tr h="426720">
+                <a:tc>
+                  <a:txBody>
+                    <a:bodyPr/>
+                    <a:lstStyle/>
+                    <a:p>
+                      <a:r>
+                        <a:rPr sz="1313" b="1">
+                          <a:solidFill>
+                            <a:srgbClr val="FFFFFF"/>
+                          </a:solidFill>
+                        </a:rPr>
+                        <a:t>Part</a:t>
+                      </a:r>
+                    </a:p>
+                  </a:txBody>
+                  <a:tcPr marL="91440" marR="91440" marT="45720" marB="45720">
+                    <a:lnL w="9525">
+                      <a:solidFill>
+                        <a:srgbClr val="C9D6E3"/>
+                      </a:solidFill>
+                      <a:prstDash val="solid"/>
+                    </a:lnL>
+                    <a:lnR w="9525">
+                      <a:solidFill>
+                        <a:srgbClr val="C9D6E3"/>
+                      </a:solidFill>
+                      <a:prstDash val="solid"/>
+                    </a:lnR>
+                    <a:lnT w="9525">
+                      <a:solidFill>
+                        <a:srgbClr val="C9D6E3"/>
+                      </a:solidFill>
+                      <a:prstDash val="solid"/>
+                    </a:lnT>
+                    <a:lnB w="9525">
+                      <a:solidFill>
+                        <a:srgbClr val="C9D6E3"/>
+                      </a:solidFill>
+                      <a:prstDash val="solid"/>
+                    </a:lnB>
+                    <a:solidFill>
+                      <a:srgbClr val="14375E"/>
+                    </a:solidFill>
+                  </a:tcPr>
+                </a:tc>
+                <a:tc>
+                  <a:txBody>
+                    <a:bodyPr/>
+                    <a:lstStyle/>
+                    <a:p>
+                      <a:r>
+                        <a:rPr sz="1313" b="1">
+                          <a:solidFill>
+                            <a:srgbClr val="FFFFFF"/>
+                          </a:solidFill>
+                        </a:rPr>
+                        <a:t>Our current approach</a:t>
+                      </a:r>
+                    </a:p>
+                  </a:txBody>
+                  <a:tcPr marL="91440" marR="91440" marT="45720" marB="45720">
+                    <a:lnR w="9525">
+                      <a:solidFill>
+                        <a:srgbClr val="C9D6E3"/>
+                      </a:solidFill>
+                      <a:prstDash val="solid"/>
+                    </a:lnR>
+                    <a:lnT w="9525">
+                      <a:solidFill>
+                        <a:srgbClr val="C9D6E3"/>
+                      </a:solidFill>
+                      <a:prstDash val="solid"/>
+                    </a:lnT>
+                    <a:lnB w="9525">
+                      <a:solidFill>
+                        <a:srgbClr val="C9D6E3"/>
+                      </a:solidFill>
+                      <a:prstDash val="solid"/>
+                    </a:lnB>
+                    <a:solidFill>
+                      <a:srgbClr val="14375E"/>
+                    </a:solidFill>
+                  </a:tcPr>
+                </a:tc>
+              </a:tr>
+              <a:tr h="426720">
+                <a:tc>
+                  <a:txBody>
+                    <a:bodyPr/>
+                    <a:lstStyle/>
+                    <a:p>
+                      <a:r>
+                        <a:rPr sz="1313" b="0">
+                          <a:solidFill>
+                            <a:srgbClr val="1A1A1A"/>
+                          </a:solidFill>
+                        </a:rPr>
+                        <a:t>Test environment</a:t>
+                      </a:r>
+                    </a:p>
+                  </a:txBody>
+                  <a:tcPr marL="91440" marR="91440" marT="45720" marB="45720">
+                    <a:lnL w="9525">
+                      <a:solidFill>
+                        <a:srgbClr val="C9D6E3"/>
+                      </a:solidFill>
+                      <a:prstDash val="solid"/>
+                    </a:lnL>
+                    <a:lnR w="9525">
+                      <a:solidFill>
+                        <a:srgbClr val="C9D6E3"/>
+                      </a:solidFill>
+                      <a:prstDash val="solid"/>
+                    </a:lnR>
+                    <a:lnB w="9525">
+                      <a:solidFill>
+                        <a:srgbClr val="C9D6E3"/>
+                      </a:solidFill>
+                      <a:prstDash val="solid"/>
+                    </a:lnB>
+                    <a:solidFill>
+                      <a:srgbClr val="FFFFFF"/>
+                    </a:solidFill>
+                  </a:tcPr>
+                </a:tc>
+                <a:tc>
+                  <a:txBody>
+                    <a:bodyPr/>
+                    <a:lstStyle/>
+                    <a:p>
+                      <a:r>
+                        <a:rPr sz="1313" b="0">
+                          <a:solidFill>
+                            <a:srgbClr val="1A1A1A"/>
+                          </a:solidFill>
+                        </a:rPr>
+                        <a:t>Document search, contact lookup and simulated email.</a:t>
+                      </a:r>
+                    </a:p>
+                  </a:txBody>
+                  <a:tcPr marL="91440" marR="91440" marT="45720" marB="45720">
+                    <a:lnR w="9525">
+                      <a:solidFill>
+                        <a:srgbClr val="C9D6E3"/>
+                      </a:solidFill>
+                      <a:prstDash val="solid"/>
+                    </a:lnR>
+                    <a:lnB w="9525">
+                      <a:solidFill>
+                        <a:srgbClr val="C9D6E3"/>
+                      </a:solidFill>
+                      <a:prstDash val="solid"/>
+                    </a:lnB>
+                    <a:solidFill>
+                      <a:srgbClr val="FFFFFF"/>
+                    </a:solidFill>
+                  </a:tcPr>
+                </a:tc>
+              </a:tr>
+              <a:tr h="426720">
+                <a:tc>
+                  <a:txBody>
+                    <a:bodyPr/>
+                    <a:lstStyle/>
+                    <a:p>
+                      <a:r>
+                        <a:rPr sz="1313" b="0">
+                          <a:solidFill>
+                            <a:srgbClr val="1A1A1A"/>
+                          </a:solidFill>
+                        </a:rPr>
+                        <a:t>Detection</a:t>
+                      </a:r>
+                    </a:p>
+                  </a:txBody>
+                  <a:tcPr marL="91440" marR="91440" marT="45720" marB="45720">
+                    <a:lnL w="9525">
+                      <a:solidFill>
+                        <a:srgbClr val="C9D6E3"/>
+                      </a:solidFill>
+                      <a:prstDash val="solid"/>
+                    </a:lnL>
+                    <a:lnR w="9525">
+                      <a:solidFill>
+                        <a:srgbClr val="C9D6E3"/>
+                      </a:solidFill>
+                      <a:prstDash val="solid"/>
+                    </a:lnR>
+                    <a:lnB w="9525">
+                      <a:solidFill>
+                        <a:srgbClr val="C9D6E3"/>
+                      </a:solidFill>
+                      <a:prstDash val="solid"/>
+                    </a:lnB>
+                    <a:solidFill>
+                      <a:srgbClr val="FFFFFF"/>
+                    </a:solidFill>
+                  </a:tcPr>
+                </a:tc>
+                <a:tc>
+                  <a:txBody>
+                    <a:bodyPr/>
+                    <a:lstStyle/>
+                    <a:p>
+                      <a:r>
+                        <a:rPr sz="1313" b="0">
+                          <a:solidFill>
+                            <a:srgbClr val="1A1A1A"/>
+                          </a:solidFill>
+                        </a:rPr>
+                        <a:t>An AI model checks outside text for attack instructions.</a:t>
+                      </a:r>
+                    </a:p>
+                  </a:txBody>
+                  <a:tcPr marL="91440" marR="91440" marT="45720" marB="45720">
+                    <a:lnR w="9525">
+                      <a:solidFill>
+                        <a:srgbClr val="C9D6E3"/>
+                      </a:solidFill>
+                      <a:prstDash val="solid"/>
+                    </a:lnR>
+                    <a:lnB w="9525">
+                      <a:solidFill>
+                        <a:srgbClr val="C9D6E3"/>
+                      </a:solidFill>
+                      <a:prstDash val="solid"/>
+                    </a:lnB>
+                    <a:solidFill>
+                      <a:srgbClr val="FFFFFF"/>
+                    </a:solidFill>
+                  </a:tcPr>
+                </a:tc>
+              </a:tr>
+              <a:tr h="426720">
+                <a:tc>
+                  <a:txBody>
+                    <a:bodyPr/>
+                    <a:lstStyle/>
+                    <a:p>
+                      <a:r>
+                        <a:rPr sz="1313" b="0">
+                          <a:solidFill>
+                            <a:srgbClr val="1A1A1A"/>
+                          </a:solidFill>
+                        </a:rPr>
+                        <a:t>Prevention</a:t>
+                      </a:r>
+                    </a:p>
+                  </a:txBody>
+                  <a:tcPr marL="91440" marR="91440" marT="45720" marB="45720">
+                    <a:lnL w="9525">
+                      <a:solidFill>
+                        <a:srgbClr val="C9D6E3"/>
+                      </a:solidFill>
+                      <a:prstDash val="solid"/>
+                    </a:lnL>
+                    <a:lnR w="9525">
+                      <a:solidFill>
+                        <a:srgbClr val="C9D6E3"/>
+                      </a:solidFill>
+                      <a:prstDash val="solid"/>
+                    </a:lnR>
+                    <a:lnB w="9525">
+                      <a:solidFill>
+                        <a:srgbClr val="C9D6E3"/>
+                      </a:solidFill>
+                      <a:prstDash val="solid"/>
+                    </a:lnB>
+                    <a:solidFill>
+                      <a:srgbClr val="FFFFFF"/>
+                    </a:solidFill>
+                  </a:tcPr>
+                </a:tc>
+                <a:tc>
+                  <a:txBody>
+                    <a:bodyPr/>
+                    <a:lstStyle/>
+                    <a:p>
+                      <a:r>
+                        <a:rPr sz="1313" b="0">
+                          <a:solidFill>
+                            <a:srgbClr val="1A1A1A"/>
+                          </a:solidFill>
+                        </a:rPr>
+                        <a:t>A gate checks where recipient addresses came from.</a:t>
+                      </a:r>
+                    </a:p>
+                  </a:txBody>
+                  <a:tcPr marL="91440" marR="91440" marT="45720" marB="45720">
+                    <a:lnR w="9525">
+                      <a:solidFill>
+                        <a:srgbClr val="C9D6E3"/>
+                      </a:solidFill>
+                      <a:prstDash val="solid"/>
+                    </a:lnR>
+                    <a:lnB w="9525">
+                      <a:solidFill>
+                        <a:srgbClr val="C9D6E3"/>
+                      </a:solidFill>
+                      <a:prstDash val="solid"/>
+                    </a:lnB>
+                    <a:solidFill>
+                      <a:srgbClr val="FFFFFF"/>
+                    </a:solidFill>
+                  </a:tcPr>
+                </a:tc>
+              </a:tr>
+              <a:tr h="426720">
+                <a:tc>
+                  <a:txBody>
+                    <a:bodyPr/>
+                    <a:lstStyle/>
+                    <a:p>
+                      <a:r>
+                        <a:rPr sz="1313" b="0">
+                          <a:solidFill>
+                            <a:srgbClr val="1A1A1A"/>
+                          </a:solidFill>
+                        </a:rPr>
+                        <a:t>Changes since proposal</a:t>
+                      </a:r>
+                    </a:p>
+                  </a:txBody>
+                  <a:tcPr marL="91440" marR="91440" marT="45720" marB="45720">
+                    <a:lnL w="9525">
+                      <a:solidFill>
+                        <a:srgbClr val="C9D6E3"/>
+                      </a:solidFill>
+                      <a:prstDash val="solid"/>
+                    </a:lnL>
+                    <a:lnR w="9525">
+                      <a:solidFill>
+                        <a:srgbClr val="C9D6E3"/>
+                      </a:solidFill>
+                      <a:prstDash val="solid"/>
+                    </a:lnR>
+                    <a:lnB w="9525">
+                      <a:solidFill>
+                        <a:srgbClr val="C9D6E3"/>
+                      </a:solidFill>
+                      <a:prstDash val="solid"/>
+                    </a:lnB>
+                    <a:solidFill>
+                      <a:srgbClr val="FFFFFF"/>
+                    </a:solidFill>
+                  </a:tcPr>
+                </a:tc>
+                <a:tc>
+                  <a:txBody>
+                    <a:bodyPr/>
+                    <a:lstStyle/>
+                    <a:p>
+                      <a:r>
+                        <a:rPr sz="1313" b="0">
+                          <a:solidFill>
+                            <a:srgbClr val="1A1A1A"/>
+                          </a:solidFill>
+                        </a:rPr>
+                        <a:t>Hosted models, four comparison setups and live email approval.</a:t>
+                      </a:r>
+                    </a:p>
+                  </a:txBody>
+                  <a:tcPr marL="91440" marR="91440" marT="45720" marB="45720">
+                    <a:lnR w="9525">
+                      <a:solidFill>
+                        <a:srgbClr val="C9D6E3"/>
+                      </a:solidFill>
+                      <a:prstDash val="solid"/>
+                    </a:lnR>
+                    <a:lnB w="9525">
+                      <a:solidFill>
+                        <a:srgbClr val="C9D6E3"/>
+                      </a:solidFill>
+                      <a:prstDash val="solid"/>
+                    </a:lnB>
+                    <a:solidFill>
+                      <a:srgbClr val="FFFFFF"/>
+                    </a:solidFill>
+                  </a:tcPr>
+                </a:tc>
+              </a:tr>
+            </a:tbl>
+          </a:graphicData>
+        </a:graphic>
+      </p:graphicFrame>
+    </p:spTree>
+    <p:extLst>
+      <p:ext uri="{BB962C8B-B14F-4D97-AF65-F5344CB8AC3E}">
+        <p14:creationId xmlns:p14="http://schemas.microsoft.com/office/powerpoint/2010/main" val="1921065667"/>
+      </p:ext>
+    </p:extLst>
+  </p:cSld>
+</p:sld>
+</file>
+
+<file path=ppt/slides/slide3.xml><?xml version="1.0" encoding="utf-8"?>
+<p:sld xmlns:p="http://schemas.openxmlformats.org/presentationml/2006/main">
+  <p:cSld>
+    <p:bg>
+      <p:bgPr>
+        <a:solidFill xmlns:a="http://schemas.openxmlformats.org/drawingml/2006/main">
+          <a:srgbClr val="FFFFFF"/>
+        </a:solidFill>
+      </p:bgPr>
+    </p:bg>
+    <p:spTree>
+      <p:nvGrpSpPr>
+        <p:cNvPr id="1" name=""/>
+        <p:cNvGrpSpPr/>
+        <p:nvPr/>
+      </p:nvGrpSpPr>
+      <p:grpSpPr>
+        <a:xfrm xmlns:a="http://schemas.openxmlformats.org/drawingml/2006/main"/>
+      </p:grpSpPr>
+      <p:sp>
+        <p:nvSpPr>
+          <p:cNvPr id="2" name="Text 0">
+            <a:extLst xmlns:a="http://schemas.openxmlformats.org/drawingml/2006/main">
+              <a:ext uri="{FF2B5EF4-FFF2-40B4-BE49-F238E27FC236}">
+                <a16:creationId xmlns:a16="http://schemas.microsoft.com/office/drawing/2014/main" id="{8063E416-9C61-479A-9FE6-754AAFC47E2F}"/>
+              </a:ext>
+            </a:extLst>
+          </p:cNvPr>
+          <p:cNvSpPr>
+            <a:spLocks xmlns:a="http://schemas.openxmlformats.org/drawingml/2006/main" noGrp="1"/>
+          </p:cNvSpPr>
+          <p:nvPr/>
+        </p:nvSpPr>
+        <p:spPr>
+          <a:xfrm xmlns:a="http://schemas.openxmlformats.org/drawingml/2006/main">
+            <a:off x="731520" y="411480"/>
+            <a:ext cx="5486400" cy="320040"/>
+          </a:xfrm>
+          <a:prstGeom xmlns:a="http://schemas.openxmlformats.org/drawingml/2006/main" prst="rect">
+            <a:avLst/>
+          </a:prstGeom>
+          <a:noFill xmlns:a="http://schemas.openxmlformats.org/drawingml/2006/main"/>
+        </p:spPr>
+        <p:txBody>
+          <a:bodyPr xmlns:a="http://schemas.openxmlformats.org/drawingml/2006/main" wrap="square" lIns="0" tIns="0" rIns="0" bIns="0" anchor="ctr"/>
+          <a:lstStyle xmlns:a="http://schemas.openxmlformats.org/drawingml/2006/main"/>
+          <a:p xmlns:a="http://schemas.openxmlformats.org/drawingml/2006/main">
+            <a:pPr marL="0" indent="0">
+              <a:buNone/>
+            </a:pPr>
+            <a:r>
+              <a:rPr sz="1200" b="1" spc="100">
+                <a:solidFill>
+                  <a:srgbClr val="1F5C99"/>
+                </a:solidFill>
+                <a:latin typeface="Calibri"/>
+                <a:ea typeface="Calibri"/>
+                <a:cs typeface="Calibri"/>
+              </a:rPr>
+              <a:t>SECTION 2 OF 4</a:t>
+            </a:r>
+            <a:endParaRPr sz="1200"/>
+          </a:p>
+        </p:txBody>
+      </p:sp>
+      <p:sp>
+        <p:nvSpPr>
+          <p:cNvPr id="3" name="Text 1">
+            <a:extLst xmlns:a="http://schemas.openxmlformats.org/drawingml/2006/main">
+              <a:ext uri="{FF2B5EF4-FFF2-40B4-BE49-F238E27FC236}">
+                <a16:creationId xmlns:a16="http://schemas.microsoft.com/office/drawing/2014/main" id="{F2105F84-72F0-41BD-B80D-9B6CFFC10AAF}"/>
+              </a:ext>
+            </a:extLst>
+          </p:cNvPr>
+          <p:cNvSpPr>
+            <a:spLocks xmlns:a="http://schemas.openxmlformats.org/drawingml/2006/main" noGrp="1"/>
+          </p:cNvSpPr>
+          <p:nvPr/>
+        </p:nvSpPr>
+        <p:spPr>
+          <a:xfrm xmlns:a="http://schemas.openxmlformats.org/drawingml/2006/main">
+            <a:off x="8899855" y="411480"/>
+            <a:ext cx="2560320" cy="320040"/>
+          </a:xfrm>
+          <a:prstGeom xmlns:a="http://schemas.openxmlformats.org/drawingml/2006/main" prst="rect">
+            <a:avLst/>
+          </a:prstGeom>
+          <a:noFill xmlns:a="http://schemas.openxmlformats.org/drawingml/2006/main"/>
+        </p:spPr>
+        <p:txBody>
+          <a:bodyPr xmlns:a="http://schemas.openxmlformats.org/drawingml/2006/main" wrap="square" lIns="0" tIns="0" rIns="0" bIns="0" anchor="ctr"/>
+          <a:lstStyle xmlns:a="http://schemas.openxmlformats.org/drawingml/2006/main"/>
+          <a:p xmlns:a="http://schemas.openxmlformats.org/drawingml/2006/main">
+            <a:pPr marL="0" indent="0" algn="r">
+              <a:buNone/>
+            </a:pPr>
+            <a:r>
+              <a:rPr sz="1100" i="1">
+                <a:solidFill>
+                  <a:srgbClr val="5A6672"/>
+                </a:solidFill>
+                <a:latin typeface="Calibri"/>
+                <a:ea typeface="Calibri"/>
+                <a:cs typeface="Calibri"/>
+              </a:rPr>
+              <a:t>Presented by: Speaker 3</a:t>
+            </a:r>
+            <a:endParaRPr sz="1100"/>
+          </a:p>
+        </p:txBody>
+      </p:sp>
+      <p:sp>
+        <p:nvSpPr>
+          <p:cNvPr id="4" name="Text 2">
+            <a:extLst xmlns:a="http://schemas.openxmlformats.org/drawingml/2006/main">
+              <a:ext uri="{FF2B5EF4-FFF2-40B4-BE49-F238E27FC236}">
+                <a16:creationId xmlns:a16="http://schemas.microsoft.com/office/drawing/2014/main" id="{68C58182-B9AA-449A-BB34-A07723BB8B05}"/>
+              </a:ext>
+            </a:extLst>
+          </p:cNvPr>
+          <p:cNvSpPr>
+            <a:spLocks xmlns:a="http://schemas.openxmlformats.org/drawingml/2006/main" noGrp="1"/>
+          </p:cNvSpPr>
+          <p:nvPr/>
+        </p:nvSpPr>
+        <p:spPr>
+          <a:xfrm xmlns:a="http://schemas.openxmlformats.org/drawingml/2006/main">
+            <a:off x="731520" y="713232"/>
+            <a:ext cx="10728655" cy="640080"/>
+          </a:xfrm>
+          <a:prstGeom xmlns:a="http://schemas.openxmlformats.org/drawingml/2006/main" prst="rect">
+            <a:avLst/>
+          </a:prstGeom>
+          <a:noFill xmlns:a="http://schemas.openxmlformats.org/drawingml/2006/main"/>
+        </p:spPr>
+        <p:txBody>
+          <a:bodyPr xmlns:a="http://schemas.openxmlformats.org/drawingml/2006/main" wrap="square" lIns="0" tIns="0" rIns="0" bIns="0" anchor="ctr"/>
+          <a:lstStyle xmlns:a="http://schemas.openxmlformats.org/drawingml/2006/main"/>
+          <a:p xmlns:a="http://schemas.openxmlformats.org/drawingml/2006/main">
+            <a:pPr marL="0" indent="0">
+              <a:buNone/>
+            </a:pPr>
+            <a:r>
+              <a:rPr sz="2800" b="1">
+                <a:solidFill>
+                  <a:srgbClr val="14375E"/>
+                </a:solidFill>
+                <a:latin typeface="Calibri"/>
+                <a:ea typeface="Calibri"/>
+                <a:cs typeface="Calibri"/>
+              </a:rPr>
+              <a:t>Progress Update</a:t>
+            </a:r>
+            <a:endParaRPr sz="2800"/>
+          </a:p>
+        </p:txBody>
+      </p:sp>
+      <p:sp>
+        <p:nvSpPr>
+          <p:cNvPr id="5" name="Shape 3">
+            <a:extLst xmlns:a="http://schemas.openxmlformats.org/drawingml/2006/main">
+              <a:ext uri="{FF2B5EF4-FFF2-40B4-BE49-F238E27FC236}">
+                <a16:creationId xmlns:a16="http://schemas.microsoft.com/office/drawing/2014/main" id="{098C6221-EF02-43C5-98B5-915D9F1CC56B}"/>
+              </a:ext>
+            </a:extLst>
+          </p:cNvPr>
+          <p:cNvSpPr>
+            <a:spLocks xmlns:a="http://schemas.openxmlformats.org/drawingml/2006/main" noGrp="1"/>
+          </p:cNvSpPr>
+          <p:nvPr/>
+        </p:nvSpPr>
+        <p:spPr>
+          <a:xfrm xmlns:a="http://schemas.openxmlformats.org/drawingml/2006/main">
+            <a:off x="731520" y="1554480"/>
+            <a:ext cx="10728655" cy="2103120"/>
+          </a:xfrm>
+          <a:prstGeom xmlns:a="http://schemas.openxmlformats.org/drawingml/2006/main" prst="rect">
+            <a:avLst/>
+          </a:prstGeom>
+          <a:solidFill xmlns:a="http://schemas.openxmlformats.org/drawingml/2006/main">
+            <a:srgbClr val="F2F5F9"/>
+          </a:solidFill>
+        </p:spPr>
+      </p:sp>
+      <p:sp>
+        <p:nvSpPr>
+          <p:cNvPr id="6" name="Text 4">
+            <a:extLst xmlns:a="http://schemas.openxmlformats.org/drawingml/2006/main">
+              <a:ext uri="{FF2B5EF4-FFF2-40B4-BE49-F238E27FC236}">
+                <a16:creationId xmlns:a16="http://schemas.microsoft.com/office/drawing/2014/main" id="{05B36A27-0E05-4DEE-87AC-7C67543427C4}"/>
+              </a:ext>
+            </a:extLst>
+          </p:cNvPr>
+          <p:cNvSpPr>
+            <a:spLocks xmlns:a="http://schemas.openxmlformats.org/drawingml/2006/main" noGrp="1"/>
+          </p:cNvSpPr>
+          <p:nvPr/>
+        </p:nvSpPr>
+        <p:spPr>
+          <a:xfrm xmlns:a="http://schemas.openxmlformats.org/drawingml/2006/main">
+            <a:off x="960120" y="1691640"/>
+            <a:ext cx="5486400" cy="274320"/>
+          </a:xfrm>
+          <a:prstGeom xmlns:a="http://schemas.openxmlformats.org/drawingml/2006/main" prst="rect">
+            <a:avLst/>
+          </a:prstGeom>
+          <a:noFill xmlns:a="http://schemas.openxmlformats.org/drawingml/2006/main"/>
+        </p:spPr>
+        <p:txBody>
+          <a:bodyPr xmlns:a="http://schemas.openxmlformats.org/drawingml/2006/main" wrap="square" lIns="0" tIns="0" rIns="0" bIns="0" anchor="ctr"/>
+          <a:lstStyle xmlns:a="http://schemas.openxmlformats.org/drawingml/2006/main"/>
+          <a:p xmlns:a="http://schemas.openxmlformats.org/drawingml/2006/main">
+            <a:pPr marL="0" indent="0">
+              <a:buNone/>
+            </a:pPr>
+            <a:r>
+              <a:rPr sz="1100" b="1">
+                <a:solidFill>
+                  <a:srgbClr val="5A6672"/>
+                </a:solidFill>
+                <a:latin typeface="Calibri"/>
+                <a:ea typeface="Calibri"/>
+                <a:cs typeface="Calibri"/>
+              </a:rPr>
+              <a:t>IMPLEMENTATION AND EVIDENCE</a:t>
+            </a:r>
+            <a:endParaRPr sz="1100"/>
+          </a:p>
+        </p:txBody>
+      </p:sp>
+      <p:sp>
+        <p:nvSpPr>
+          <p:cNvPr id="9" name="Text 7">
+            <a:extLst xmlns:a="http://schemas.openxmlformats.org/drawingml/2006/main">
+              <a:ext uri="{FF2B5EF4-FFF2-40B4-BE49-F238E27FC236}">
+                <a16:creationId xmlns:a16="http://schemas.microsoft.com/office/drawing/2014/main" id="{FFB8CF88-2D91-411C-958A-8BE85BF38B8D}"/>
+              </a:ext>
+            </a:extLst>
+          </p:cNvPr>
+          <p:cNvSpPr>
+            <a:spLocks xmlns:a="http://schemas.openxmlformats.org/drawingml/2006/main" noGrp="1"/>
+          </p:cNvSpPr>
+          <p:nvPr/>
+        </p:nvSpPr>
+        <p:spPr>
+          <a:xfrm xmlns:a="http://schemas.openxmlformats.org/drawingml/2006/main">
+            <a:off x="457200" y="6446520"/>
+            <a:ext cx="7315200" cy="274320"/>
+          </a:xfrm>
+          <a:prstGeom xmlns:a="http://schemas.openxmlformats.org/drawingml/2006/main" prst="rect">
+            <a:avLst/>
+          </a:prstGeom>
+          <a:noFill xmlns:a="http://schemas.openxmlformats.org/drawingml/2006/main"/>
+        </p:spPr>
+        <p:txBody>
+          <a:bodyPr xmlns:a="http://schemas.openxmlformats.org/drawingml/2006/main" wrap="square" lIns="0" tIns="0" rIns="0" bIns="0" anchor="ctr"/>
+          <a:lstStyle xmlns:a="http://schemas.openxmlformats.org/drawingml/2006/main"/>
+          <a:p xmlns:a="http://schemas.openxmlformats.org/drawingml/2006/main">
+            <a:pPr marL="0" indent="0">
+              <a:buNone/>
+            </a:pPr>
+            <a:r>
+              <a:rPr sz="1000">
+                <a:solidFill>
+                  <a:srgbClr val="5A6672"/>
+                </a:solidFill>
+                <a:latin typeface="Calibri"/>
+                <a:ea typeface="Calibri"/>
+                <a:cs typeface="Calibri"/>
+              </a:rPr>
+              <a:t>COE444 Computer Security  |  Progress Presentation Template</a:t>
+            </a:r>
+            <a:endParaRPr sz="1000"/>
+          </a:p>
+        </p:txBody>
+      </p:sp>
+      <p:sp>
+        <p:nvSpPr>
+          <p:cNvPr id="10" name="Text 8">
+            <a:extLst xmlns:a="http://schemas.openxmlformats.org/drawingml/2006/main">
+              <a:ext uri="{FF2B5EF4-FFF2-40B4-BE49-F238E27FC236}">
+                <a16:creationId xmlns:a16="http://schemas.microsoft.com/office/drawing/2014/main" id="{B3ADDB78-2973-4983-953F-7E3576F4D0C7}"/>
+              </a:ext>
+            </a:extLst>
+          </p:cNvPr>
+          <p:cNvSpPr>
+            <a:spLocks xmlns:a="http://schemas.openxmlformats.org/drawingml/2006/main" noGrp="1"/>
+          </p:cNvSpPr>
+          <p:nvPr/>
+        </p:nvSpPr>
+        <p:spPr>
+          <a:xfrm xmlns:a="http://schemas.openxmlformats.org/drawingml/2006/main">
+            <a:off x="11277295" y="6446520"/>
+            <a:ext cx="457200" cy="274320"/>
+          </a:xfrm>
+          <a:prstGeom xmlns:a="http://schemas.openxmlformats.org/drawingml/2006/main" prst="rect">
+            <a:avLst/>
+          </a:prstGeom>
+          <a:noFill xmlns:a="http://schemas.openxmlformats.org/drawingml/2006/main"/>
+        </p:spPr>
+        <p:txBody>
+          <a:bodyPr xmlns:a="http://schemas.openxmlformats.org/drawingml/2006/main" wrap="square" lIns="0" tIns="0" rIns="0" bIns="0" anchor="ctr"/>
+          <a:lstStyle xmlns:a="http://schemas.openxmlformats.org/drawingml/2006/main"/>
+          <a:p xmlns:a="http://schemas.openxmlformats.org/drawingml/2006/main">
+            <a:pPr marL="0" indent="0" algn="r">
+              <a:buNone/>
+            </a:pPr>
+            <a:r>
+              <a:rPr sz="1000">
+                <a:solidFill>
+                  <a:srgbClr val="5A6672"/>
+                </a:solidFill>
+                <a:latin typeface="Calibri"/>
+                <a:ea typeface="Calibri"/>
+                <a:cs typeface="Calibri"/>
+              </a:rPr>
+              <a:t>3</a:t>
+            </a:r>
+            <a:endParaRPr sz="1000"/>
+          </a:p>
+        </p:txBody>
+      </p:sp>
+      <p:sp>
+        <p:nvSpPr>
+          <p:cNvPr id="11" name="">
+            <a:extLst xmlns:a="http://schemas.openxmlformats.org/drawingml/2006/main">
+              <a:ext uri="{FF2B5EF4-FFF2-40B4-BE49-F238E27FC236}">
+                <a16:creationId xmlns:a16="http://schemas.microsoft.com/office/drawing/2014/main" id="{35872F6C-D03E-4ED2-9A5A-3A662673CE24}"/>
+              </a:ext>
+            </a:extLst>
+          </p:cNvPr>
+          <p:cNvSpPr>
+            <a:spLocks xmlns:a="http://schemas.openxmlformats.org/drawingml/2006/main" noGrp="1"/>
+          </p:cNvSpPr>
+          <p:nvPr/>
+        </p:nvSpPr>
+        <p:spPr>
+          <a:xfrm xmlns:a="http://schemas.openxmlformats.org/drawingml/2006/main">
+            <a:off x="960120" y="2009775"/>
+            <a:ext cx="10271474" cy="628650"/>
+          </a:xfrm>
+          <a:prstGeom xmlns:a="http://schemas.openxmlformats.org/drawingml/2006/main" prst="rect">
+            <a:avLst/>
+          </a:prstGeom>
+          <a:noFill xmlns:a="http://schemas.openxmlformats.org/drawingml/2006/main"/>
+          <a:ln xmlns:a="http://schemas.openxmlformats.org/drawingml/2006/main" w="0">
+            <a:noFill/>
+          </a:ln>
+        </p:spPr>
+        <p:txBody>
+          <a:bodyPr xmlns:a="http://schemas.openxmlformats.org/drawingml/2006/main" lIns="0" tIns="0" rIns="0" bIns="0"/>
+          <a:lstStyle xmlns:a="http://schemas.openxmlformats.org/drawingml/2006/main">
+            <a:defPPr>
+              <a:defRPr sz="1575">
+                <a:solidFill>
+                  <a:srgbClr val="1A1A1A"/>
+                </a:solidFill>
+              </a:defRPr>
+            </a:defPPr>
+            <a:lvl1pPr>
+              <a:defRPr sz="1575">
+                <a:solidFill>
+                  <a:srgbClr val="1A1A1A"/>
+                </a:solidFill>
+              </a:defRPr>
+            </a:lvl1pPr>
+            <a:lvl2pPr>
+              <a:defRPr sz="1575">
+                <a:solidFill>
+                  <a:srgbClr val="1A1A1A"/>
+                </a:solidFill>
+              </a:defRPr>
+            </a:lvl2pPr>
+            <a:lvl3pPr>
+              <a:defRPr sz="1575">
+                <a:solidFill>
+                  <a:srgbClr val="1A1A1A"/>
+                </a:solidFill>
+              </a:defRPr>
+            </a:lvl3pPr>
+            <a:lvl4pPr>
+              <a:defRPr sz="1575">
+                <a:solidFill>
+                  <a:srgbClr val="1A1A1A"/>
+                </a:solidFill>
+              </a:defRPr>
+            </a:lvl4pPr>
+            <a:lvl5pPr>
+              <a:defRPr sz="1575">
+                <a:solidFill>
+                  <a:srgbClr val="1A1A1A"/>
+                </a:solidFill>
+              </a:defRPr>
+            </a:lvl5pPr>
+            <a:lvl6pPr>
+              <a:defRPr sz="1575">
+                <a:solidFill>
+                  <a:srgbClr val="1A1A1A"/>
+                </a:solidFill>
+              </a:defRPr>
+            </a:lvl6pPr>
+            <a:lvl7pPr>
+              <a:defRPr sz="1575">
+                <a:solidFill>
+                  <a:srgbClr val="1A1A1A"/>
+                </a:solidFill>
+              </a:defRPr>
+            </a:lvl7pPr>
+            <a:lvl8pPr>
+              <a:defRPr sz="1575">
+                <a:solidFill>
+                  <a:srgbClr val="1A1A1A"/>
+                </a:solidFill>
+              </a:defRPr>
+            </a:lvl8pPr>
+            <a:lvl9pPr>
+              <a:defRPr sz="1575">
+                <a:solidFill>
+                  <a:srgbClr val="1A1A1A"/>
+                </a:solidFill>
+              </a:defRPr>
+            </a:lvl9pPr>
+          </a:lstStyle>
+          <a:p xmlns:a="http://schemas.openxmlformats.org/drawingml/2006/main">
+            <a:pPr>
+              <a:defRPr sz="1575">
+                <a:solidFill>
+                  <a:srgbClr val="1A1A1A"/>
+                </a:solidFill>
+              </a:defRPr>
+            </a:pPr>
+            <a:r>
+              <a:rPr sz="1575">
+                <a:solidFill>
+                  <a:srgbClr val="1A1A1A"/>
+                </a:solidFill>
+              </a:rPr>
+              <a:t>Built: an agent that chooses tools, attack tests, a detector and a recipient gate.</a:t>
+            </a:r>
+          </a:p>
+          <a:p xmlns:a="http://schemas.openxmlformats.org/drawingml/2006/main">
+            <a:pPr>
+              <a:defRPr sz="1575">
+                <a:solidFill>
+                  <a:srgbClr val="1A1A1A"/>
+                </a:solidFill>
+              </a:defRPr>
+            </a:pPr>
+            <a:r>
+              <a:rPr sz="1575">
+                <a:solidFill>
+                  <a:srgbClr val="1A1A1A"/>
+                </a:solidFill>
+              </a:rPr>
+              <a:t>Recent work: approval before protected live sends and a search startup fix.</a:t>
+            </a:r>
+          </a:p>
+        </p:txBody>
+      </p:sp>
+      <p:sp>
+        <p:nvSpPr>
+          <p:cNvPr id="12" name="">
+            <a:extLst xmlns:a="http://schemas.openxmlformats.org/drawingml/2006/main">
+              <a:ext uri="{FF2B5EF4-FFF2-40B4-BE49-F238E27FC236}">
+                <a16:creationId xmlns:a16="http://schemas.microsoft.com/office/drawing/2014/main" id="{CFECC48F-DCC1-4B9A-9540-ABF20495E020}"/>
+              </a:ext>
+            </a:extLst>
+          </p:cNvPr>
+          <p:cNvSpPr>
+            <a:spLocks xmlns:a="http://schemas.openxmlformats.org/drawingml/2006/main" noGrp="1"/>
+          </p:cNvSpPr>
+          <p:nvPr/>
+        </p:nvSpPr>
+        <p:spPr>
+          <a:xfrm xmlns:a="http://schemas.openxmlformats.org/drawingml/2006/main">
+            <a:off x="960120" y="2771775"/>
+            <a:ext cx="10271474" cy="628650"/>
+          </a:xfrm>
+          <a:prstGeom xmlns:a="http://schemas.openxmlformats.org/drawingml/2006/main" prst="rect">
+            <a:avLst/>
+          </a:prstGeom>
+          <a:noFill xmlns:a="http://schemas.openxmlformats.org/drawingml/2006/main"/>
+          <a:ln xmlns:a="http://schemas.openxmlformats.org/drawingml/2006/main" w="0">
+            <a:noFill/>
+          </a:ln>
+        </p:spPr>
+        <p:txBody>
+          <a:bodyPr xmlns:a="http://schemas.openxmlformats.org/drawingml/2006/main" lIns="0" tIns="0" rIns="0" bIns="0"/>
+          <a:lstStyle xmlns:a="http://schemas.openxmlformats.org/drawingml/2006/main">
+            <a:defPPr>
+              <a:defRPr sz="1575">
+                <a:solidFill>
+                  <a:srgbClr val="1A1A1A"/>
+                </a:solidFill>
+              </a:defRPr>
+            </a:defPPr>
+            <a:lvl1pPr>
+              <a:defRPr sz="1575">
+                <a:solidFill>
+                  <a:srgbClr val="1A1A1A"/>
+                </a:solidFill>
+              </a:defRPr>
+            </a:lvl1pPr>
+            <a:lvl2pPr>
+              <a:defRPr sz="1575">
+                <a:solidFill>
+                  <a:srgbClr val="1A1A1A"/>
+                </a:solidFill>
+              </a:defRPr>
+            </a:lvl2pPr>
+            <a:lvl3pPr>
+              <a:defRPr sz="1575">
+                <a:solidFill>
+                  <a:srgbClr val="1A1A1A"/>
+                </a:solidFill>
+              </a:defRPr>
+            </a:lvl3pPr>
+            <a:lvl4pPr>
+              <a:defRPr sz="1575">
+                <a:solidFill>
+                  <a:srgbClr val="1A1A1A"/>
+                </a:solidFill>
+              </a:defRPr>
+            </a:lvl4pPr>
+            <a:lvl5pPr>
+              <a:defRPr sz="1575">
+                <a:solidFill>
+                  <a:srgbClr val="1A1A1A"/>
+                </a:solidFill>
+              </a:defRPr>
+            </a:lvl5pPr>
+            <a:lvl6pPr>
+              <a:defRPr sz="1575">
+                <a:solidFill>
+                  <a:srgbClr val="1A1A1A"/>
+                </a:solidFill>
+              </a:defRPr>
+            </a:lvl6pPr>
+            <a:lvl7pPr>
+              <a:defRPr sz="1575">
+                <a:solidFill>
+                  <a:srgbClr val="1A1A1A"/>
+                </a:solidFill>
+              </a:defRPr>
+            </a:lvl7pPr>
+            <a:lvl8pPr>
+              <a:defRPr sz="1575">
+                <a:solidFill>
+                  <a:srgbClr val="1A1A1A"/>
+                </a:solidFill>
+              </a:defRPr>
+            </a:lvl8pPr>
+            <a:lvl9pPr>
+              <a:defRPr sz="1575">
+                <a:solidFill>
+                  <a:srgbClr val="1A1A1A"/>
+                </a:solidFill>
+              </a:defRPr>
+            </a:lvl9pPr>
+          </a:lstStyle>
+          <a:p xmlns:a="http://schemas.openxmlformats.org/drawingml/2006/main">
+            <a:pPr>
+              <a:defRPr sz="1575">
+                <a:solidFill>
+                  <a:srgbClr val="1A1A1A"/>
+                </a:solidFill>
+              </a:defRPr>
+            </a:pPr>
+            <a:r>
+              <a:rPr sz="1575">
+                <a:solidFill>
+                  <a:srgbClr val="1A1A1A"/>
+                </a:solidFill>
+              </a:rPr>
+              <a:t>Data: 23 custom attacks + 200 adapted from Microsoft’s LLMail-Inject dataset.</a:t>
+            </a:r>
+          </a:p>
+          <a:p xmlns:a="http://schemas.openxmlformats.org/drawingml/2006/main">
+            <a:pPr>
+              <a:defRPr sz="1575">
+                <a:solidFill>
+                  <a:srgbClr val="1A1A1A"/>
+                </a:solidFill>
+              </a:defRPr>
+            </a:pPr>
+            <a:r>
+              <a:rPr sz="1575">
+                <a:solidFill>
+                  <a:srgbClr val="1A1A1A"/>
+                </a:solidFill>
+              </a:rPr>
+              <a:t>Checks: 256 software checks pass. Main experiment: 10 custom attacks, 3 tries each.</a:t>
+            </a:r>
+          </a:p>
+        </p:txBody>
+      </p:sp>
+      <p:graphicFrame>
+        <p:nvGraphicFramePr>
+          <p:cNvPr id="13" name="">
+            <a:extLst xmlns:a="http://schemas.openxmlformats.org/drawingml/2006/main">
+              <a:ext uri="{FF2B5EF4-FFF2-40B4-BE49-F238E27FC236}">
+                <a16:creationId xmlns:a16="http://schemas.microsoft.com/office/drawing/2014/main" id="{B5FC41C4-90E0-4520-9550-F69B7C8D1338}"/>
+              </a:ext>
+            </a:extLst>
+          </p:cNvPr>
+          <p:cNvGraphicFramePr/>
+          <p:nvPr/>
+        </p:nvGraphicFramePr>
+        <p:xfrm>
+          <a:off xmlns:a="http://schemas.openxmlformats.org/drawingml/2006/main" x="731520" y="3600450"/>
+          <a:ext xmlns:a="http://schemas.openxmlformats.org/drawingml/2006/main" cx="10728674" cy="1952625"/>
+        </p:xfrm>
+        <a:graphic xmlns:a="http://schemas.openxmlformats.org/drawingml/2006/main">
+          <a:graphicData uri="http://schemas.openxmlformats.org/drawingml/2006/table">
+            <a:tbl>
+              <a:tblPr/>
+              <a:tblGrid>
+                <a:gridCol w="4286250"/>
+                <a:gridCol w="2857500"/>
+                <a:gridCol w="3584924"/>
+              </a:tblGrid>
+              <a:tr h="390525">
+                <a:tc>
+                  <a:txBody>
+                    <a:bodyPr/>
+                    <a:lstStyle/>
+                    <a:p>
+                      <a:r>
+                        <a:rPr sz="1313" b="1">
+                          <a:solidFill>
+                            <a:srgbClr val="FFFFFF"/>
+                          </a:solidFill>
+                        </a:rPr>
+                        <a:t>Setup</a:t>
+                      </a:r>
+                    </a:p>
+                  </a:txBody>
+                  <a:tcPr marL="91440" marR="91440" marT="45720" marB="45720">
+                    <a:lnL w="9525">
+                      <a:solidFill>
+                        <a:srgbClr val="C9D6E3"/>
+                      </a:solidFill>
+                      <a:prstDash val="solid"/>
+                    </a:lnL>
+                    <a:lnR w="9525">
+                      <a:solidFill>
+                        <a:srgbClr val="C9D6E3"/>
+                      </a:solidFill>
+                      <a:prstDash val="solid"/>
+                    </a:lnR>
+                    <a:lnT w="9525">
+                      <a:solidFill>
+                        <a:srgbClr val="C9D6E3"/>
+                      </a:solidFill>
+                      <a:prstDash val="solid"/>
+                    </a:lnT>
+                    <a:lnB w="9525">
+                      <a:solidFill>
+                        <a:srgbClr val="C9D6E3"/>
+                      </a:solidFill>
+                      <a:prstDash val="solid"/>
+                    </a:lnB>
+                    <a:solidFill>
+                      <a:srgbClr val="14375E"/>
+                    </a:solidFill>
+                  </a:tcPr>
+                </a:tc>
+                <a:tc>
+                  <a:txBody>
+                    <a:bodyPr/>
+                    <a:lstStyle/>
+                    <a:p>
+                      <a:r>
+                        <a:rPr sz="1313" b="1">
+                          <a:solidFill>
+                            <a:srgbClr val="FFFFFF"/>
+                          </a:solidFill>
+                        </a:rPr>
+                        <a:t>Successful attacks</a:t>
+                      </a:r>
+                    </a:p>
+                  </a:txBody>
+                  <a:tcPr marL="91440" marR="91440" marT="45720" marB="45720">
+                    <a:lnR w="9525">
+                      <a:solidFill>
+                        <a:srgbClr val="C9D6E3"/>
+                      </a:solidFill>
+                      <a:prstDash val="solid"/>
+                    </a:lnR>
+                    <a:lnT w="9525">
+                      <a:solidFill>
+                        <a:srgbClr val="C9D6E3"/>
+                      </a:solidFill>
+                      <a:prstDash val="solid"/>
+                    </a:lnT>
+                    <a:lnB w="9525">
+                      <a:solidFill>
+                        <a:srgbClr val="C9D6E3"/>
+                      </a:solidFill>
+                      <a:prstDash val="solid"/>
+                    </a:lnB>
+                    <a:solidFill>
+                      <a:srgbClr val="14375E"/>
+                    </a:solidFill>
+                  </a:tcPr>
+                </a:tc>
+                <a:tc>
+                  <a:txBody>
+                    <a:bodyPr/>
+                    <a:lstStyle/>
+                    <a:p>
+                      <a:r>
+                        <a:rPr sz="1313" b="1">
+                          <a:solidFill>
+                            <a:srgbClr val="FFFFFF"/>
+                          </a:solidFill>
+                        </a:rPr>
+                        <a:t>Normal tasks completed</a:t>
+                      </a:r>
+                    </a:p>
+                  </a:txBody>
+                  <a:tcPr marL="91440" marR="91440" marT="45720" marB="45720">
+                    <a:lnR w="9525">
+                      <a:solidFill>
+                        <a:srgbClr val="C9D6E3"/>
+                      </a:solidFill>
+                      <a:prstDash val="solid"/>
+                    </a:lnR>
+                    <a:lnT w="9525">
+                      <a:solidFill>
+                        <a:srgbClr val="C9D6E3"/>
+                      </a:solidFill>
+                      <a:prstDash val="solid"/>
+                    </a:lnT>
+                    <a:lnB w="9525">
+                      <a:solidFill>
+                        <a:srgbClr val="C9D6E3"/>
+                      </a:solidFill>
+                      <a:prstDash val="solid"/>
+                    </a:lnB>
+                    <a:solidFill>
+                      <a:srgbClr val="14375E"/>
+                    </a:solidFill>
+                  </a:tcPr>
+                </a:tc>
+              </a:tr>
+              <a:tr h="390525">
+                <a:tc>
+                  <a:txBody>
+                    <a:bodyPr/>
+                    <a:lstStyle/>
+                    <a:p>
+                      <a:r>
+                        <a:rPr sz="1313" b="0">
+                          <a:solidFill>
+                            <a:srgbClr val="1A1A1A"/>
+                          </a:solidFill>
+                        </a:rPr>
+                        <a:t>No defenses</a:t>
+                      </a:r>
+                    </a:p>
+                  </a:txBody>
+                  <a:tcPr marL="91440" marR="91440" marT="45720" marB="45720">
+                    <a:lnL w="9525">
+                      <a:solidFill>
+                        <a:srgbClr val="C9D6E3"/>
+                      </a:solidFill>
+                      <a:prstDash val="solid"/>
+                    </a:lnL>
+                    <a:lnR w="9525">
+                      <a:solidFill>
+                        <a:srgbClr val="C9D6E3"/>
+                      </a:solidFill>
+                      <a:prstDash val="solid"/>
+                    </a:lnR>
+                    <a:lnB w="9525">
+                      <a:solidFill>
+                        <a:srgbClr val="C9D6E3"/>
+                      </a:solidFill>
+                      <a:prstDash val="solid"/>
+                    </a:lnB>
+                    <a:solidFill>
+                      <a:srgbClr val="FFFFFF"/>
+                    </a:solidFill>
+                  </a:tcPr>
+                </a:tc>
+                <a:tc>
+                  <a:txBody>
+                    <a:bodyPr/>
+                    <a:lstStyle/>
+                    <a:p>
+                      <a:r>
+                        <a:rPr sz="1313" b="0">
+                          <a:solidFill>
+                            <a:srgbClr val="1A1A1A"/>
+                          </a:solidFill>
+                        </a:rPr>
+                        <a:t>6/10 (60%)</a:t>
+                      </a:r>
+                    </a:p>
+                  </a:txBody>
+                  <a:tcPr marL="91440" marR="91440" marT="45720" marB="45720">
+                    <a:lnR w="9525">
+                      <a:solidFill>
+                        <a:srgbClr val="C9D6E3"/>
+                      </a:solidFill>
+                      <a:prstDash val="solid"/>
+                    </a:lnR>
+                    <a:lnB w="9525">
+                      <a:solidFill>
+                        <a:srgbClr val="C9D6E3"/>
+                      </a:solidFill>
+                      <a:prstDash val="solid"/>
+                    </a:lnB>
+                    <a:solidFill>
+                      <a:srgbClr val="FFFFFF"/>
+                    </a:solidFill>
+                  </a:tcPr>
+                </a:tc>
+                <a:tc>
+                  <a:txBody>
+                    <a:bodyPr/>
+                    <a:lstStyle/>
+                    <a:p>
+                      <a:r>
+                        <a:rPr sz="1313" b="0">
+                          <a:solidFill>
+                            <a:srgbClr val="1A1A1A"/>
+                          </a:solidFill>
+                        </a:rPr>
+                        <a:t>7/7</a:t>
+                      </a:r>
+                    </a:p>
+                  </a:txBody>
+                  <a:tcPr marL="91440" marR="91440" marT="45720" marB="45720">
+                    <a:lnR w="9525">
+                      <a:solidFill>
+                        <a:srgbClr val="C9D6E3"/>
+                      </a:solidFill>
+                      <a:prstDash val="solid"/>
+                    </a:lnR>
+                    <a:lnB w="9525">
+                      <a:solidFill>
+                        <a:srgbClr val="C9D6E3"/>
+                      </a:solidFill>
+                      <a:prstDash val="solid"/>
+                    </a:lnB>
+                    <a:solidFill>
+                      <a:srgbClr val="FFFFFF"/>
+                    </a:solidFill>
+                  </a:tcPr>
+                </a:tc>
+              </a:tr>
+              <a:tr h="390525">
+                <a:tc>
+                  <a:txBody>
+                    <a:bodyPr/>
+                    <a:lstStyle/>
+                    <a:p>
+                      <a:r>
+                        <a:rPr sz="1313" b="0">
+                          <a:solidFill>
+                            <a:srgbClr val="1A1A1A"/>
+                          </a:solidFill>
+                        </a:rPr>
+                        <a:t>Detection only</a:t>
+                      </a:r>
+                    </a:p>
+                  </a:txBody>
+                  <a:tcPr marL="91440" marR="91440" marT="45720" marB="45720">
+                    <a:lnL w="9525">
+                      <a:solidFill>
+                        <a:srgbClr val="C9D6E3"/>
+                      </a:solidFill>
+                      <a:prstDash val="solid"/>
+                    </a:lnL>
+                    <a:lnR w="9525">
+                      <a:solidFill>
+                        <a:srgbClr val="C9D6E3"/>
+                      </a:solidFill>
+                      <a:prstDash val="solid"/>
+                    </a:lnR>
+                    <a:lnB w="9525">
+                      <a:solidFill>
+                        <a:srgbClr val="C9D6E3"/>
+                      </a:solidFill>
+                      <a:prstDash val="solid"/>
+                    </a:lnB>
+                    <a:solidFill>
+                      <a:srgbClr val="FFFFFF"/>
+                    </a:solidFill>
+                  </a:tcPr>
+                </a:tc>
+                <a:tc>
+                  <a:txBody>
+                    <a:bodyPr/>
+                    <a:lstStyle/>
+                    <a:p>
+                      <a:r>
+                        <a:rPr sz="1313" b="0">
+                          <a:solidFill>
+                            <a:srgbClr val="1A1A1A"/>
+                          </a:solidFill>
+                        </a:rPr>
+                        <a:t>1/10 (10%)</a:t>
+                      </a:r>
+                    </a:p>
+                  </a:txBody>
+                  <a:tcPr marL="91440" marR="91440" marT="45720" marB="45720">
+                    <a:lnR w="9525">
+                      <a:solidFill>
+                        <a:srgbClr val="C9D6E3"/>
+                      </a:solidFill>
+                      <a:prstDash val="solid"/>
+                    </a:lnR>
+                    <a:lnB w="9525">
+                      <a:solidFill>
+                        <a:srgbClr val="C9D6E3"/>
+                      </a:solidFill>
+                      <a:prstDash val="solid"/>
+                    </a:lnB>
+                    <a:solidFill>
+                      <a:srgbClr val="FFFFFF"/>
+                    </a:solidFill>
+                  </a:tcPr>
+                </a:tc>
+                <a:tc>
+                  <a:txBody>
+                    <a:bodyPr/>
+                    <a:lstStyle/>
+                    <a:p>
+                      <a:r>
+                        <a:rPr sz="1313" b="0">
+                          <a:solidFill>
+                            <a:srgbClr val="1A1A1A"/>
+                          </a:solidFill>
+                        </a:rPr>
+                        <a:t>7/7</a:t>
+                      </a:r>
+                    </a:p>
+                  </a:txBody>
+                  <a:tcPr marL="91440" marR="91440" marT="45720" marB="45720">
+                    <a:lnR w="9525">
+                      <a:solidFill>
+                        <a:srgbClr val="C9D6E3"/>
+                      </a:solidFill>
+                      <a:prstDash val="solid"/>
+                    </a:lnR>
+                    <a:lnB w="9525">
+                      <a:solidFill>
+                        <a:srgbClr val="C9D6E3"/>
+                      </a:solidFill>
+                      <a:prstDash val="solid"/>
+                    </a:lnB>
+                    <a:solidFill>
+                      <a:srgbClr val="FFFFFF"/>
+                    </a:solidFill>
+                  </a:tcPr>
+                </a:tc>
+              </a:tr>
+              <a:tr h="390525">
+                <a:tc>
+                  <a:txBody>
+                    <a:bodyPr/>
+                    <a:lstStyle/>
+                    <a:p>
+                      <a:r>
+                        <a:rPr sz="1313" b="0">
+                          <a:solidFill>
+                            <a:srgbClr val="1A1A1A"/>
+                          </a:solidFill>
+                        </a:rPr>
+                        <a:t>Recipient gate only</a:t>
+                      </a:r>
+                    </a:p>
+                  </a:txBody>
+                  <a:tcPr marL="91440" marR="91440" marT="45720" marB="45720">
+                    <a:lnL w="9525">
+                      <a:solidFill>
+                        <a:srgbClr val="C9D6E3"/>
+                      </a:solidFill>
+                      <a:prstDash val="solid"/>
+                    </a:lnL>
+                    <a:lnR w="9525">
+                      <a:solidFill>
+                        <a:srgbClr val="C9D6E3"/>
+                      </a:solidFill>
+                      <a:prstDash val="solid"/>
+                    </a:lnR>
+                    <a:lnB w="9525">
+                      <a:solidFill>
+                        <a:srgbClr val="C9D6E3"/>
+                      </a:solidFill>
+                      <a:prstDash val="solid"/>
+                    </a:lnB>
+                    <a:solidFill>
+                      <a:srgbClr val="FFFFFF"/>
+                    </a:solidFill>
+                  </a:tcPr>
+                </a:tc>
+                <a:tc>
+                  <a:txBody>
+                    <a:bodyPr/>
+                    <a:lstStyle/>
+                    <a:p>
+                      <a:r>
+                        <a:rPr sz="1313" b="0">
+                          <a:solidFill>
+                            <a:srgbClr val="1A1A1A"/>
+                          </a:solidFill>
+                        </a:rPr>
+                        <a:t>3/10 (30%)</a:t>
+                      </a:r>
+                    </a:p>
+                  </a:txBody>
+                  <a:tcPr marL="91440" marR="91440" marT="45720" marB="45720">
+                    <a:lnR w="9525">
+                      <a:solidFill>
+                        <a:srgbClr val="C9D6E3"/>
+                      </a:solidFill>
+                      <a:prstDash val="solid"/>
+                    </a:lnR>
+                    <a:lnB w="9525">
+                      <a:solidFill>
+                        <a:srgbClr val="C9D6E3"/>
+                      </a:solidFill>
+                      <a:prstDash val="solid"/>
+                    </a:lnB>
+                    <a:solidFill>
+                      <a:srgbClr val="FFFFFF"/>
+                    </a:solidFill>
+                  </a:tcPr>
+                </a:tc>
+                <a:tc>
+                  <a:txBody>
+                    <a:bodyPr/>
+                    <a:lstStyle/>
+                    <a:p>
+                      <a:r>
+                        <a:rPr sz="1313" b="0">
+                          <a:solidFill>
+                            <a:srgbClr val="1A1A1A"/>
+                          </a:solidFill>
+                        </a:rPr>
+                        <a:t>7/7</a:t>
+                      </a:r>
+                    </a:p>
+                  </a:txBody>
+                  <a:tcPr marL="91440" marR="91440" marT="45720" marB="45720">
+                    <a:lnR w="9525">
+                      <a:solidFill>
+                        <a:srgbClr val="C9D6E3"/>
+                      </a:solidFill>
+                      <a:prstDash val="solid"/>
+                    </a:lnR>
+                    <a:lnB w="9525">
+                      <a:solidFill>
+                        <a:srgbClr val="C9D6E3"/>
+                      </a:solidFill>
+                      <a:prstDash val="solid"/>
+                    </a:lnB>
+                    <a:solidFill>
+                      <a:srgbClr val="FFFFFF"/>
+                    </a:solidFill>
+                  </a:tcPr>
+                </a:tc>
+              </a:tr>
+              <a:tr h="390525">
+                <a:tc>
+                  <a:txBody>
+                    <a:bodyPr/>
+                    <a:lstStyle/>
+                    <a:p>
+                      <a:r>
+                        <a:rPr sz="1313" b="0">
+                          <a:solidFill>
+                            <a:srgbClr val="1A1A1A"/>
+                          </a:solidFill>
+                        </a:rPr>
+                        <a:t>Both defenses</a:t>
+                      </a:r>
+                    </a:p>
+                  </a:txBody>
+                  <a:tcPr marL="91440" marR="91440" marT="45720" marB="45720">
+                    <a:lnL w="9525">
+                      <a:solidFill>
+                        <a:srgbClr val="C9D6E3"/>
+                      </a:solidFill>
+                      <a:prstDash val="solid"/>
+                    </a:lnL>
+                    <a:lnR w="9525">
+                      <a:solidFill>
+                        <a:srgbClr val="C9D6E3"/>
+                      </a:solidFill>
+                      <a:prstDash val="solid"/>
+                    </a:lnR>
+                    <a:lnB w="9525">
+                      <a:solidFill>
+                        <a:srgbClr val="C9D6E3"/>
+                      </a:solidFill>
+                      <a:prstDash val="solid"/>
+                    </a:lnB>
+                    <a:solidFill>
+                      <a:srgbClr val="FFFFFF"/>
+                    </a:solidFill>
+                  </a:tcPr>
+                </a:tc>
+                <a:tc>
+                  <a:txBody>
+                    <a:bodyPr/>
+                    <a:lstStyle/>
+                    <a:p>
+                      <a:r>
+                        <a:rPr sz="1313" b="0">
+                          <a:solidFill>
+                            <a:srgbClr val="1A1A1A"/>
+                          </a:solidFill>
+                        </a:rPr>
+                        <a:t>1/10 (10%)</a:t>
+                      </a:r>
+                    </a:p>
+                  </a:txBody>
+                  <a:tcPr marL="91440" marR="91440" marT="45720" marB="45720">
+                    <a:lnR w="9525">
+                      <a:solidFill>
+                        <a:srgbClr val="C9D6E3"/>
+                      </a:solidFill>
+                      <a:prstDash val="solid"/>
+                    </a:lnR>
+                    <a:lnB w="9525">
+                      <a:solidFill>
+                        <a:srgbClr val="C9D6E3"/>
+                      </a:solidFill>
+                      <a:prstDash val="solid"/>
+                    </a:lnB>
+                    <a:solidFill>
+                      <a:srgbClr val="FFFFFF"/>
+                    </a:solidFill>
+                  </a:tcPr>
+                </a:tc>
+                <a:tc>
+                  <a:txBody>
+                    <a:bodyPr/>
+                    <a:lstStyle/>
+                    <a:p>
+                      <a:r>
+                        <a:rPr sz="1313" b="0">
+                          <a:solidFill>
+                            <a:srgbClr val="1A1A1A"/>
+                          </a:solidFill>
+                        </a:rPr>
+                        <a:t>7/7</a:t>
+                      </a:r>
+                    </a:p>
+                  </a:txBody>
+                  <a:tcPr marL="91440" marR="91440" marT="45720" marB="45720">
+                    <a:lnR w="9525">
+                      <a:solidFill>
+                        <a:srgbClr val="C9D6E3"/>
+                      </a:solidFill>
+                      <a:prstDash val="solid"/>
+                    </a:lnR>
+                    <a:lnB w="9525">
+                      <a:solidFill>
+                        <a:srgbClr val="C9D6E3"/>
+                      </a:solidFill>
+                      <a:prstDash val="solid"/>
+                    </a:lnB>
+                    <a:solidFill>
+                      <a:srgbClr val="FFFFFF"/>
+                    </a:solidFill>
+                  </a:tcPr>
+                </a:tc>
+              </a:tr>
+            </a:tbl>
+          </a:graphicData>
+        </a:graphic>
+      </p:graphicFrame>
+      <p:sp>
+        <p:nvSpPr>
+          <p:cNvPr id="14" name="">
+            <a:extLst xmlns:a="http://schemas.openxmlformats.org/drawingml/2006/main">
+              <a:ext uri="{FF2B5EF4-FFF2-40B4-BE49-F238E27FC236}">
+                <a16:creationId xmlns:a16="http://schemas.microsoft.com/office/drawing/2014/main" id="{806BA041-D84B-4B9A-874F-0BC37D55615E}"/>
+              </a:ext>
+            </a:extLst>
+          </p:cNvPr>
+          <p:cNvSpPr>
+            <a:spLocks xmlns:a="http://schemas.openxmlformats.org/drawingml/2006/main" noGrp="1"/>
+          </p:cNvSpPr>
+          <p:nvPr/>
+        </p:nvSpPr>
+        <p:spPr>
+          <a:xfrm xmlns:a="http://schemas.openxmlformats.org/drawingml/2006/main">
+            <a:off x="960120" y="5705475"/>
+            <a:ext cx="10271474" cy="552450"/>
+          </a:xfrm>
+          <a:prstGeom xmlns:a="http://schemas.openxmlformats.org/drawingml/2006/main" prst="rect">
+            <a:avLst/>
+          </a:prstGeom>
+          <a:noFill xmlns:a="http://schemas.openxmlformats.org/drawingml/2006/main"/>
+          <a:ln xmlns:a="http://schemas.openxmlformats.org/drawingml/2006/main" w="0">
+            <a:noFill/>
+          </a:ln>
+        </p:spPr>
+        <p:txBody>
+          <a:bodyPr xmlns:a="http://schemas.openxmlformats.org/drawingml/2006/main" lIns="0" tIns="0" rIns="0" bIns="0"/>
+          <a:lstStyle xmlns:a="http://schemas.openxmlformats.org/drawingml/2006/main">
+            <a:defPPr>
+              <a:defRPr sz="1400">
+                <a:solidFill>
+                  <a:srgbClr val="1A1A1A"/>
+                </a:solidFill>
+              </a:defRPr>
+            </a:defPPr>
+            <a:lvl1pPr>
+              <a:defRPr sz="1400">
+                <a:solidFill>
+                  <a:srgbClr val="1A1A1A"/>
+                </a:solidFill>
+              </a:defRPr>
+            </a:lvl1pPr>
+            <a:lvl2pPr>
+              <a:defRPr sz="1400">
+                <a:solidFill>
+                  <a:srgbClr val="1A1A1A"/>
+                </a:solidFill>
+              </a:defRPr>
+            </a:lvl2pPr>
+            <a:lvl3pPr>
+              <a:defRPr sz="1400">
+                <a:solidFill>
+                  <a:srgbClr val="1A1A1A"/>
+                </a:solidFill>
+              </a:defRPr>
+            </a:lvl3pPr>
+            <a:lvl4pPr>
+              <a:defRPr sz="1400">
+                <a:solidFill>
+                  <a:srgbClr val="1A1A1A"/>
+                </a:solidFill>
+              </a:defRPr>
+            </a:lvl4pPr>
+            <a:lvl5pPr>
+              <a:defRPr sz="1400">
+                <a:solidFill>
+                  <a:srgbClr val="1A1A1A"/>
+                </a:solidFill>
+              </a:defRPr>
+            </a:lvl5pPr>
+            <a:lvl6pPr>
+              <a:defRPr sz="1400">
+                <a:solidFill>
+                  <a:srgbClr val="1A1A1A"/>
+                </a:solidFill>
+              </a:defRPr>
+            </a:lvl6pPr>
+            <a:lvl7pPr>
+              <a:defRPr sz="1400">
+                <a:solidFill>
+                  <a:srgbClr val="1A1A1A"/>
+                </a:solidFill>
+              </a:defRPr>
+            </a:lvl7pPr>
+            <a:lvl8pPr>
+              <a:defRPr sz="1400">
+                <a:solidFill>
+                  <a:srgbClr val="1A1A1A"/>
+                </a:solidFill>
+              </a:defRPr>
+            </a:lvl8pPr>
+            <a:lvl9pPr>
+              <a:defRPr sz="1400">
+                <a:solidFill>
+                  <a:srgbClr val="1A1A1A"/>
+                </a:solidFill>
+              </a:defRPr>
+            </a:lvl9pPr>
+          </a:lstStyle>
+          <a:p xmlns:a="http://schemas.openxmlformats.org/drawingml/2006/main">
+            <a:pPr>
+              <a:defRPr sz="1400">
+                <a:solidFill>
+                  <a:srgbClr val="1A1A1A"/>
+                </a:solidFill>
+              </a:defRPr>
+            </a:pPr>
+            <a:r>
+              <a:rPr sz="1400">
+                <a:solidFill>
+                  <a:srgbClr val="1A1A1A"/>
+                </a:solidFill>
+              </a:rPr>
+              <a:t>Early results from saved October 13 runs. Each example counts by majority of 3 tries.</a:t>
+            </a:r>
+          </a:p>
+          <a:p xmlns:a="http://schemas.openxmlformats.org/drawingml/2006/main">
+            <a:pPr>
+              <a:defRPr sz="1400">
+                <a:solidFill>
+                  <a:srgbClr val="1A1A1A"/>
+                </a:solidFill>
+              </a:defRPr>
+            </a:pPr>
+            <a:r>
+              <a:rPr sz="1400">
+                <a:solidFill>
+                  <a:srgbClr val="1A1A1A"/>
+                </a:solidFill>
+              </a:rPr>
+              <a:t>We scored the same saved runs under four rules. The new live approval needs testing.</a:t>
+            </a:r>
+          </a:p>
+        </p:txBody>
+      </p:sp>
+    </p:spTree>
+    <p:extLst>
+      <p:ext uri="{BB962C8B-B14F-4D97-AF65-F5344CB8AC3E}">
+        <p14:creationId xmlns:p14="http://schemas.microsoft.com/office/powerpoint/2010/main" val="1815527912"/>
+      </p:ext>
+    </p:extLst>
+  </p:cSld>
+</p:sld>
+</file>
+
+<file path=ppt/slides/slide4.xml><?xml version="1.0" encoding="utf-8"?>
+<p:sld xmlns:p="http://schemas.openxmlformats.org/presentationml/2006/main">
+  <p:cSld>
+    <p:bg>
+      <p:bgPr>
+        <a:solidFill xmlns:a="http://schemas.openxmlformats.org/drawingml/2006/main">
+          <a:srgbClr val="FFFFFF"/>
+        </a:solidFill>
+      </p:bgPr>
+    </p:bg>
+    <p:spTree>
+      <p:nvGrpSpPr>
+        <p:cNvPr id="1" name=""/>
+        <p:cNvGrpSpPr/>
+        <p:nvPr/>
+      </p:nvGrpSpPr>
+      <p:grpSpPr>
+        <a:xfrm xmlns:a="http://schemas.openxmlformats.org/drawingml/2006/main"/>
+      </p:grpSpPr>
+      <p:sp>
+        <p:nvSpPr>
+          <p:cNvPr id="2" name="Text 0">
+            <a:extLst xmlns:a="http://schemas.openxmlformats.org/drawingml/2006/main">
+              <a:ext uri="{FF2B5EF4-FFF2-40B4-BE49-F238E27FC236}">
+                <a16:creationId xmlns:a16="http://schemas.microsoft.com/office/drawing/2014/main" id="{0C8DCF2D-86F6-4EA2-A0E6-91788646830A}"/>
+              </a:ext>
+            </a:extLst>
+          </p:cNvPr>
+          <p:cNvSpPr>
+            <a:spLocks xmlns:a="http://schemas.openxmlformats.org/drawingml/2006/main" noGrp="1"/>
+          </p:cNvSpPr>
+          <p:nvPr/>
+        </p:nvSpPr>
+        <p:spPr>
+          <a:xfrm xmlns:a="http://schemas.openxmlformats.org/drawingml/2006/main">
+            <a:off x="731520" y="411480"/>
+            <a:ext cx="5486400" cy="320040"/>
+          </a:xfrm>
+          <a:prstGeom xmlns:a="http://schemas.openxmlformats.org/drawingml/2006/main" prst="rect">
+            <a:avLst/>
+          </a:prstGeom>
+          <a:noFill xmlns:a="http://schemas.openxmlformats.org/drawingml/2006/main"/>
+        </p:spPr>
+        <p:txBody>
+          <a:bodyPr xmlns:a="http://schemas.openxmlformats.org/drawingml/2006/main" wrap="square" lIns="0" tIns="0" rIns="0" bIns="0" anchor="ctr"/>
+          <a:lstStyle xmlns:a="http://schemas.openxmlformats.org/drawingml/2006/main"/>
+          <a:p xmlns:a="http://schemas.openxmlformats.org/drawingml/2006/main">
+            <a:pPr marL="0" indent="0">
+              <a:buNone/>
+            </a:pPr>
+            <a:r>
+              <a:rPr sz="1200" b="1" spc="100">
+                <a:solidFill>
+                  <a:srgbClr val="1F5C99"/>
+                </a:solidFill>
+                <a:latin typeface="Calibri"/>
+                <a:ea typeface="Calibri"/>
+                <a:cs typeface="Calibri"/>
+              </a:rPr>
+              <a:t>SECTION 3 OF 4</a:t>
+            </a:r>
+            <a:endParaRPr sz="1200"/>
+          </a:p>
+        </p:txBody>
+      </p:sp>
+      <p:sp>
+        <p:nvSpPr>
+          <p:cNvPr id="3" name="Text 1">
+            <a:extLst xmlns:a="http://schemas.openxmlformats.org/drawingml/2006/main">
+              <a:ext uri="{FF2B5EF4-FFF2-40B4-BE49-F238E27FC236}">
+                <a16:creationId xmlns:a16="http://schemas.microsoft.com/office/drawing/2014/main" id="{6ACEA33B-0445-4D72-BEED-5A608BD51F28}"/>
+              </a:ext>
+            </a:extLst>
+          </p:cNvPr>
+          <p:cNvSpPr>
+            <a:spLocks xmlns:a="http://schemas.openxmlformats.org/drawingml/2006/main" noGrp="1"/>
+          </p:cNvSpPr>
+          <p:nvPr/>
+        </p:nvSpPr>
+        <p:spPr>
+          <a:xfrm xmlns:a="http://schemas.openxmlformats.org/drawingml/2006/main">
+            <a:off x="8899855" y="411480"/>
+            <a:ext cx="2560320" cy="320040"/>
+          </a:xfrm>
+          <a:prstGeom xmlns:a="http://schemas.openxmlformats.org/drawingml/2006/main" prst="rect">
+            <a:avLst/>
+          </a:prstGeom>
+          <a:noFill xmlns:a="http://schemas.openxmlformats.org/drawingml/2006/main"/>
+        </p:spPr>
+        <p:txBody>
+          <a:bodyPr xmlns:a="http://schemas.openxmlformats.org/drawingml/2006/main" wrap="square" lIns="0" tIns="0" rIns="0" bIns="0" anchor="ctr"/>
+          <a:lstStyle xmlns:a="http://schemas.openxmlformats.org/drawingml/2006/main"/>
+          <a:p xmlns:a="http://schemas.openxmlformats.org/drawingml/2006/main">
+            <a:pPr marL="0" indent="0" algn="r">
+              <a:buNone/>
+            </a:pPr>
+            <a:r>
+              <a:rPr sz="1100" i="1">
+                <a:solidFill>
+                  <a:srgbClr val="5A6672"/>
+                </a:solidFill>
+                <a:latin typeface="Calibri"/>
+                <a:ea typeface="Calibri"/>
+                <a:cs typeface="Calibri"/>
+              </a:rPr>
+              <a:t>Presented by: Speaker 4</a:t>
+            </a:r>
+            <a:endParaRPr sz="1100"/>
+          </a:p>
+        </p:txBody>
+      </p:sp>
+      <p:sp>
+        <p:nvSpPr>
+          <p:cNvPr id="4" name="Text 2">
+            <a:extLst xmlns:a="http://schemas.openxmlformats.org/drawingml/2006/main">
+              <a:ext uri="{FF2B5EF4-FFF2-40B4-BE49-F238E27FC236}">
+                <a16:creationId xmlns:a16="http://schemas.microsoft.com/office/drawing/2014/main" id="{0BC99978-A4A7-4D5C-9009-EB538AE070DB}"/>
+              </a:ext>
+            </a:extLst>
+          </p:cNvPr>
+          <p:cNvSpPr>
+            <a:spLocks xmlns:a="http://schemas.openxmlformats.org/drawingml/2006/main" noGrp="1"/>
+          </p:cNvSpPr>
+          <p:nvPr/>
+        </p:nvSpPr>
+        <p:spPr>
+          <a:xfrm xmlns:a="http://schemas.openxmlformats.org/drawingml/2006/main">
+            <a:off x="731520" y="713232"/>
+            <a:ext cx="10728655" cy="640080"/>
+          </a:xfrm>
+          <a:prstGeom xmlns:a="http://schemas.openxmlformats.org/drawingml/2006/main" prst="rect">
+            <a:avLst/>
+          </a:prstGeom>
+          <a:noFill xmlns:a="http://schemas.openxmlformats.org/drawingml/2006/main"/>
+        </p:spPr>
+        <p:txBody>
+          <a:bodyPr xmlns:a="http://schemas.openxmlformats.org/drawingml/2006/main" wrap="square" lIns="0" tIns="0" rIns="0" bIns="0" anchor="ctr"/>
+          <a:lstStyle xmlns:a="http://schemas.openxmlformats.org/drawingml/2006/main"/>
+          <a:p xmlns:a="http://schemas.openxmlformats.org/drawingml/2006/main">
+            <a:pPr marL="0" indent="0">
+              <a:buNone/>
+            </a:pPr>
+            <a:r>
+              <a:rPr sz="2800" b="1">
+                <a:solidFill>
+                  <a:srgbClr val="14375E"/>
+                </a:solidFill>
+                <a:latin typeface="Calibri"/>
+                <a:ea typeface="Calibri"/>
+                <a:cs typeface="Calibri"/>
+              </a:rPr>
+              <a:t>Expected Outcomes</a:t>
+            </a:r>
+            <a:endParaRPr sz="2800"/>
+          </a:p>
+        </p:txBody>
+      </p:sp>
+      <p:sp>
+        <p:nvSpPr>
+          <p:cNvPr id="5" name="Shape 3">
+            <a:extLst xmlns:a="http://schemas.openxmlformats.org/drawingml/2006/main">
+              <a:ext uri="{FF2B5EF4-FFF2-40B4-BE49-F238E27FC236}">
+                <a16:creationId xmlns:a16="http://schemas.microsoft.com/office/drawing/2014/main" id="{A83256B2-19DB-4E66-9C2A-2A222D7B7D85}"/>
+              </a:ext>
+            </a:extLst>
+          </p:cNvPr>
+          <p:cNvSpPr>
+            <a:spLocks xmlns:a="http://schemas.openxmlformats.org/drawingml/2006/main" noGrp="1"/>
+          </p:cNvSpPr>
+          <p:nvPr/>
+        </p:nvSpPr>
+        <p:spPr>
+          <a:xfrm xmlns:a="http://schemas.openxmlformats.org/drawingml/2006/main">
+            <a:off x="731520" y="1554480"/>
+            <a:ext cx="10728655" cy="2103120"/>
+          </a:xfrm>
+          <a:prstGeom xmlns:a="http://schemas.openxmlformats.org/drawingml/2006/main" prst="rect">
+            <a:avLst/>
+          </a:prstGeom>
+          <a:solidFill xmlns:a="http://schemas.openxmlformats.org/drawingml/2006/main">
+            <a:srgbClr val="F2F5F9"/>
+          </a:solidFill>
+        </p:spPr>
+      </p:sp>
+      <p:sp>
+        <p:nvSpPr>
+          <p:cNvPr id="6" name="Text 4">
+            <a:extLst xmlns:a="http://schemas.openxmlformats.org/drawingml/2006/main">
+              <a:ext uri="{FF2B5EF4-FFF2-40B4-BE49-F238E27FC236}">
+                <a16:creationId xmlns:a16="http://schemas.microsoft.com/office/drawing/2014/main" id="{1301D2A5-236A-4F59-805A-978C7FB97A7D}"/>
+              </a:ext>
+            </a:extLst>
+          </p:cNvPr>
+          <p:cNvSpPr>
+            <a:spLocks xmlns:a="http://schemas.openxmlformats.org/drawingml/2006/main" noGrp="1"/>
+          </p:cNvSpPr>
+          <p:nvPr/>
+        </p:nvSpPr>
+        <p:spPr>
+          <a:xfrm xmlns:a="http://schemas.openxmlformats.org/drawingml/2006/main">
+            <a:off x="960120" y="1691640"/>
+            <a:ext cx="5486400" cy="274320"/>
+          </a:xfrm>
+          <a:prstGeom xmlns:a="http://schemas.openxmlformats.org/drawingml/2006/main" prst="rect">
+            <a:avLst/>
+          </a:prstGeom>
+          <a:noFill xmlns:a="http://schemas.openxmlformats.org/drawingml/2006/main"/>
+        </p:spPr>
+        <p:txBody>
+          <a:bodyPr xmlns:a="http://schemas.openxmlformats.org/drawingml/2006/main" wrap="square" lIns="0" tIns="0" rIns="0" bIns="0" anchor="ctr"/>
+          <a:lstStyle xmlns:a="http://schemas.openxmlformats.org/drawingml/2006/main"/>
+          <a:p xmlns:a="http://schemas.openxmlformats.org/drawingml/2006/main">
+            <a:pPr marL="0" indent="0">
+              <a:buNone/>
+            </a:pPr>
+            <a:r>
+              <a:rPr sz="1100" b="1">
+                <a:solidFill>
+                  <a:srgbClr val="5A6672"/>
+                </a:solidFill>
+                <a:latin typeface="Calibri"/>
+                <a:ea typeface="Calibri"/>
+                <a:cs typeface="Calibri"/>
+              </a:rPr>
+              <a:t>TARGETS AND LIMITATIONS</a:t>
+            </a:r>
+            <a:endParaRPr sz="1100"/>
+          </a:p>
+        </p:txBody>
+      </p:sp>
+      <p:sp>
+        <p:nvSpPr>
+          <p:cNvPr id="9" name="Text 7">
+            <a:extLst xmlns:a="http://schemas.openxmlformats.org/drawingml/2006/main">
+              <a:ext uri="{FF2B5EF4-FFF2-40B4-BE49-F238E27FC236}">
+                <a16:creationId xmlns:a16="http://schemas.microsoft.com/office/drawing/2014/main" id="{53EEEDB1-74EA-4077-8219-68D9CA087E8E}"/>
+              </a:ext>
+            </a:extLst>
+          </p:cNvPr>
+          <p:cNvSpPr>
+            <a:spLocks xmlns:a="http://schemas.openxmlformats.org/drawingml/2006/main" noGrp="1"/>
+          </p:cNvSpPr>
+          <p:nvPr/>
+        </p:nvSpPr>
+        <p:spPr>
+          <a:xfrm xmlns:a="http://schemas.openxmlformats.org/drawingml/2006/main">
+            <a:off x="457200" y="6446520"/>
+            <a:ext cx="7315200" cy="274320"/>
+          </a:xfrm>
+          <a:prstGeom xmlns:a="http://schemas.openxmlformats.org/drawingml/2006/main" prst="rect">
+            <a:avLst/>
+          </a:prstGeom>
+          <a:noFill xmlns:a="http://schemas.openxmlformats.org/drawingml/2006/main"/>
+        </p:spPr>
+        <p:txBody>
+          <a:bodyPr xmlns:a="http://schemas.openxmlformats.org/drawingml/2006/main" wrap="square" lIns="0" tIns="0" rIns="0" bIns="0" anchor="ctr"/>
+          <a:lstStyle xmlns:a="http://schemas.openxmlformats.org/drawingml/2006/main"/>
+          <a:p xmlns:a="http://schemas.openxmlformats.org/drawingml/2006/main">
+            <a:pPr marL="0" indent="0">
+              <a:buNone/>
+            </a:pPr>
+            <a:r>
+              <a:rPr sz="1000">
+                <a:solidFill>
+                  <a:srgbClr val="5A6672"/>
+                </a:solidFill>
+                <a:latin typeface="Calibri"/>
+                <a:ea typeface="Calibri"/>
+                <a:cs typeface="Calibri"/>
+              </a:rPr>
+              <a:t>COE444 Computer Security  |  Progress Presentation Template</a:t>
+            </a:r>
+            <a:endParaRPr sz="1000"/>
+          </a:p>
+        </p:txBody>
+      </p:sp>
+      <p:sp>
+        <p:nvSpPr>
+          <p:cNvPr id="10" name="Text 8">
+            <a:extLst xmlns:a="http://schemas.openxmlformats.org/drawingml/2006/main">
+              <a:ext uri="{FF2B5EF4-FFF2-40B4-BE49-F238E27FC236}">
+                <a16:creationId xmlns:a16="http://schemas.microsoft.com/office/drawing/2014/main" id="{AB5A9C4F-E110-40F5-931F-30C01721E001}"/>
+              </a:ext>
+            </a:extLst>
+          </p:cNvPr>
+          <p:cNvSpPr>
+            <a:spLocks xmlns:a="http://schemas.openxmlformats.org/drawingml/2006/main" noGrp="1"/>
+          </p:cNvSpPr>
+          <p:nvPr/>
+        </p:nvSpPr>
+        <p:spPr>
+          <a:xfrm xmlns:a="http://schemas.openxmlformats.org/drawingml/2006/main">
+            <a:off x="11277295" y="6446520"/>
+            <a:ext cx="457200" cy="274320"/>
+          </a:xfrm>
+          <a:prstGeom xmlns:a="http://schemas.openxmlformats.org/drawingml/2006/main" prst="rect">
+            <a:avLst/>
+          </a:prstGeom>
+          <a:noFill xmlns:a="http://schemas.openxmlformats.org/drawingml/2006/main"/>
+        </p:spPr>
+        <p:txBody>
+          <a:bodyPr xmlns:a="http://schemas.openxmlformats.org/drawingml/2006/main" wrap="square" lIns="0" tIns="0" rIns="0" bIns="0" anchor="ctr"/>
+          <a:lstStyle xmlns:a="http://schemas.openxmlformats.org/drawingml/2006/main"/>
+          <a:p xmlns:a="http://schemas.openxmlformats.org/drawingml/2006/main">
+            <a:pPr marL="0" indent="0" algn="r">
+              <a:buNone/>
+            </a:pPr>
+            <a:r>
+              <a:rPr sz="1000">
+                <a:solidFill>
+                  <a:srgbClr val="5A6672"/>
+                </a:solidFill>
+                <a:latin typeface="Calibri"/>
+                <a:ea typeface="Calibri"/>
+                <a:cs typeface="Calibri"/>
+              </a:rPr>
+              <a:t>4</a:t>
+            </a:r>
+            <a:endParaRPr sz="1000"/>
+          </a:p>
+        </p:txBody>
+      </p:sp>
+      <p:sp>
+        <p:nvSpPr>
+          <p:cNvPr id="11" name="">
+            <a:extLst xmlns:a="http://schemas.openxmlformats.org/drawingml/2006/main">
+              <a:ext uri="{FF2B5EF4-FFF2-40B4-BE49-F238E27FC236}">
+                <a16:creationId xmlns:a16="http://schemas.microsoft.com/office/drawing/2014/main" id="{E1EC82FB-C717-41ED-90C2-A965366A4A53}"/>
+              </a:ext>
+            </a:extLst>
+          </p:cNvPr>
+          <p:cNvSpPr>
+            <a:spLocks xmlns:a="http://schemas.openxmlformats.org/drawingml/2006/main" noGrp="1"/>
+          </p:cNvSpPr>
+          <p:nvPr/>
+        </p:nvSpPr>
+        <p:spPr>
+          <a:xfrm xmlns:a="http://schemas.openxmlformats.org/drawingml/2006/main">
+            <a:off x="960120" y="2009775"/>
+            <a:ext cx="10271474" cy="704850"/>
+          </a:xfrm>
+          <a:prstGeom xmlns:a="http://schemas.openxmlformats.org/drawingml/2006/main" prst="rect">
+            <a:avLst/>
+          </a:prstGeom>
+          <a:noFill xmlns:a="http://schemas.openxmlformats.org/drawingml/2006/main"/>
+          <a:ln xmlns:a="http://schemas.openxmlformats.org/drawingml/2006/main" w="0">
+            <a:noFill/>
+          </a:ln>
+        </p:spPr>
+        <p:txBody>
+          <a:bodyPr xmlns:a="http://schemas.openxmlformats.org/drawingml/2006/main" lIns="0" tIns="0" rIns="0" bIns="0"/>
+          <a:lstStyle xmlns:a="http://schemas.openxmlformats.org/drawingml/2006/main">
+            <a:defPPr>
+              <a:defRPr sz="1725">
+                <a:solidFill>
+                  <a:srgbClr val="1A1A1A"/>
+                </a:solidFill>
+              </a:defRPr>
+            </a:defPPr>
+            <a:lvl1pPr>
+              <a:defRPr sz="1725">
+                <a:solidFill>
+                  <a:srgbClr val="1A1A1A"/>
+                </a:solidFill>
+              </a:defRPr>
+            </a:lvl1pPr>
+            <a:lvl2pPr>
+              <a:defRPr sz="1725">
+                <a:solidFill>
+                  <a:srgbClr val="1A1A1A"/>
+                </a:solidFill>
+              </a:defRPr>
+            </a:lvl2pPr>
+            <a:lvl3pPr>
+              <a:defRPr sz="1725">
+                <a:solidFill>
+                  <a:srgbClr val="1A1A1A"/>
+                </a:solidFill>
+              </a:defRPr>
+            </a:lvl3pPr>
+            <a:lvl4pPr>
+              <a:defRPr sz="1725">
+                <a:solidFill>
+                  <a:srgbClr val="1A1A1A"/>
+                </a:solidFill>
+              </a:defRPr>
+            </a:lvl4pPr>
+            <a:lvl5pPr>
+              <a:defRPr sz="1725">
+                <a:solidFill>
+                  <a:srgbClr val="1A1A1A"/>
+                </a:solidFill>
+              </a:defRPr>
+            </a:lvl5pPr>
+            <a:lvl6pPr>
+              <a:defRPr sz="1725">
+                <a:solidFill>
+                  <a:srgbClr val="1A1A1A"/>
+                </a:solidFill>
+              </a:defRPr>
+            </a:lvl6pPr>
+            <a:lvl7pPr>
+              <a:defRPr sz="1725">
+                <a:solidFill>
+                  <a:srgbClr val="1A1A1A"/>
+                </a:solidFill>
+              </a:defRPr>
+            </a:lvl7pPr>
+            <a:lvl8pPr>
+              <a:defRPr sz="1725">
+                <a:solidFill>
+                  <a:srgbClr val="1A1A1A"/>
+                </a:solidFill>
+              </a:defRPr>
+            </a:lvl8pPr>
+            <a:lvl9pPr>
+              <a:defRPr sz="1725">
+                <a:solidFill>
+                  <a:srgbClr val="1A1A1A"/>
+                </a:solidFill>
+              </a:defRPr>
+            </a:lvl9pPr>
+          </a:lstStyle>
+          <a:p xmlns:a="http://schemas.openxmlformats.org/drawingml/2006/main">
+            <a:pPr>
+              <a:defRPr sz="1725">
+                <a:solidFill>
+                  <a:srgbClr val="1A1A1A"/>
+                </a:solidFill>
+              </a:defRPr>
+            </a:pPr>
+            <a:r>
+              <a:rPr sz="1725">
+                <a:solidFill>
+                  <a:srgbClr val="1A1A1A"/>
+                </a:solidFill>
+              </a:rPr>
+              <a:t>The goal stays the same: fewer attacker-directed actions while the agent</a:t>
+            </a:r>
+          </a:p>
+          <a:p xmlns:a="http://schemas.openxmlformats.org/drawingml/2006/main">
+            <a:pPr>
+              <a:defRPr sz="1725">
+                <a:solidFill>
+                  <a:srgbClr val="1A1A1A"/>
+                </a:solidFill>
+              </a:defRPr>
+            </a:pPr>
+            <a:r>
+              <a:rPr sz="1725">
+                <a:solidFill>
+                  <a:srgbClr val="1A1A1A"/>
+                </a:solidFill>
+              </a:rPr>
+              <a:t>continues to help the user. Email is our controlled test case.</a:t>
+            </a:r>
+          </a:p>
+        </p:txBody>
+      </p:sp>
+      <p:sp>
+        <p:nvSpPr>
+          <p:cNvPr id="12" name="">
+            <a:extLst xmlns:a="http://schemas.openxmlformats.org/drawingml/2006/main">
+              <a:ext uri="{FF2B5EF4-FFF2-40B4-BE49-F238E27FC236}">
+                <a16:creationId xmlns:a16="http://schemas.microsoft.com/office/drawing/2014/main" id="{563DC31C-BDA8-4869-A0CA-7D2D02224E5B}"/>
+              </a:ext>
+            </a:extLst>
+          </p:cNvPr>
+          <p:cNvSpPr>
+            <a:spLocks xmlns:a="http://schemas.openxmlformats.org/drawingml/2006/main" noGrp="1"/>
+          </p:cNvSpPr>
+          <p:nvPr/>
+        </p:nvSpPr>
+        <p:spPr>
+          <a:xfrm xmlns:a="http://schemas.openxmlformats.org/drawingml/2006/main">
+            <a:off x="960120" y="2895600"/>
+            <a:ext cx="10271474" cy="666750"/>
           </a:xfrm>
           <a:prstGeom xmlns:a="http://schemas.openxmlformats.org/drawingml/2006/main" prst="rect">
             <a:avLst/>
@@ -2820,7 +5298,7 @@
                   <a:srgbClr val="1A1A1A"/>
                 </a:solidFill>
               </a:rPr>
-              <a:t>An attacker hides instructions in a document or email that the assistant reads.</a:t>
+              <a:t>Our combined target is below 5% attack success. The current main result is 10%.</a:t>
             </a:r>
           </a:p>
           <a:p xmlns:a="http://schemas.openxmlformats.org/drawingml/2006/main">
@@ -2837,144 +5315,7 @@
                   <a:srgbClr val="1A1A1A"/>
                 </a:solidFill>
               </a:rPr>
-              <a:t>The assistant may then disclose data, change recipients, or abandon the user’s task.</a:t>
-            </a:r>
-          </a:p>
-        </p:txBody>
-      </p:sp>
-      <p:sp>
-        <p:nvSpPr>
-          <p:cNvPr id="12" name="">
-            <a:extLst xmlns:a="http://schemas.openxmlformats.org/drawingml/2006/main">
-              <a:ext uri="{FF2B5EF4-FFF2-40B4-BE49-F238E27FC236}">
-                <a16:creationId xmlns:a16="http://schemas.microsoft.com/office/drawing/2014/main" id="{B726D662-8657-4C20-A1BD-E4EE325CACCF}"/>
-              </a:ext>
-            </a:extLst>
-          </p:cNvPr>
-          <p:cNvSpPr>
-            <a:spLocks xmlns:a="http://schemas.openxmlformats.org/drawingml/2006/main" noGrp="1"/>
-          </p:cNvSpPr>
-          <p:nvPr/>
-        </p:nvSpPr>
-        <p:spPr>
-          <a:xfrm xmlns:a="http://schemas.openxmlformats.org/drawingml/2006/main">
-            <a:off x="960120" y="2809875"/>
-            <a:ext cx="10271474" cy="666750"/>
-          </a:xfrm>
-          <a:prstGeom xmlns:a="http://schemas.openxmlformats.org/drawingml/2006/main" prst="rect">
-            <a:avLst/>
-          </a:prstGeom>
-          <a:noFill xmlns:a="http://schemas.openxmlformats.org/drawingml/2006/main"/>
-          <a:ln xmlns:a="http://schemas.openxmlformats.org/drawingml/2006/main" w="0">
-            <a:noFill/>
-          </a:ln>
-        </p:spPr>
-        <p:txBody>
-          <a:bodyPr xmlns:a="http://schemas.openxmlformats.org/drawingml/2006/main" lIns="0" tIns="0" rIns="0" bIns="0"/>
-          <a:lstStyle xmlns:a="http://schemas.openxmlformats.org/drawingml/2006/main">
-            <a:defPPr>
-              <a:defRPr sz="1575">
-                <a:solidFill>
-                  <a:srgbClr val="1A1A1A"/>
-                </a:solidFill>
-              </a:defRPr>
-            </a:defPPr>
-            <a:lvl1pPr>
-              <a:defRPr sz="1575">
-                <a:solidFill>
-                  <a:srgbClr val="1A1A1A"/>
-                </a:solidFill>
-              </a:defRPr>
-            </a:lvl1pPr>
-            <a:lvl2pPr>
-              <a:defRPr sz="1575">
-                <a:solidFill>
-                  <a:srgbClr val="1A1A1A"/>
-                </a:solidFill>
-              </a:defRPr>
-            </a:lvl2pPr>
-            <a:lvl3pPr>
-              <a:defRPr sz="1575">
-                <a:solidFill>
-                  <a:srgbClr val="1A1A1A"/>
-                </a:solidFill>
-              </a:defRPr>
-            </a:lvl3pPr>
-            <a:lvl4pPr>
-              <a:defRPr sz="1575">
-                <a:solidFill>
-                  <a:srgbClr val="1A1A1A"/>
-                </a:solidFill>
-              </a:defRPr>
-            </a:lvl4pPr>
-            <a:lvl5pPr>
-              <a:defRPr sz="1575">
-                <a:solidFill>
-                  <a:srgbClr val="1A1A1A"/>
-                </a:solidFill>
-              </a:defRPr>
-            </a:lvl5pPr>
-            <a:lvl6pPr>
-              <a:defRPr sz="1575">
-                <a:solidFill>
-                  <a:srgbClr val="1A1A1A"/>
-                </a:solidFill>
-              </a:defRPr>
-            </a:lvl6pPr>
-            <a:lvl7pPr>
-              <a:defRPr sz="1575">
-                <a:solidFill>
-                  <a:srgbClr val="1A1A1A"/>
-                </a:solidFill>
-              </a:defRPr>
-            </a:lvl7pPr>
-            <a:lvl8pPr>
-              <a:defRPr sz="1575">
-                <a:solidFill>
-                  <a:srgbClr val="1A1A1A"/>
-                </a:solidFill>
-              </a:defRPr>
-            </a:lvl8pPr>
-            <a:lvl9pPr>
-              <a:defRPr sz="1575">
-                <a:solidFill>
-                  <a:srgbClr val="1A1A1A"/>
-                </a:solidFill>
-              </a:defRPr>
-            </a:lvl9pPr>
-          </a:lstStyle>
-          <a:p xmlns:a="http://schemas.openxmlformats.org/drawingml/2006/main">
-            <a:pPr>
-              <a:defRPr sz="1575">
-                <a:solidFill>
-                  <a:srgbClr val="1A1A1A"/>
-                </a:solidFill>
-              </a:defRPr>
-            </a:pPr>
-            <a:r>
-              <a:rPr sz="1575">
-                <a:solidFill>
-                  <a:srgbClr val="1A1A1A"/>
-                </a:solidFill>
-              </a:rPr>
-              <a:t>Assets: document contents and authorized email actions.</a:t>
-            </a:r>
-          </a:p>
-          <a:p xmlns:a="http://schemas.openxmlformats.org/drawingml/2006/main">
-            <a:pPr>
-              <a:defRPr sz="1575">
-                <a:solidFill>
-                  <a:srgbClr val="1A1A1A"/>
-                </a:solidFill>
-              </a:defRPr>
-            </a:pPr>
-            <a:r>
-              <a:rPr sz="1575">
-                <a:solidFill>
-                  <a:srgbClr val="1A1A1A"/>
-                </a:solidFill>
-              </a:rPr>
-              <a:t>Trust boundary: external text supplies information, while the user authorizes actions.</a:t>
+              <a:t>The latest approval step still needs a full attack evaluation.</a:t>
             </a:r>
           </a:p>
         </p:txBody>
@@ -2984,7 +5325,7 @@
           <p:cNvPr id="13" name="">
             <a:extLst xmlns:a="http://schemas.openxmlformats.org/drawingml/2006/main">
               <a:ext uri="{FF2B5EF4-FFF2-40B4-BE49-F238E27FC236}">
-                <a16:creationId xmlns:a16="http://schemas.microsoft.com/office/drawing/2014/main" id="{2FA1D023-5575-48FD-A2CC-6AAE7C0CC340}"/>
+                <a16:creationId xmlns:a16="http://schemas.microsoft.com/office/drawing/2014/main" id="{B35B831E-4A21-4EE0-B040-B3EDB9F36CE8}"/>
               </a:ext>
             </a:extLst>
           </p:cNvPr>
@@ -3015,7 +5356,7 @@
                             <a:srgbClr val="FFFFFF"/>
                           </a:solidFill>
                         </a:rPr>
-                        <a:t>Proposal</a:t>
+                        <a:t>Final demonstration</a:t>
                       </a:r>
                     </a:p>
                   </a:txBody>
@@ -3060,7 +5401,7 @@
                             <a:srgbClr val="FFFFFF"/>
                           </a:solidFill>
                         </a:rPr>
-                        <a:t>Current scope and reason</a:t>
+                        <a:t>What we plan to show</a:t>
                       </a:r>
                     </a:p>
                   </a:txBody>
@@ -3101,7 +5442,7 @@
                             <a:srgbClr val="1A1A1A"/>
                           </a:solidFill>
                         </a:rPr>
-                        <a:t>Document, web and email agent</a:t>
+                        <a:t>Agent without defenses</a:t>
                       </a:r>
                     </a:p>
                   </a:txBody>
@@ -3140,7 +5481,7 @@
                             <a:srgbClr val="1A1A1A"/>
                           </a:solidFill>
                         </a:rPr>
-                        <a:t>Document retrieval and simulated email. Web deferred as planned.</a:t>
+                        <a:t>A document attack changes an email’s recipients.</a:t>
                       </a:r>
                     </a:p>
                   </a:txBody>
@@ -3175,7 +5516,7 @@
                             <a:srgbClr val="1A1A1A"/>
                           </a:solidFill>
                         </a:rPr>
-                        <a:t>Llama 3.1-8B detector</a:t>
+                        <a:t>Agent with defenses</a:t>
                       </a:r>
                     </a:p>
                   </a:txBody>
@@ -3214,7 +5555,7 @@
                             <a:srgbClr val="1A1A1A"/>
                           </a:solidFill>
                         </a:rPr>
-                        <a:t>Hosted gpt-oss-120b classifier. Model changed, no training claim.</a:t>
+                        <a:t>Detection flags attack text or the gate removes the attacker address.</a:t>
                       </a:r>
                     </a:p>
                   </a:txBody>
@@ -3249,7 +5590,7 @@
                             <a:srgbClr val="1A1A1A"/>
                           </a:solidFill>
                         </a:rPr>
-                        <a:t>Three conditions</a:t>
+                        <a:t>Live approval step</a:t>
                       </a:r>
                     </a:p>
                   </a:txBody>
@@ -3288,2274 +5629,7 @@
                             <a:srgbClr val="1A1A1A"/>
                           </a:solidFill>
                         </a:rPr>
-                        <a:t>Four conditions add prevention-only to isolate its contribution.</a:t>
-                      </a:r>
-                    </a:p>
-                  </a:txBody>
-                  <a:tcPr marL="91440" marR="91440" marT="45720" marB="45720">
-                    <a:lnR w="9525">
-                      <a:solidFill>
-                        <a:srgbClr val="C9D6E3"/>
-                      </a:solidFill>
-                      <a:prstDash val="solid"/>
-                    </a:lnR>
-                    <a:lnB w="9525">
-                      <a:solidFill>
-                        <a:srgbClr val="C9D6E3"/>
-                      </a:solidFill>
-                      <a:prstDash val="solid"/>
-                    </a:lnB>
-                    <a:solidFill>
-                      <a:srgbClr val="FFFFFF"/>
-                    </a:solidFill>
-                  </a:tcPr>
-                </a:tc>
-              </a:tr>
-              <a:tr h="426720">
-                <a:tc>
-                  <a:txBody>
-                    <a:bodyPr/>
-                    <a:lstStyle/>
-                    <a:p>
-                      <a:r>
-                        <a:rPr sz="1313" b="0">
-                          <a:solidFill>
-                            <a:srgbClr val="1A1A1A"/>
-                          </a:solidFill>
-                        </a:rPr>
-                        <a:t>Block document-sourced actions</a:t>
-                      </a:r>
-                    </a:p>
-                  </a:txBody>
-                  <a:tcPr marL="91440" marR="91440" marT="45720" marB="45720">
-                    <a:lnL w="9525">
-                      <a:solidFill>
-                        <a:srgbClr val="C9D6E3"/>
-                      </a:solidFill>
-                      <a:prstDash val="solid"/>
-                    </a:lnL>
-                    <a:lnR w="9525">
-                      <a:solidFill>
-                        <a:srgbClr val="C9D6E3"/>
-                      </a:solidFill>
-                      <a:prstDash val="solid"/>
-                    </a:lnR>
-                    <a:lnB w="9525">
-                      <a:solidFill>
-                        <a:srgbClr val="C9D6E3"/>
-                      </a:solidFill>
-                      <a:prstDash val="solid"/>
-                    </a:lnB>
-                    <a:solidFill>
-                      <a:srgbClr val="FFFFFF"/>
-                    </a:solidFill>
-                  </a:tcPr>
-                </a:tc>
-                <a:tc>
-                  <a:txBody>
-                    <a:bodyPr/>
-                    <a:lstStyle/>
-                    <a:p>
-                      <a:r>
-                        <a:rPr sz="1313" b="0">
-                          <a:solidFill>
-                            <a:srgbClr val="1A1A1A"/>
-                          </a:solidFill>
-                        </a:rPr>
-                        <a:t>Recipient provenance gate plus explicit review of live sends.</a:t>
-                      </a:r>
-                    </a:p>
-                  </a:txBody>
-                  <a:tcPr marL="91440" marR="91440" marT="45720" marB="45720">
-                    <a:lnR w="9525">
-                      <a:solidFill>
-                        <a:srgbClr val="C9D6E3"/>
-                      </a:solidFill>
-                      <a:prstDash val="solid"/>
-                    </a:lnR>
-                    <a:lnB w="9525">
-                      <a:solidFill>
-                        <a:srgbClr val="C9D6E3"/>
-                      </a:solidFill>
-                      <a:prstDash val="solid"/>
-                    </a:lnB>
-                    <a:solidFill>
-                      <a:srgbClr val="FFFFFF"/>
-                    </a:solidFill>
-                  </a:tcPr>
-                </a:tc>
-              </a:tr>
-            </a:tbl>
-          </a:graphicData>
-        </a:graphic>
-      </p:graphicFrame>
-    </p:spTree>
-    <p:extLst>
-      <p:ext uri="{BB962C8B-B14F-4D97-AF65-F5344CB8AC3E}">
-        <p14:creationId xmlns:p14="http://schemas.microsoft.com/office/powerpoint/2010/main" val="928281534"/>
-      </p:ext>
-    </p:extLst>
-  </p:cSld>
-</p:sld>
-</file>
-
-<file path=ppt/slides/slide3.xml><?xml version="1.0" encoding="utf-8"?>
-<p:sld xmlns:p="http://schemas.openxmlformats.org/presentationml/2006/main">
-  <p:cSld>
-    <p:bg>
-      <p:bgPr>
-        <a:solidFill xmlns:a="http://schemas.openxmlformats.org/drawingml/2006/main">
-          <a:srgbClr val="FFFFFF"/>
-        </a:solidFill>
-      </p:bgPr>
-    </p:bg>
-    <p:spTree>
-      <p:nvGrpSpPr>
-        <p:cNvPr id="1" name=""/>
-        <p:cNvGrpSpPr/>
-        <p:nvPr/>
-      </p:nvGrpSpPr>
-      <p:grpSpPr>
-        <a:xfrm xmlns:a="http://schemas.openxmlformats.org/drawingml/2006/main"/>
-      </p:grpSpPr>
-      <p:sp>
-        <p:nvSpPr>
-          <p:cNvPr id="2" name="Text 0">
-            <a:extLst xmlns:a="http://schemas.openxmlformats.org/drawingml/2006/main">
-              <a:ext uri="{FF2B5EF4-FFF2-40B4-BE49-F238E27FC236}">
-                <a16:creationId xmlns:a16="http://schemas.microsoft.com/office/drawing/2014/main" id="{18714F2C-5B32-4B17-842B-365DB2CD74D4}"/>
-              </a:ext>
-            </a:extLst>
-          </p:cNvPr>
-          <p:cNvSpPr>
-            <a:spLocks xmlns:a="http://schemas.openxmlformats.org/drawingml/2006/main" noGrp="1"/>
-          </p:cNvSpPr>
-          <p:nvPr/>
-        </p:nvSpPr>
-        <p:spPr>
-          <a:xfrm xmlns:a="http://schemas.openxmlformats.org/drawingml/2006/main">
-            <a:off x="731520" y="411480"/>
-            <a:ext cx="5486400" cy="320040"/>
-          </a:xfrm>
-          <a:prstGeom xmlns:a="http://schemas.openxmlformats.org/drawingml/2006/main" prst="rect">
-            <a:avLst/>
-          </a:prstGeom>
-          <a:noFill xmlns:a="http://schemas.openxmlformats.org/drawingml/2006/main"/>
-        </p:spPr>
-        <p:txBody>
-          <a:bodyPr xmlns:a="http://schemas.openxmlformats.org/drawingml/2006/main" wrap="square" lIns="0" tIns="0" rIns="0" bIns="0" anchor="ctr"/>
-          <a:lstStyle xmlns:a="http://schemas.openxmlformats.org/drawingml/2006/main"/>
-          <a:p xmlns:a="http://schemas.openxmlformats.org/drawingml/2006/main">
-            <a:pPr marL="0" indent="0">
-              <a:buNone/>
-            </a:pPr>
-            <a:r>
-              <a:rPr sz="1200" b="1" spc="100">
-                <a:solidFill>
-                  <a:srgbClr val="1F5C99"/>
-                </a:solidFill>
-                <a:latin typeface="Calibri"/>
-                <a:ea typeface="Calibri"/>
-                <a:cs typeface="Calibri"/>
-              </a:rPr>
-              <a:t>SECTION 2 OF 4</a:t>
-            </a:r>
-            <a:endParaRPr sz="1200"/>
-          </a:p>
-        </p:txBody>
-      </p:sp>
-      <p:sp>
-        <p:nvSpPr>
-          <p:cNvPr id="3" name="Text 1">
-            <a:extLst xmlns:a="http://schemas.openxmlformats.org/drawingml/2006/main">
-              <a:ext uri="{FF2B5EF4-FFF2-40B4-BE49-F238E27FC236}">
-                <a16:creationId xmlns:a16="http://schemas.microsoft.com/office/drawing/2014/main" id="{384CF1E5-3EF8-4D8E-8545-6D9494D4E0BA}"/>
-              </a:ext>
-            </a:extLst>
-          </p:cNvPr>
-          <p:cNvSpPr>
-            <a:spLocks xmlns:a="http://schemas.openxmlformats.org/drawingml/2006/main" noGrp="1"/>
-          </p:cNvSpPr>
-          <p:nvPr/>
-        </p:nvSpPr>
-        <p:spPr>
-          <a:xfrm xmlns:a="http://schemas.openxmlformats.org/drawingml/2006/main">
-            <a:off x="8899855" y="411480"/>
-            <a:ext cx="2560320" cy="320040"/>
-          </a:xfrm>
-          <a:prstGeom xmlns:a="http://schemas.openxmlformats.org/drawingml/2006/main" prst="rect">
-            <a:avLst/>
-          </a:prstGeom>
-          <a:noFill xmlns:a="http://schemas.openxmlformats.org/drawingml/2006/main"/>
-        </p:spPr>
-        <p:txBody>
-          <a:bodyPr xmlns:a="http://schemas.openxmlformats.org/drawingml/2006/main" wrap="square" lIns="0" tIns="0" rIns="0" bIns="0" anchor="ctr"/>
-          <a:lstStyle xmlns:a="http://schemas.openxmlformats.org/drawingml/2006/main"/>
-          <a:p xmlns:a="http://schemas.openxmlformats.org/drawingml/2006/main">
-            <a:pPr marL="0" indent="0" algn="r">
-              <a:buNone/>
-            </a:pPr>
-            <a:r>
-              <a:rPr sz="1100" i="1">
-                <a:solidFill>
-                  <a:srgbClr val="5A6672"/>
-                </a:solidFill>
-                <a:latin typeface="Calibri"/>
-                <a:ea typeface="Calibri"/>
-                <a:cs typeface="Calibri"/>
-              </a:rPr>
-              <a:t>Presented by: Youssef + Hamza</a:t>
-            </a:r>
-            <a:endParaRPr sz="1100"/>
-          </a:p>
-        </p:txBody>
-      </p:sp>
-      <p:sp>
-        <p:nvSpPr>
-          <p:cNvPr id="4" name="Text 2">
-            <a:extLst xmlns:a="http://schemas.openxmlformats.org/drawingml/2006/main">
-              <a:ext uri="{FF2B5EF4-FFF2-40B4-BE49-F238E27FC236}">
-                <a16:creationId xmlns:a16="http://schemas.microsoft.com/office/drawing/2014/main" id="{C4318ABC-C8D0-4417-A0A2-C5F384859B54}"/>
-              </a:ext>
-            </a:extLst>
-          </p:cNvPr>
-          <p:cNvSpPr>
-            <a:spLocks xmlns:a="http://schemas.openxmlformats.org/drawingml/2006/main" noGrp="1"/>
-          </p:cNvSpPr>
-          <p:nvPr/>
-        </p:nvSpPr>
-        <p:spPr>
-          <a:xfrm xmlns:a="http://schemas.openxmlformats.org/drawingml/2006/main">
-            <a:off x="731520" y="713232"/>
-            <a:ext cx="10728655" cy="640080"/>
-          </a:xfrm>
-          <a:prstGeom xmlns:a="http://schemas.openxmlformats.org/drawingml/2006/main" prst="rect">
-            <a:avLst/>
-          </a:prstGeom>
-          <a:noFill xmlns:a="http://schemas.openxmlformats.org/drawingml/2006/main"/>
-        </p:spPr>
-        <p:txBody>
-          <a:bodyPr xmlns:a="http://schemas.openxmlformats.org/drawingml/2006/main" wrap="square" lIns="0" tIns="0" rIns="0" bIns="0" anchor="ctr"/>
-          <a:lstStyle xmlns:a="http://schemas.openxmlformats.org/drawingml/2006/main"/>
-          <a:p xmlns:a="http://schemas.openxmlformats.org/drawingml/2006/main">
-            <a:pPr marL="0" indent="0">
-              <a:buNone/>
-            </a:pPr>
-            <a:r>
-              <a:rPr sz="2800" b="1">
-                <a:solidFill>
-                  <a:srgbClr val="14375E"/>
-                </a:solidFill>
-                <a:latin typeface="Calibri"/>
-                <a:ea typeface="Calibri"/>
-                <a:cs typeface="Calibri"/>
-              </a:rPr>
-              <a:t>Progress Update</a:t>
-            </a:r>
-            <a:endParaRPr sz="2800"/>
-          </a:p>
-        </p:txBody>
-      </p:sp>
-      <p:sp>
-        <p:nvSpPr>
-          <p:cNvPr id="5" name="Shape 3">
-            <a:extLst xmlns:a="http://schemas.openxmlformats.org/drawingml/2006/main">
-              <a:ext uri="{FF2B5EF4-FFF2-40B4-BE49-F238E27FC236}">
-                <a16:creationId xmlns:a16="http://schemas.microsoft.com/office/drawing/2014/main" id="{9CC00157-E7FF-4C60-8F18-ADA7DB96261B}"/>
-              </a:ext>
-            </a:extLst>
-          </p:cNvPr>
-          <p:cNvSpPr>
-            <a:spLocks xmlns:a="http://schemas.openxmlformats.org/drawingml/2006/main" noGrp="1"/>
-          </p:cNvSpPr>
-          <p:nvPr/>
-        </p:nvSpPr>
-        <p:spPr>
-          <a:xfrm xmlns:a="http://schemas.openxmlformats.org/drawingml/2006/main">
-            <a:off x="731520" y="1554480"/>
-            <a:ext cx="10728655" cy="2103120"/>
-          </a:xfrm>
-          <a:prstGeom xmlns:a="http://schemas.openxmlformats.org/drawingml/2006/main" prst="rect">
-            <a:avLst/>
-          </a:prstGeom>
-          <a:solidFill xmlns:a="http://schemas.openxmlformats.org/drawingml/2006/main">
-            <a:srgbClr val="F2F5F9"/>
-          </a:solidFill>
-        </p:spPr>
-      </p:sp>
-      <p:sp>
-        <p:nvSpPr>
-          <p:cNvPr id="6" name="Text 4">
-            <a:extLst xmlns:a="http://schemas.openxmlformats.org/drawingml/2006/main">
-              <a:ext uri="{FF2B5EF4-FFF2-40B4-BE49-F238E27FC236}">
-                <a16:creationId xmlns:a16="http://schemas.microsoft.com/office/drawing/2014/main" id="{47C2C4E8-B833-425B-9F5D-A910F2F06B68}"/>
-              </a:ext>
-            </a:extLst>
-          </p:cNvPr>
-          <p:cNvSpPr>
-            <a:spLocks xmlns:a="http://schemas.openxmlformats.org/drawingml/2006/main" noGrp="1"/>
-          </p:cNvSpPr>
-          <p:nvPr/>
-        </p:nvSpPr>
-        <p:spPr>
-          <a:xfrm xmlns:a="http://schemas.openxmlformats.org/drawingml/2006/main">
-            <a:off x="960120" y="1691640"/>
-            <a:ext cx="5486400" cy="274320"/>
-          </a:xfrm>
-          <a:prstGeom xmlns:a="http://schemas.openxmlformats.org/drawingml/2006/main" prst="rect">
-            <a:avLst/>
-          </a:prstGeom>
-          <a:noFill xmlns:a="http://schemas.openxmlformats.org/drawingml/2006/main"/>
-        </p:spPr>
-        <p:txBody>
-          <a:bodyPr xmlns:a="http://schemas.openxmlformats.org/drawingml/2006/main" wrap="square" lIns="0" tIns="0" rIns="0" bIns="0" anchor="ctr"/>
-          <a:lstStyle xmlns:a="http://schemas.openxmlformats.org/drawingml/2006/main"/>
-          <a:p xmlns:a="http://schemas.openxmlformats.org/drawingml/2006/main">
-            <a:pPr marL="0" indent="0">
-              <a:buNone/>
-            </a:pPr>
-            <a:r>
-              <a:rPr sz="1100" b="1">
-                <a:solidFill>
-                  <a:srgbClr val="5A6672"/>
-                </a:solidFill>
-                <a:latin typeface="Calibri"/>
-                <a:ea typeface="Calibri"/>
-                <a:cs typeface="Calibri"/>
-              </a:rPr>
-              <a:t>IMPLEMENTATION AND EVIDENCE</a:t>
-            </a:r>
-            <a:endParaRPr sz="1100"/>
-          </a:p>
-        </p:txBody>
-      </p:sp>
-      <p:sp>
-        <p:nvSpPr>
-          <p:cNvPr id="9" name="Text 7">
-            <a:extLst xmlns:a="http://schemas.openxmlformats.org/drawingml/2006/main">
-              <a:ext uri="{FF2B5EF4-FFF2-40B4-BE49-F238E27FC236}">
-                <a16:creationId xmlns:a16="http://schemas.microsoft.com/office/drawing/2014/main" id="{BDA11AD6-D20A-4B1C-BBDD-C6047D24D88A}"/>
-              </a:ext>
-            </a:extLst>
-          </p:cNvPr>
-          <p:cNvSpPr>
-            <a:spLocks xmlns:a="http://schemas.openxmlformats.org/drawingml/2006/main" noGrp="1"/>
-          </p:cNvSpPr>
-          <p:nvPr/>
-        </p:nvSpPr>
-        <p:spPr>
-          <a:xfrm xmlns:a="http://schemas.openxmlformats.org/drawingml/2006/main">
-            <a:off x="457200" y="6446520"/>
-            <a:ext cx="7315200" cy="274320"/>
-          </a:xfrm>
-          <a:prstGeom xmlns:a="http://schemas.openxmlformats.org/drawingml/2006/main" prst="rect">
-            <a:avLst/>
-          </a:prstGeom>
-          <a:noFill xmlns:a="http://schemas.openxmlformats.org/drawingml/2006/main"/>
-        </p:spPr>
-        <p:txBody>
-          <a:bodyPr xmlns:a="http://schemas.openxmlformats.org/drawingml/2006/main" wrap="square" lIns="0" tIns="0" rIns="0" bIns="0" anchor="ctr"/>
-          <a:lstStyle xmlns:a="http://schemas.openxmlformats.org/drawingml/2006/main"/>
-          <a:p xmlns:a="http://schemas.openxmlformats.org/drawingml/2006/main">
-            <a:pPr marL="0" indent="0">
-              <a:buNone/>
-            </a:pPr>
-            <a:r>
-              <a:rPr sz="1000">
-                <a:solidFill>
-                  <a:srgbClr val="5A6672"/>
-                </a:solidFill>
-                <a:latin typeface="Calibri"/>
-                <a:ea typeface="Calibri"/>
-                <a:cs typeface="Calibri"/>
-              </a:rPr>
-              <a:t>COE444 Computer Security  |  Progress Presentation Template</a:t>
-            </a:r>
-            <a:endParaRPr sz="1000"/>
-          </a:p>
-        </p:txBody>
-      </p:sp>
-      <p:sp>
-        <p:nvSpPr>
-          <p:cNvPr id="10" name="Text 8">
-            <a:extLst xmlns:a="http://schemas.openxmlformats.org/drawingml/2006/main">
-              <a:ext uri="{FF2B5EF4-FFF2-40B4-BE49-F238E27FC236}">
-                <a16:creationId xmlns:a16="http://schemas.microsoft.com/office/drawing/2014/main" id="{77E66292-C71C-4A4D-8A3A-70578FAD5F07}"/>
-              </a:ext>
-            </a:extLst>
-          </p:cNvPr>
-          <p:cNvSpPr>
-            <a:spLocks xmlns:a="http://schemas.openxmlformats.org/drawingml/2006/main" noGrp="1"/>
-          </p:cNvSpPr>
-          <p:nvPr/>
-        </p:nvSpPr>
-        <p:spPr>
-          <a:xfrm xmlns:a="http://schemas.openxmlformats.org/drawingml/2006/main">
-            <a:off x="11277295" y="6446520"/>
-            <a:ext cx="457200" cy="274320"/>
-          </a:xfrm>
-          <a:prstGeom xmlns:a="http://schemas.openxmlformats.org/drawingml/2006/main" prst="rect">
-            <a:avLst/>
-          </a:prstGeom>
-          <a:noFill xmlns:a="http://schemas.openxmlformats.org/drawingml/2006/main"/>
-        </p:spPr>
-        <p:txBody>
-          <a:bodyPr xmlns:a="http://schemas.openxmlformats.org/drawingml/2006/main" wrap="square" lIns="0" tIns="0" rIns="0" bIns="0" anchor="ctr"/>
-          <a:lstStyle xmlns:a="http://schemas.openxmlformats.org/drawingml/2006/main"/>
-          <a:p xmlns:a="http://schemas.openxmlformats.org/drawingml/2006/main">
-            <a:pPr marL="0" indent="0" algn="r">
-              <a:buNone/>
-            </a:pPr>
-            <a:r>
-              <a:rPr sz="1000">
-                <a:solidFill>
-                  <a:srgbClr val="5A6672"/>
-                </a:solidFill>
-                <a:latin typeface="Calibri"/>
-                <a:ea typeface="Calibri"/>
-                <a:cs typeface="Calibri"/>
-              </a:rPr>
-              <a:t>3</a:t>
-            </a:r>
-            <a:endParaRPr sz="1000"/>
-          </a:p>
-        </p:txBody>
-      </p:sp>
-      <p:sp>
-        <p:nvSpPr>
-          <p:cNvPr id="11" name="">
-            <a:extLst xmlns:a="http://schemas.openxmlformats.org/drawingml/2006/main">
-              <a:ext uri="{FF2B5EF4-FFF2-40B4-BE49-F238E27FC236}">
-                <a16:creationId xmlns:a16="http://schemas.microsoft.com/office/drawing/2014/main" id="{D8DF0850-A314-46D8-A52A-D7AEC497031A}"/>
-              </a:ext>
-            </a:extLst>
-          </p:cNvPr>
-          <p:cNvSpPr>
-            <a:spLocks xmlns:a="http://schemas.openxmlformats.org/drawingml/2006/main" noGrp="1"/>
-          </p:cNvSpPr>
-          <p:nvPr/>
-        </p:nvSpPr>
-        <p:spPr>
-          <a:xfrm xmlns:a="http://schemas.openxmlformats.org/drawingml/2006/main">
-            <a:off x="960120" y="2009775"/>
-            <a:ext cx="10271474" cy="638175"/>
-          </a:xfrm>
-          <a:prstGeom xmlns:a="http://schemas.openxmlformats.org/drawingml/2006/main" prst="rect">
-            <a:avLst/>
-          </a:prstGeom>
-          <a:noFill xmlns:a="http://schemas.openxmlformats.org/drawingml/2006/main"/>
-          <a:ln xmlns:a="http://schemas.openxmlformats.org/drawingml/2006/main" w="0">
-            <a:noFill/>
-          </a:ln>
-        </p:spPr>
-        <p:txBody>
-          <a:bodyPr xmlns:a="http://schemas.openxmlformats.org/drawingml/2006/main" lIns="0" tIns="0" rIns="0" bIns="0"/>
-          <a:lstStyle xmlns:a="http://schemas.openxmlformats.org/drawingml/2006/main">
-            <a:defPPr>
-              <a:defRPr sz="1575">
-                <a:solidFill>
-                  <a:srgbClr val="1A1A1A"/>
-                </a:solidFill>
-              </a:defRPr>
-            </a:defPPr>
-            <a:lvl1pPr>
-              <a:defRPr sz="1575">
-                <a:solidFill>
-                  <a:srgbClr val="1A1A1A"/>
-                </a:solidFill>
-              </a:defRPr>
-            </a:lvl1pPr>
-            <a:lvl2pPr>
-              <a:defRPr sz="1575">
-                <a:solidFill>
-                  <a:srgbClr val="1A1A1A"/>
-                </a:solidFill>
-              </a:defRPr>
-            </a:lvl2pPr>
-            <a:lvl3pPr>
-              <a:defRPr sz="1575">
-                <a:solidFill>
-                  <a:srgbClr val="1A1A1A"/>
-                </a:solidFill>
-              </a:defRPr>
-            </a:lvl3pPr>
-            <a:lvl4pPr>
-              <a:defRPr sz="1575">
-                <a:solidFill>
-                  <a:srgbClr val="1A1A1A"/>
-                </a:solidFill>
-              </a:defRPr>
-            </a:lvl4pPr>
-            <a:lvl5pPr>
-              <a:defRPr sz="1575">
-                <a:solidFill>
-                  <a:srgbClr val="1A1A1A"/>
-                </a:solidFill>
-              </a:defRPr>
-            </a:lvl5pPr>
-            <a:lvl6pPr>
-              <a:defRPr sz="1575">
-                <a:solidFill>
-                  <a:srgbClr val="1A1A1A"/>
-                </a:solidFill>
-              </a:defRPr>
-            </a:lvl6pPr>
-            <a:lvl7pPr>
-              <a:defRPr sz="1575">
-                <a:solidFill>
-                  <a:srgbClr val="1A1A1A"/>
-                </a:solidFill>
-              </a:defRPr>
-            </a:lvl7pPr>
-            <a:lvl8pPr>
-              <a:defRPr sz="1575">
-                <a:solidFill>
-                  <a:srgbClr val="1A1A1A"/>
-                </a:solidFill>
-              </a:defRPr>
-            </a:lvl8pPr>
-            <a:lvl9pPr>
-              <a:defRPr sz="1575">
-                <a:solidFill>
-                  <a:srgbClr val="1A1A1A"/>
-                </a:solidFill>
-              </a:defRPr>
-            </a:lvl9pPr>
-          </a:lstStyle>
-          <a:p xmlns:a="http://schemas.openxmlformats.org/drawingml/2006/main">
-            <a:pPr>
-              <a:defRPr sz="1575">
-                <a:solidFill>
-                  <a:srgbClr val="1A1A1A"/>
-                </a:solidFill>
-              </a:defRPr>
-            </a:pPr>
-            <a:r>
-              <a:rPr sz="1575">
-                <a:solidFill>
-                  <a:srgbClr val="1A1A1A"/>
-                </a:solidFill>
-              </a:rPr>
-              <a:t>Built: document search, contact lookup, simulated mailbox, detector and recipient gate.</a:t>
-            </a:r>
-          </a:p>
-          <a:p xmlns:a="http://schemas.openxmlformats.org/drawingml/2006/main">
-            <a:pPr>
-              <a:defRPr sz="1575">
-                <a:solidFill>
-                  <a:srgbClr val="1A1A1A"/>
-                </a:solidFill>
-              </a:defRPr>
-            </a:pPr>
-            <a:r>
-              <a:rPr sz="1575">
-                <a:solidFill>
-                  <a:srgbClr val="1A1A1A"/>
-                </a:solidFill>
-              </a:rPr>
-              <a:t>Software verification: 256 automated checks pass, including 61 defense specifications.</a:t>
-            </a:r>
-          </a:p>
-        </p:txBody>
-      </p:sp>
-      <p:sp>
-        <p:nvSpPr>
-          <p:cNvPr id="12" name="">
-            <a:extLst xmlns:a="http://schemas.openxmlformats.org/drawingml/2006/main">
-              <a:ext uri="{FF2B5EF4-FFF2-40B4-BE49-F238E27FC236}">
-                <a16:creationId xmlns:a16="http://schemas.microsoft.com/office/drawing/2014/main" id="{B6B3BA21-B8B3-4980-ACC4-AAB26C090C38}"/>
-              </a:ext>
-            </a:extLst>
-          </p:cNvPr>
-          <p:cNvSpPr>
-            <a:spLocks xmlns:a="http://schemas.openxmlformats.org/drawingml/2006/main" noGrp="1"/>
-          </p:cNvSpPr>
-          <p:nvPr/>
-        </p:nvSpPr>
-        <p:spPr>
-          <a:xfrm xmlns:a="http://schemas.openxmlformats.org/drawingml/2006/main">
-            <a:off x="960120" y="2724150"/>
-            <a:ext cx="10271474" cy="619125"/>
-          </a:xfrm>
-          <a:prstGeom xmlns:a="http://schemas.openxmlformats.org/drawingml/2006/main" prst="rect">
-            <a:avLst/>
-          </a:prstGeom>
-          <a:noFill xmlns:a="http://schemas.openxmlformats.org/drawingml/2006/main"/>
-          <a:ln xmlns:a="http://schemas.openxmlformats.org/drawingml/2006/main" w="0">
-            <a:noFill/>
-          </a:ln>
-        </p:spPr>
-        <p:txBody>
-          <a:bodyPr xmlns:a="http://schemas.openxmlformats.org/drawingml/2006/main" lIns="0" tIns="0" rIns="0" bIns="0"/>
-          <a:lstStyle xmlns:a="http://schemas.openxmlformats.org/drawingml/2006/main">
-            <a:defPPr>
-              <a:defRPr sz="1575">
-                <a:solidFill>
-                  <a:srgbClr val="1A1A1A"/>
-                </a:solidFill>
-              </a:defRPr>
-            </a:defPPr>
-            <a:lvl1pPr>
-              <a:defRPr sz="1575">
-                <a:solidFill>
-                  <a:srgbClr val="1A1A1A"/>
-                </a:solidFill>
-              </a:defRPr>
-            </a:lvl1pPr>
-            <a:lvl2pPr>
-              <a:defRPr sz="1575">
-                <a:solidFill>
-                  <a:srgbClr val="1A1A1A"/>
-                </a:solidFill>
-              </a:defRPr>
-            </a:lvl2pPr>
-            <a:lvl3pPr>
-              <a:defRPr sz="1575">
-                <a:solidFill>
-                  <a:srgbClr val="1A1A1A"/>
-                </a:solidFill>
-              </a:defRPr>
-            </a:lvl3pPr>
-            <a:lvl4pPr>
-              <a:defRPr sz="1575">
-                <a:solidFill>
-                  <a:srgbClr val="1A1A1A"/>
-                </a:solidFill>
-              </a:defRPr>
-            </a:lvl4pPr>
-            <a:lvl5pPr>
-              <a:defRPr sz="1575">
-                <a:solidFill>
-                  <a:srgbClr val="1A1A1A"/>
-                </a:solidFill>
-              </a:defRPr>
-            </a:lvl5pPr>
-            <a:lvl6pPr>
-              <a:defRPr sz="1575">
-                <a:solidFill>
-                  <a:srgbClr val="1A1A1A"/>
-                </a:solidFill>
-              </a:defRPr>
-            </a:lvl6pPr>
-            <a:lvl7pPr>
-              <a:defRPr sz="1575">
-                <a:solidFill>
-                  <a:srgbClr val="1A1A1A"/>
-                </a:solidFill>
-              </a:defRPr>
-            </a:lvl7pPr>
-            <a:lvl8pPr>
-              <a:defRPr sz="1575">
-                <a:solidFill>
-                  <a:srgbClr val="1A1A1A"/>
-                </a:solidFill>
-              </a:defRPr>
-            </a:lvl8pPr>
-            <a:lvl9pPr>
-              <a:defRPr sz="1575">
-                <a:solidFill>
-                  <a:srgbClr val="1A1A1A"/>
-                </a:solidFill>
-              </a:defRPr>
-            </a:lvl9pPr>
-          </a:lstStyle>
-          <a:p xmlns:a="http://schemas.openxmlformats.org/drawingml/2006/main">
-            <a:pPr>
-              <a:defRPr sz="1575">
-                <a:solidFill>
-                  <a:srgbClr val="1A1A1A"/>
-                </a:solidFill>
-              </a:defRPr>
-            </a:pPr>
-            <a:r>
-              <a:rPr sz="1575">
-                <a:solidFill>
-                  <a:srgbClr val="1A1A1A"/>
-                </a:solidFill>
-              </a:rPr>
-              <a:t>Stored attacks: 223 = 23 custom (10 dev + 13 held out) + 200 external.</a:t>
-            </a:r>
-          </a:p>
-          <a:p xmlns:a="http://schemas.openxmlformats.org/drawingml/2006/main">
-            <a:pPr>
-              <a:defRPr sz="1575">
-                <a:solidFill>
-                  <a:srgbClr val="1A1A1A"/>
-                </a:solidFill>
-              </a:defRPr>
-            </a:pPr>
-            <a:r>
-              <a:rPr sz="1575">
-                <a:solidFill>
-                  <a:srgbClr val="1A1A1A"/>
-                </a:solidFill>
-              </a:rPr>
-              <a:t>Table below: 10 dev attacks and 7 benign tasks, each repeated 3 times.</a:t>
-            </a:r>
-          </a:p>
-        </p:txBody>
-      </p:sp>
-      <p:graphicFrame>
-        <p:nvGraphicFramePr>
-          <p:cNvPr id="13" name="">
-            <a:extLst xmlns:a="http://schemas.openxmlformats.org/drawingml/2006/main">
-              <a:ext uri="{FF2B5EF4-FFF2-40B4-BE49-F238E27FC236}">
-                <a16:creationId xmlns:a16="http://schemas.microsoft.com/office/drawing/2014/main" id="{B07A06ED-42F5-4934-9302-2F8A85DC73C1}"/>
-              </a:ext>
-            </a:extLst>
-          </p:cNvPr>
-          <p:cNvGraphicFramePr/>
-          <p:nvPr/>
-        </p:nvGraphicFramePr>
-        <p:xfrm>
-          <a:off xmlns:a="http://schemas.openxmlformats.org/drawingml/2006/main" x="731520" y="3476625"/>
-          <a:ext xmlns:a="http://schemas.openxmlformats.org/drawingml/2006/main" cx="10728674" cy="2019300"/>
-        </p:xfrm>
-        <a:graphic xmlns:a="http://schemas.openxmlformats.org/drawingml/2006/main">
-          <a:graphicData uri="http://schemas.openxmlformats.org/drawingml/2006/table">
-            <a:tbl>
-              <a:tblPr/>
-              <a:tblGrid>
-                <a:gridCol w="4286250"/>
-                <a:gridCol w="2857500"/>
-                <a:gridCol w="3584924"/>
-              </a:tblGrid>
-              <a:tr h="403860">
-                <a:tc>
-                  <a:txBody>
-                    <a:bodyPr/>
-                    <a:lstStyle/>
-                    <a:p>
-                      <a:r>
-                        <a:rPr sz="1313" b="1">
-                          <a:solidFill>
-                            <a:srgbClr val="FFFFFF"/>
-                          </a:solidFill>
-                        </a:rPr>
-                        <a:t>Historical condition</a:t>
-                      </a:r>
-                    </a:p>
-                  </a:txBody>
-                  <a:tcPr marL="91440" marR="91440" marT="45720" marB="45720">
-                    <a:lnL w="9525">
-                      <a:solidFill>
-                        <a:srgbClr val="C9D6E3"/>
-                      </a:solidFill>
-                      <a:prstDash val="solid"/>
-                    </a:lnL>
-                    <a:lnR w="9525">
-                      <a:solidFill>
-                        <a:srgbClr val="C9D6E3"/>
-                      </a:solidFill>
-                      <a:prstDash val="solid"/>
-                    </a:lnR>
-                    <a:lnT w="9525">
-                      <a:solidFill>
-                        <a:srgbClr val="C9D6E3"/>
-                      </a:solidFill>
-                      <a:prstDash val="solid"/>
-                    </a:lnT>
-                    <a:lnB w="9525">
-                      <a:solidFill>
-                        <a:srgbClr val="C9D6E3"/>
-                      </a:solidFill>
-                      <a:prstDash val="solid"/>
-                    </a:lnB>
-                    <a:solidFill>
-                      <a:srgbClr val="14375E"/>
-                    </a:solidFill>
-                  </a:tcPr>
-                </a:tc>
-                <a:tc>
-                  <a:txBody>
-                    <a:bodyPr/>
-                    <a:lstStyle/>
-                    <a:p>
-                      <a:r>
-                        <a:rPr sz="1313" b="1">
-                          <a:solidFill>
-                            <a:srgbClr val="FFFFFF"/>
-                          </a:solidFill>
-                        </a:rPr>
-                        <a:t>Attack success by majority</a:t>
-                      </a:r>
-                    </a:p>
-                  </a:txBody>
-                  <a:tcPr marL="91440" marR="91440" marT="45720" marB="45720">
-                    <a:lnR w="9525">
-                      <a:solidFill>
-                        <a:srgbClr val="C9D6E3"/>
-                      </a:solidFill>
-                      <a:prstDash val="solid"/>
-                    </a:lnR>
-                    <a:lnT w="9525">
-                      <a:solidFill>
-                        <a:srgbClr val="C9D6E3"/>
-                      </a:solidFill>
-                      <a:prstDash val="solid"/>
-                    </a:lnT>
-                    <a:lnB w="9525">
-                      <a:solidFill>
-                        <a:srgbClr val="C9D6E3"/>
-                      </a:solidFill>
-                      <a:prstDash val="solid"/>
-                    </a:lnB>
-                    <a:solidFill>
-                      <a:srgbClr val="14375E"/>
-                    </a:solidFill>
-                  </a:tcPr>
-                </a:tc>
-                <a:tc>
-                  <a:txBody>
-                    <a:bodyPr/>
-                    <a:lstStyle/>
-                    <a:p>
-                      <a:r>
-                        <a:rPr sz="1313" b="1">
-                          <a:solidFill>
-                            <a:srgbClr val="FFFFFF"/>
-                          </a:solidFill>
-                        </a:rPr>
-                        <a:t>Benign tasks by majority</a:t>
-                      </a:r>
-                    </a:p>
-                  </a:txBody>
-                  <a:tcPr marL="91440" marR="91440" marT="45720" marB="45720">
-                    <a:lnR w="9525">
-                      <a:solidFill>
-                        <a:srgbClr val="C9D6E3"/>
-                      </a:solidFill>
-                      <a:prstDash val="solid"/>
-                    </a:lnR>
-                    <a:lnT w="9525">
-                      <a:solidFill>
-                        <a:srgbClr val="C9D6E3"/>
-                      </a:solidFill>
-                      <a:prstDash val="solid"/>
-                    </a:lnT>
-                    <a:lnB w="9525">
-                      <a:solidFill>
-                        <a:srgbClr val="C9D6E3"/>
-                      </a:solidFill>
-                      <a:prstDash val="solid"/>
-                    </a:lnB>
-                    <a:solidFill>
-                      <a:srgbClr val="14375E"/>
-                    </a:solidFill>
-                  </a:tcPr>
-                </a:tc>
-              </a:tr>
-              <a:tr h="403860">
-                <a:tc>
-                  <a:txBody>
-                    <a:bodyPr/>
-                    <a:lstStyle/>
-                    <a:p>
-                      <a:r>
-                        <a:rPr sz="1313" b="0">
-                          <a:solidFill>
-                            <a:srgbClr val="1A1A1A"/>
-                          </a:solidFill>
-                        </a:rPr>
-                        <a:t>A: no defense</a:t>
-                      </a:r>
-                    </a:p>
-                  </a:txBody>
-                  <a:tcPr marL="91440" marR="91440" marT="45720" marB="45720">
-                    <a:lnL w="9525">
-                      <a:solidFill>
-                        <a:srgbClr val="C9D6E3"/>
-                      </a:solidFill>
-                      <a:prstDash val="solid"/>
-                    </a:lnL>
-                    <a:lnR w="9525">
-                      <a:solidFill>
-                        <a:srgbClr val="C9D6E3"/>
-                      </a:solidFill>
-                      <a:prstDash val="solid"/>
-                    </a:lnR>
-                    <a:lnB w="9525">
-                      <a:solidFill>
-                        <a:srgbClr val="C9D6E3"/>
-                      </a:solidFill>
-                      <a:prstDash val="solid"/>
-                    </a:lnB>
-                    <a:solidFill>
-                      <a:srgbClr val="FFFFFF"/>
-                    </a:solidFill>
-                  </a:tcPr>
-                </a:tc>
-                <a:tc>
-                  <a:txBody>
-                    <a:bodyPr/>
-                    <a:lstStyle/>
-                    <a:p>
-                      <a:r>
-                        <a:rPr sz="1313" b="0">
-                          <a:solidFill>
-                            <a:srgbClr val="1A1A1A"/>
-                          </a:solidFill>
-                        </a:rPr>
-                        <a:t>6/10 (60%)</a:t>
-                      </a:r>
-                    </a:p>
-                  </a:txBody>
-                  <a:tcPr marL="91440" marR="91440" marT="45720" marB="45720">
-                    <a:lnR w="9525">
-                      <a:solidFill>
-                        <a:srgbClr val="C9D6E3"/>
-                      </a:solidFill>
-                      <a:prstDash val="solid"/>
-                    </a:lnR>
-                    <a:lnB w="9525">
-                      <a:solidFill>
-                        <a:srgbClr val="C9D6E3"/>
-                      </a:solidFill>
-                      <a:prstDash val="solid"/>
-                    </a:lnB>
-                    <a:solidFill>
-                      <a:srgbClr val="FFFFFF"/>
-                    </a:solidFill>
-                  </a:tcPr>
-                </a:tc>
-                <a:tc>
-                  <a:txBody>
-                    <a:bodyPr/>
-                    <a:lstStyle/>
-                    <a:p>
-                      <a:r>
-                        <a:rPr sz="1313" b="0">
-                          <a:solidFill>
-                            <a:srgbClr val="1A1A1A"/>
-                          </a:solidFill>
-                        </a:rPr>
-                        <a:t>7/7</a:t>
-                      </a:r>
-                    </a:p>
-                  </a:txBody>
-                  <a:tcPr marL="91440" marR="91440" marT="45720" marB="45720">
-                    <a:lnR w="9525">
-                      <a:solidFill>
-                        <a:srgbClr val="C9D6E3"/>
-                      </a:solidFill>
-                      <a:prstDash val="solid"/>
-                    </a:lnR>
-                    <a:lnB w="9525">
-                      <a:solidFill>
-                        <a:srgbClr val="C9D6E3"/>
-                      </a:solidFill>
-                      <a:prstDash val="solid"/>
-                    </a:lnB>
-                    <a:solidFill>
-                      <a:srgbClr val="FFFFFF"/>
-                    </a:solidFill>
-                  </a:tcPr>
-                </a:tc>
-              </a:tr>
-              <a:tr h="403860">
-                <a:tc>
-                  <a:txBody>
-                    <a:bodyPr/>
-                    <a:lstStyle/>
-                    <a:p>
-                      <a:r>
-                        <a:rPr sz="1313" b="0">
-                          <a:solidFill>
-                            <a:srgbClr val="1A1A1A"/>
-                          </a:solidFill>
-                        </a:rPr>
-                        <a:t>B: detection only</a:t>
-                      </a:r>
-                    </a:p>
-                  </a:txBody>
-                  <a:tcPr marL="91440" marR="91440" marT="45720" marB="45720">
-                    <a:lnL w="9525">
-                      <a:solidFill>
-                        <a:srgbClr val="C9D6E3"/>
-                      </a:solidFill>
-                      <a:prstDash val="solid"/>
-                    </a:lnL>
-                    <a:lnR w="9525">
-                      <a:solidFill>
-                        <a:srgbClr val="C9D6E3"/>
-                      </a:solidFill>
-                      <a:prstDash val="solid"/>
-                    </a:lnR>
-                    <a:lnB w="9525">
-                      <a:solidFill>
-                        <a:srgbClr val="C9D6E3"/>
-                      </a:solidFill>
-                      <a:prstDash val="solid"/>
-                    </a:lnB>
-                    <a:solidFill>
-                      <a:srgbClr val="FFFFFF"/>
-                    </a:solidFill>
-                  </a:tcPr>
-                </a:tc>
-                <a:tc>
-                  <a:txBody>
-                    <a:bodyPr/>
-                    <a:lstStyle/>
-                    <a:p>
-                      <a:r>
-                        <a:rPr sz="1313" b="0">
-                          <a:solidFill>
-                            <a:srgbClr val="1A1A1A"/>
-                          </a:solidFill>
-                        </a:rPr>
-                        <a:t>1/10 (10%)</a:t>
-                      </a:r>
-                    </a:p>
-                  </a:txBody>
-                  <a:tcPr marL="91440" marR="91440" marT="45720" marB="45720">
-                    <a:lnR w="9525">
-                      <a:solidFill>
-                        <a:srgbClr val="C9D6E3"/>
-                      </a:solidFill>
-                      <a:prstDash val="solid"/>
-                    </a:lnR>
-                    <a:lnB w="9525">
-                      <a:solidFill>
-                        <a:srgbClr val="C9D6E3"/>
-                      </a:solidFill>
-                      <a:prstDash val="solid"/>
-                    </a:lnB>
-                    <a:solidFill>
-                      <a:srgbClr val="FFFFFF"/>
-                    </a:solidFill>
-                  </a:tcPr>
-                </a:tc>
-                <a:tc>
-                  <a:txBody>
-                    <a:bodyPr/>
-                    <a:lstStyle/>
-                    <a:p>
-                      <a:r>
-                        <a:rPr sz="1313" b="0">
-                          <a:solidFill>
-                            <a:srgbClr val="1A1A1A"/>
-                          </a:solidFill>
-                        </a:rPr>
-                        <a:t>7/7</a:t>
-                      </a:r>
-                    </a:p>
-                  </a:txBody>
-                  <a:tcPr marL="91440" marR="91440" marT="45720" marB="45720">
-                    <a:lnR w="9525">
-                      <a:solidFill>
-                        <a:srgbClr val="C9D6E3"/>
-                      </a:solidFill>
-                      <a:prstDash val="solid"/>
-                    </a:lnR>
-                    <a:lnB w="9525">
-                      <a:solidFill>
-                        <a:srgbClr val="C9D6E3"/>
-                      </a:solidFill>
-                      <a:prstDash val="solid"/>
-                    </a:lnB>
-                    <a:solidFill>
-                      <a:srgbClr val="FFFFFF"/>
-                    </a:solidFill>
-                  </a:tcPr>
-                </a:tc>
-              </a:tr>
-              <a:tr h="403860">
-                <a:tc>
-                  <a:txBody>
-                    <a:bodyPr/>
-                    <a:lstStyle/>
-                    <a:p>
-                      <a:r>
-                        <a:rPr sz="1313" b="0">
-                          <a:solidFill>
-                            <a:srgbClr val="1A1A1A"/>
-                          </a:solidFill>
-                        </a:rPr>
-                        <a:t>C: prevention only</a:t>
-                      </a:r>
-                    </a:p>
-                  </a:txBody>
-                  <a:tcPr marL="91440" marR="91440" marT="45720" marB="45720">
-                    <a:lnL w="9525">
-                      <a:solidFill>
-                        <a:srgbClr val="C9D6E3"/>
-                      </a:solidFill>
-                      <a:prstDash val="solid"/>
-                    </a:lnL>
-                    <a:lnR w="9525">
-                      <a:solidFill>
-                        <a:srgbClr val="C9D6E3"/>
-                      </a:solidFill>
-                      <a:prstDash val="solid"/>
-                    </a:lnR>
-                    <a:lnB w="9525">
-                      <a:solidFill>
-                        <a:srgbClr val="C9D6E3"/>
-                      </a:solidFill>
-                      <a:prstDash val="solid"/>
-                    </a:lnB>
-                    <a:solidFill>
-                      <a:srgbClr val="FFFFFF"/>
-                    </a:solidFill>
-                  </a:tcPr>
-                </a:tc>
-                <a:tc>
-                  <a:txBody>
-                    <a:bodyPr/>
-                    <a:lstStyle/>
-                    <a:p>
-                      <a:r>
-                        <a:rPr sz="1313" b="0">
-                          <a:solidFill>
-                            <a:srgbClr val="1A1A1A"/>
-                          </a:solidFill>
-                        </a:rPr>
-                        <a:t>3/10 (30%)</a:t>
-                      </a:r>
-                    </a:p>
-                  </a:txBody>
-                  <a:tcPr marL="91440" marR="91440" marT="45720" marB="45720">
-                    <a:lnR w="9525">
-                      <a:solidFill>
-                        <a:srgbClr val="C9D6E3"/>
-                      </a:solidFill>
-                      <a:prstDash val="solid"/>
-                    </a:lnR>
-                    <a:lnB w="9525">
-                      <a:solidFill>
-                        <a:srgbClr val="C9D6E3"/>
-                      </a:solidFill>
-                      <a:prstDash val="solid"/>
-                    </a:lnB>
-                    <a:solidFill>
-                      <a:srgbClr val="FFFFFF"/>
-                    </a:solidFill>
-                  </a:tcPr>
-                </a:tc>
-                <a:tc>
-                  <a:txBody>
-                    <a:bodyPr/>
-                    <a:lstStyle/>
-                    <a:p>
-                      <a:r>
-                        <a:rPr sz="1313" b="0">
-                          <a:solidFill>
-                            <a:srgbClr val="1A1A1A"/>
-                          </a:solidFill>
-                        </a:rPr>
-                        <a:t>7/7</a:t>
-                      </a:r>
-                    </a:p>
-                  </a:txBody>
-                  <a:tcPr marL="91440" marR="91440" marT="45720" marB="45720">
-                    <a:lnR w="9525">
-                      <a:solidFill>
-                        <a:srgbClr val="C9D6E3"/>
-                      </a:solidFill>
-                      <a:prstDash val="solid"/>
-                    </a:lnR>
-                    <a:lnB w="9525">
-                      <a:solidFill>
-                        <a:srgbClr val="C9D6E3"/>
-                      </a:solidFill>
-                      <a:prstDash val="solid"/>
-                    </a:lnB>
-                    <a:solidFill>
-                      <a:srgbClr val="FFFFFF"/>
-                    </a:solidFill>
-                  </a:tcPr>
-                </a:tc>
-              </a:tr>
-              <a:tr h="403860">
-                <a:tc>
-                  <a:txBody>
-                    <a:bodyPr/>
-                    <a:lstStyle/>
-                    <a:p>
-                      <a:r>
-                        <a:rPr sz="1313" b="0">
-                          <a:solidFill>
-                            <a:srgbClr val="1A1A1A"/>
-                          </a:solidFill>
-                        </a:rPr>
-                        <a:t>D: both defenses</a:t>
-                      </a:r>
-                    </a:p>
-                  </a:txBody>
-                  <a:tcPr marL="91440" marR="91440" marT="45720" marB="45720">
-                    <a:lnL w="9525">
-                      <a:solidFill>
-                        <a:srgbClr val="C9D6E3"/>
-                      </a:solidFill>
-                      <a:prstDash val="solid"/>
-                    </a:lnL>
-                    <a:lnR w="9525">
-                      <a:solidFill>
-                        <a:srgbClr val="C9D6E3"/>
-                      </a:solidFill>
-                      <a:prstDash val="solid"/>
-                    </a:lnR>
-                    <a:lnB w="9525">
-                      <a:solidFill>
-                        <a:srgbClr val="C9D6E3"/>
-                      </a:solidFill>
-                      <a:prstDash val="solid"/>
-                    </a:lnB>
-                    <a:solidFill>
-                      <a:srgbClr val="FFFFFF"/>
-                    </a:solidFill>
-                  </a:tcPr>
-                </a:tc>
-                <a:tc>
-                  <a:txBody>
-                    <a:bodyPr/>
-                    <a:lstStyle/>
-                    <a:p>
-                      <a:r>
-                        <a:rPr sz="1313" b="0">
-                          <a:solidFill>
-                            <a:srgbClr val="1A1A1A"/>
-                          </a:solidFill>
-                        </a:rPr>
-                        <a:t>1/10 (10%)</a:t>
-                      </a:r>
-                    </a:p>
-                  </a:txBody>
-                  <a:tcPr marL="91440" marR="91440" marT="45720" marB="45720">
-                    <a:lnR w="9525">
-                      <a:solidFill>
-                        <a:srgbClr val="C9D6E3"/>
-                      </a:solidFill>
-                      <a:prstDash val="solid"/>
-                    </a:lnR>
-                    <a:lnB w="9525">
-                      <a:solidFill>
-                        <a:srgbClr val="C9D6E3"/>
-                      </a:solidFill>
-                      <a:prstDash val="solid"/>
-                    </a:lnB>
-                    <a:solidFill>
-                      <a:srgbClr val="FFFFFF"/>
-                    </a:solidFill>
-                  </a:tcPr>
-                </a:tc>
-                <a:tc>
-                  <a:txBody>
-                    <a:bodyPr/>
-                    <a:lstStyle/>
-                    <a:p>
-                      <a:r>
-                        <a:rPr sz="1313" b="0">
-                          <a:solidFill>
-                            <a:srgbClr val="1A1A1A"/>
-                          </a:solidFill>
-                        </a:rPr>
-                        <a:t>7/7</a:t>
-                      </a:r>
-                    </a:p>
-                  </a:txBody>
-                  <a:tcPr marL="91440" marR="91440" marT="45720" marB="45720">
-                    <a:lnR w="9525">
-                      <a:solidFill>
-                        <a:srgbClr val="C9D6E3"/>
-                      </a:solidFill>
-                      <a:prstDash val="solid"/>
-                    </a:lnR>
-                    <a:lnB w="9525">
-                      <a:solidFill>
-                        <a:srgbClr val="C9D6E3"/>
-                      </a:solidFill>
-                      <a:prstDash val="solid"/>
-                    </a:lnB>
-                    <a:solidFill>
-                      <a:srgbClr val="FFFFFF"/>
-                    </a:solidFill>
-                  </a:tcPr>
-                </a:tc>
-              </a:tr>
-            </a:tbl>
-          </a:graphicData>
-        </a:graphic>
-      </p:graphicFrame>
-      <p:sp>
-        <p:nvSpPr>
-          <p:cNvPr id="14" name="">
-            <a:extLst xmlns:a="http://schemas.openxmlformats.org/drawingml/2006/main">
-              <a:ext uri="{FF2B5EF4-FFF2-40B4-BE49-F238E27FC236}">
-                <a16:creationId xmlns:a16="http://schemas.microsoft.com/office/drawing/2014/main" id="{DC35F669-7BA4-4C56-8E33-B0FAF8F8B969}"/>
-              </a:ext>
-            </a:extLst>
-          </p:cNvPr>
-          <p:cNvSpPr>
-            <a:spLocks xmlns:a="http://schemas.openxmlformats.org/drawingml/2006/main" noGrp="1"/>
-          </p:cNvSpPr>
-          <p:nvPr/>
-        </p:nvSpPr>
-        <p:spPr>
-          <a:xfrm xmlns:a="http://schemas.openxmlformats.org/drawingml/2006/main">
-            <a:off x="960120" y="5638800"/>
-            <a:ext cx="10271474" cy="581025"/>
-          </a:xfrm>
-          <a:prstGeom xmlns:a="http://schemas.openxmlformats.org/drawingml/2006/main" prst="rect">
-            <a:avLst/>
-          </a:prstGeom>
-          <a:noFill xmlns:a="http://schemas.openxmlformats.org/drawingml/2006/main"/>
-          <a:ln xmlns:a="http://schemas.openxmlformats.org/drawingml/2006/main" w="0">
-            <a:noFill/>
-          </a:ln>
-        </p:spPr>
-        <p:txBody>
-          <a:bodyPr xmlns:a="http://schemas.openxmlformats.org/drawingml/2006/main" lIns="0" tIns="0" rIns="0" bIns="0"/>
-          <a:lstStyle xmlns:a="http://schemas.openxmlformats.org/drawingml/2006/main">
-            <a:defPPr>
-              <a:defRPr sz="1400">
-                <a:solidFill>
-                  <a:srgbClr val="1A1A1A"/>
-                </a:solidFill>
-              </a:defRPr>
-            </a:defPPr>
-            <a:lvl1pPr>
-              <a:defRPr sz="1400">
-                <a:solidFill>
-                  <a:srgbClr val="1A1A1A"/>
-                </a:solidFill>
-              </a:defRPr>
-            </a:lvl1pPr>
-            <a:lvl2pPr>
-              <a:defRPr sz="1400">
-                <a:solidFill>
-                  <a:srgbClr val="1A1A1A"/>
-                </a:solidFill>
-              </a:defRPr>
-            </a:lvl2pPr>
-            <a:lvl3pPr>
-              <a:defRPr sz="1400">
-                <a:solidFill>
-                  <a:srgbClr val="1A1A1A"/>
-                </a:solidFill>
-              </a:defRPr>
-            </a:lvl3pPr>
-            <a:lvl4pPr>
-              <a:defRPr sz="1400">
-                <a:solidFill>
-                  <a:srgbClr val="1A1A1A"/>
-                </a:solidFill>
-              </a:defRPr>
-            </a:lvl4pPr>
-            <a:lvl5pPr>
-              <a:defRPr sz="1400">
-                <a:solidFill>
-                  <a:srgbClr val="1A1A1A"/>
-                </a:solidFill>
-              </a:defRPr>
-            </a:lvl5pPr>
-            <a:lvl6pPr>
-              <a:defRPr sz="1400">
-                <a:solidFill>
-                  <a:srgbClr val="1A1A1A"/>
-                </a:solidFill>
-              </a:defRPr>
-            </a:lvl6pPr>
-            <a:lvl7pPr>
-              <a:defRPr sz="1400">
-                <a:solidFill>
-                  <a:srgbClr val="1A1A1A"/>
-                </a:solidFill>
-              </a:defRPr>
-            </a:lvl7pPr>
-            <a:lvl8pPr>
-              <a:defRPr sz="1400">
-                <a:solidFill>
-                  <a:srgbClr val="1A1A1A"/>
-                </a:solidFill>
-              </a:defRPr>
-            </a:lvl8pPr>
-            <a:lvl9pPr>
-              <a:defRPr sz="1400">
-                <a:solidFill>
-                  <a:srgbClr val="1A1A1A"/>
-                </a:solidFill>
-              </a:defRPr>
-            </a:lvl9pPr>
-          </a:lstStyle>
-          <a:p xmlns:a="http://schemas.openxmlformats.org/drawingml/2006/main">
-            <a:pPr>
-              <a:defRPr sz="1400">
-                <a:solidFill>
-                  <a:srgbClr val="1A1A1A"/>
-                </a:solidFill>
-              </a:defRPr>
-            </a:pPr>
-            <a:r>
-              <a:rPr sz="1400">
-                <a:solidFill>
-                  <a:srgbClr val="1A1A1A"/>
-                </a:solidFill>
-              </a:rPr>
-              <a:t>Source: saved October 13 log. Each attack/task counts once, by majority of its 3 trials.</a:t>
-            </a:r>
-          </a:p>
-          <a:p xmlns:a="http://schemas.openxmlformats.org/drawingml/2006/main">
-            <a:pPr>
-              <a:defRPr sz="1400">
-                <a:solidFill>
-                  <a:srgbClr val="1A1A1A"/>
-                </a:solidFill>
-              </a:defRPr>
-            </a:pPr>
-            <a:r>
-              <a:rPr sz="1400">
-                <a:solidFill>
-                  <a:srgbClr val="1A1A1A"/>
-                </a:solidFill>
-              </a:rPr>
-              <a:t>Offline policy scoring, not a new measurement of the live review flow.</a:t>
-            </a:r>
-          </a:p>
-        </p:txBody>
-      </p:sp>
-    </p:spTree>
-    <p:extLst>
-      <p:ext uri="{BB962C8B-B14F-4D97-AF65-F5344CB8AC3E}">
-        <p14:creationId xmlns:p14="http://schemas.microsoft.com/office/powerpoint/2010/main" val="1006711448"/>
-      </p:ext>
-    </p:extLst>
-  </p:cSld>
-</p:sld>
-</file>
-
-<file path=ppt/slides/slide4.xml><?xml version="1.0" encoding="utf-8"?>
-<p:sld xmlns:p="http://schemas.openxmlformats.org/presentationml/2006/main">
-  <p:cSld>
-    <p:bg>
-      <p:bgPr>
-        <a:solidFill xmlns:a="http://schemas.openxmlformats.org/drawingml/2006/main">
-          <a:srgbClr val="FFFFFF"/>
-        </a:solidFill>
-      </p:bgPr>
-    </p:bg>
-    <p:spTree>
-      <p:nvGrpSpPr>
-        <p:cNvPr id="1" name=""/>
-        <p:cNvGrpSpPr/>
-        <p:nvPr/>
-      </p:nvGrpSpPr>
-      <p:grpSpPr>
-        <a:xfrm xmlns:a="http://schemas.openxmlformats.org/drawingml/2006/main"/>
-      </p:grpSpPr>
-      <p:sp>
-        <p:nvSpPr>
-          <p:cNvPr id="2" name="Text 0">
-            <a:extLst xmlns:a="http://schemas.openxmlformats.org/drawingml/2006/main">
-              <a:ext uri="{FF2B5EF4-FFF2-40B4-BE49-F238E27FC236}">
-                <a16:creationId xmlns:a16="http://schemas.microsoft.com/office/drawing/2014/main" id="{12D9B1FB-8A6E-4F5A-BDCB-F39359B248B5}"/>
-              </a:ext>
-            </a:extLst>
-          </p:cNvPr>
-          <p:cNvSpPr>
-            <a:spLocks xmlns:a="http://schemas.openxmlformats.org/drawingml/2006/main" noGrp="1"/>
-          </p:cNvSpPr>
-          <p:nvPr/>
-        </p:nvSpPr>
-        <p:spPr>
-          <a:xfrm xmlns:a="http://schemas.openxmlformats.org/drawingml/2006/main">
-            <a:off x="731520" y="411480"/>
-            <a:ext cx="5486400" cy="320040"/>
-          </a:xfrm>
-          <a:prstGeom xmlns:a="http://schemas.openxmlformats.org/drawingml/2006/main" prst="rect">
-            <a:avLst/>
-          </a:prstGeom>
-          <a:noFill xmlns:a="http://schemas.openxmlformats.org/drawingml/2006/main"/>
-        </p:spPr>
-        <p:txBody>
-          <a:bodyPr xmlns:a="http://schemas.openxmlformats.org/drawingml/2006/main" wrap="square" lIns="0" tIns="0" rIns="0" bIns="0" anchor="ctr"/>
-          <a:lstStyle xmlns:a="http://schemas.openxmlformats.org/drawingml/2006/main"/>
-          <a:p xmlns:a="http://schemas.openxmlformats.org/drawingml/2006/main">
-            <a:pPr marL="0" indent="0">
-              <a:buNone/>
-            </a:pPr>
-            <a:r>
-              <a:rPr sz="1200" b="1" spc="100">
-                <a:solidFill>
-                  <a:srgbClr val="1F5C99"/>
-                </a:solidFill>
-                <a:latin typeface="Calibri"/>
-                <a:ea typeface="Calibri"/>
-                <a:cs typeface="Calibri"/>
-              </a:rPr>
-              <a:t>SECTION 3 OF 4</a:t>
-            </a:r>
-            <a:endParaRPr sz="1200"/>
-          </a:p>
-        </p:txBody>
-      </p:sp>
-      <p:sp>
-        <p:nvSpPr>
-          <p:cNvPr id="3" name="Text 1">
-            <a:extLst xmlns:a="http://schemas.openxmlformats.org/drawingml/2006/main">
-              <a:ext uri="{FF2B5EF4-FFF2-40B4-BE49-F238E27FC236}">
-                <a16:creationId xmlns:a16="http://schemas.microsoft.com/office/drawing/2014/main" id="{36A6A6F9-0A42-40A4-8860-F5A1377E9CEB}"/>
-              </a:ext>
-            </a:extLst>
-          </p:cNvPr>
-          <p:cNvSpPr>
-            <a:spLocks xmlns:a="http://schemas.openxmlformats.org/drawingml/2006/main" noGrp="1"/>
-          </p:cNvSpPr>
-          <p:nvPr/>
-        </p:nvSpPr>
-        <p:spPr>
-          <a:xfrm xmlns:a="http://schemas.openxmlformats.org/drawingml/2006/main">
-            <a:off x="8899855" y="411480"/>
-            <a:ext cx="2560320" cy="320040"/>
-          </a:xfrm>
-          <a:prstGeom xmlns:a="http://schemas.openxmlformats.org/drawingml/2006/main" prst="rect">
-            <a:avLst/>
-          </a:prstGeom>
-          <a:noFill xmlns:a="http://schemas.openxmlformats.org/drawingml/2006/main"/>
-        </p:spPr>
-        <p:txBody>
-          <a:bodyPr xmlns:a="http://schemas.openxmlformats.org/drawingml/2006/main" wrap="square" lIns="0" tIns="0" rIns="0" bIns="0" anchor="ctr"/>
-          <a:lstStyle xmlns:a="http://schemas.openxmlformats.org/drawingml/2006/main"/>
-          <a:p xmlns:a="http://schemas.openxmlformats.org/drawingml/2006/main">
-            <a:pPr marL="0" indent="0" algn="r">
-              <a:buNone/>
-            </a:pPr>
-            <a:r>
-              <a:rPr sz="1100" i="1">
-                <a:solidFill>
-                  <a:srgbClr val="5A6672"/>
-                </a:solidFill>
-                <a:latin typeface="Calibri"/>
-                <a:ea typeface="Calibri"/>
-                <a:cs typeface="Calibri"/>
-              </a:rPr>
-              <a:t>Presented by: Kholoud Elkholy</a:t>
-            </a:r>
-            <a:endParaRPr sz="1100"/>
-          </a:p>
-        </p:txBody>
-      </p:sp>
-      <p:sp>
-        <p:nvSpPr>
-          <p:cNvPr id="4" name="Text 2">
-            <a:extLst xmlns:a="http://schemas.openxmlformats.org/drawingml/2006/main">
-              <a:ext uri="{FF2B5EF4-FFF2-40B4-BE49-F238E27FC236}">
-                <a16:creationId xmlns:a16="http://schemas.microsoft.com/office/drawing/2014/main" id="{A26D5050-DB48-4A5F-B684-0D96F4741E1E}"/>
-              </a:ext>
-            </a:extLst>
-          </p:cNvPr>
-          <p:cNvSpPr>
-            <a:spLocks xmlns:a="http://schemas.openxmlformats.org/drawingml/2006/main" noGrp="1"/>
-          </p:cNvSpPr>
-          <p:nvPr/>
-        </p:nvSpPr>
-        <p:spPr>
-          <a:xfrm xmlns:a="http://schemas.openxmlformats.org/drawingml/2006/main">
-            <a:off x="731520" y="713232"/>
-            <a:ext cx="10728655" cy="640080"/>
-          </a:xfrm>
-          <a:prstGeom xmlns:a="http://schemas.openxmlformats.org/drawingml/2006/main" prst="rect">
-            <a:avLst/>
-          </a:prstGeom>
-          <a:noFill xmlns:a="http://schemas.openxmlformats.org/drawingml/2006/main"/>
-        </p:spPr>
-        <p:txBody>
-          <a:bodyPr xmlns:a="http://schemas.openxmlformats.org/drawingml/2006/main" wrap="square" lIns="0" tIns="0" rIns="0" bIns="0" anchor="ctr"/>
-          <a:lstStyle xmlns:a="http://schemas.openxmlformats.org/drawingml/2006/main"/>
-          <a:p xmlns:a="http://schemas.openxmlformats.org/drawingml/2006/main">
-            <a:pPr marL="0" indent="0">
-              <a:buNone/>
-            </a:pPr>
-            <a:r>
-              <a:rPr sz="2800" b="1">
-                <a:solidFill>
-                  <a:srgbClr val="14375E"/>
-                </a:solidFill>
-                <a:latin typeface="Calibri"/>
-                <a:ea typeface="Calibri"/>
-                <a:cs typeface="Calibri"/>
-              </a:rPr>
-              <a:t>Expected Outcomes</a:t>
-            </a:r>
-            <a:endParaRPr sz="2800"/>
-          </a:p>
-        </p:txBody>
-      </p:sp>
-      <p:sp>
-        <p:nvSpPr>
-          <p:cNvPr id="5" name="Shape 3">
-            <a:extLst xmlns:a="http://schemas.openxmlformats.org/drawingml/2006/main">
-              <a:ext uri="{FF2B5EF4-FFF2-40B4-BE49-F238E27FC236}">
-                <a16:creationId xmlns:a16="http://schemas.microsoft.com/office/drawing/2014/main" id="{3EE1AC3C-E733-4D01-9C82-F46F6A972BA4}"/>
-              </a:ext>
-            </a:extLst>
-          </p:cNvPr>
-          <p:cNvSpPr>
-            <a:spLocks xmlns:a="http://schemas.openxmlformats.org/drawingml/2006/main" noGrp="1"/>
-          </p:cNvSpPr>
-          <p:nvPr/>
-        </p:nvSpPr>
-        <p:spPr>
-          <a:xfrm xmlns:a="http://schemas.openxmlformats.org/drawingml/2006/main">
-            <a:off x="731520" y="1554480"/>
-            <a:ext cx="10728655" cy="2103120"/>
-          </a:xfrm>
-          <a:prstGeom xmlns:a="http://schemas.openxmlformats.org/drawingml/2006/main" prst="rect">
-            <a:avLst/>
-          </a:prstGeom>
-          <a:solidFill xmlns:a="http://schemas.openxmlformats.org/drawingml/2006/main">
-            <a:srgbClr val="F2F5F9"/>
-          </a:solidFill>
-        </p:spPr>
-      </p:sp>
-      <p:sp>
-        <p:nvSpPr>
-          <p:cNvPr id="6" name="Text 4">
-            <a:extLst xmlns:a="http://schemas.openxmlformats.org/drawingml/2006/main">
-              <a:ext uri="{FF2B5EF4-FFF2-40B4-BE49-F238E27FC236}">
-                <a16:creationId xmlns:a16="http://schemas.microsoft.com/office/drawing/2014/main" id="{93DDBE1D-DE9D-4BC0-998F-D81E8480ED1C}"/>
-              </a:ext>
-            </a:extLst>
-          </p:cNvPr>
-          <p:cNvSpPr>
-            <a:spLocks xmlns:a="http://schemas.openxmlformats.org/drawingml/2006/main" noGrp="1"/>
-          </p:cNvSpPr>
-          <p:nvPr/>
-        </p:nvSpPr>
-        <p:spPr>
-          <a:xfrm xmlns:a="http://schemas.openxmlformats.org/drawingml/2006/main">
-            <a:off x="960120" y="1691640"/>
-            <a:ext cx="5486400" cy="274320"/>
-          </a:xfrm>
-          <a:prstGeom xmlns:a="http://schemas.openxmlformats.org/drawingml/2006/main" prst="rect">
-            <a:avLst/>
-          </a:prstGeom>
-          <a:noFill xmlns:a="http://schemas.openxmlformats.org/drawingml/2006/main"/>
-        </p:spPr>
-        <p:txBody>
-          <a:bodyPr xmlns:a="http://schemas.openxmlformats.org/drawingml/2006/main" wrap="square" lIns="0" tIns="0" rIns="0" bIns="0" anchor="ctr"/>
-          <a:lstStyle xmlns:a="http://schemas.openxmlformats.org/drawingml/2006/main"/>
-          <a:p xmlns:a="http://schemas.openxmlformats.org/drawingml/2006/main">
-            <a:pPr marL="0" indent="0">
-              <a:buNone/>
-            </a:pPr>
-            <a:r>
-              <a:rPr sz="1100" b="1">
-                <a:solidFill>
-                  <a:srgbClr val="5A6672"/>
-                </a:solidFill>
-                <a:latin typeface="Calibri"/>
-                <a:ea typeface="Calibri"/>
-                <a:cs typeface="Calibri"/>
-              </a:rPr>
-              <a:t>TARGETS AND LIMITATIONS</a:t>
-            </a:r>
-            <a:endParaRPr sz="1100"/>
-          </a:p>
-        </p:txBody>
-      </p:sp>
-      <p:sp>
-        <p:nvSpPr>
-          <p:cNvPr id="9" name="Text 7">
-            <a:extLst xmlns:a="http://schemas.openxmlformats.org/drawingml/2006/main">
-              <a:ext uri="{FF2B5EF4-FFF2-40B4-BE49-F238E27FC236}">
-                <a16:creationId xmlns:a16="http://schemas.microsoft.com/office/drawing/2014/main" id="{D8BE7AE1-0E29-4850-859C-7B362505816E}"/>
-              </a:ext>
-            </a:extLst>
-          </p:cNvPr>
-          <p:cNvSpPr>
-            <a:spLocks xmlns:a="http://schemas.openxmlformats.org/drawingml/2006/main" noGrp="1"/>
-          </p:cNvSpPr>
-          <p:nvPr/>
-        </p:nvSpPr>
-        <p:spPr>
-          <a:xfrm xmlns:a="http://schemas.openxmlformats.org/drawingml/2006/main">
-            <a:off x="457200" y="6446520"/>
-            <a:ext cx="7315200" cy="274320"/>
-          </a:xfrm>
-          <a:prstGeom xmlns:a="http://schemas.openxmlformats.org/drawingml/2006/main" prst="rect">
-            <a:avLst/>
-          </a:prstGeom>
-          <a:noFill xmlns:a="http://schemas.openxmlformats.org/drawingml/2006/main"/>
-        </p:spPr>
-        <p:txBody>
-          <a:bodyPr xmlns:a="http://schemas.openxmlformats.org/drawingml/2006/main" wrap="square" lIns="0" tIns="0" rIns="0" bIns="0" anchor="ctr"/>
-          <a:lstStyle xmlns:a="http://schemas.openxmlformats.org/drawingml/2006/main"/>
-          <a:p xmlns:a="http://schemas.openxmlformats.org/drawingml/2006/main">
-            <a:pPr marL="0" indent="0">
-              <a:buNone/>
-            </a:pPr>
-            <a:r>
-              <a:rPr sz="1000">
-                <a:solidFill>
-                  <a:srgbClr val="5A6672"/>
-                </a:solidFill>
-                <a:latin typeface="Calibri"/>
-                <a:ea typeface="Calibri"/>
-                <a:cs typeface="Calibri"/>
-              </a:rPr>
-              <a:t>COE444 Computer Security  |  Progress Presentation Template</a:t>
-            </a:r>
-            <a:endParaRPr sz="1000"/>
-          </a:p>
-        </p:txBody>
-      </p:sp>
-      <p:sp>
-        <p:nvSpPr>
-          <p:cNvPr id="10" name="Text 8">
-            <a:extLst xmlns:a="http://schemas.openxmlformats.org/drawingml/2006/main">
-              <a:ext uri="{FF2B5EF4-FFF2-40B4-BE49-F238E27FC236}">
-                <a16:creationId xmlns:a16="http://schemas.microsoft.com/office/drawing/2014/main" id="{EE0FC7D4-E555-4648-9800-793E6FF4D3C1}"/>
-              </a:ext>
-            </a:extLst>
-          </p:cNvPr>
-          <p:cNvSpPr>
-            <a:spLocks xmlns:a="http://schemas.openxmlformats.org/drawingml/2006/main" noGrp="1"/>
-          </p:cNvSpPr>
-          <p:nvPr/>
-        </p:nvSpPr>
-        <p:spPr>
-          <a:xfrm xmlns:a="http://schemas.openxmlformats.org/drawingml/2006/main">
-            <a:off x="11277295" y="6446520"/>
-            <a:ext cx="457200" cy="274320"/>
-          </a:xfrm>
-          <a:prstGeom xmlns:a="http://schemas.openxmlformats.org/drawingml/2006/main" prst="rect">
-            <a:avLst/>
-          </a:prstGeom>
-          <a:noFill xmlns:a="http://schemas.openxmlformats.org/drawingml/2006/main"/>
-        </p:spPr>
-        <p:txBody>
-          <a:bodyPr xmlns:a="http://schemas.openxmlformats.org/drawingml/2006/main" wrap="square" lIns="0" tIns="0" rIns="0" bIns="0" anchor="ctr"/>
-          <a:lstStyle xmlns:a="http://schemas.openxmlformats.org/drawingml/2006/main"/>
-          <a:p xmlns:a="http://schemas.openxmlformats.org/drawingml/2006/main">
-            <a:pPr marL="0" indent="0" algn="r">
-              <a:buNone/>
-            </a:pPr>
-            <a:r>
-              <a:rPr sz="1000">
-                <a:solidFill>
-                  <a:srgbClr val="5A6672"/>
-                </a:solidFill>
-                <a:latin typeface="Calibri"/>
-                <a:ea typeface="Calibri"/>
-                <a:cs typeface="Calibri"/>
-              </a:rPr>
-              <a:t>4</a:t>
-            </a:r>
-            <a:endParaRPr sz="1000"/>
-          </a:p>
-        </p:txBody>
-      </p:sp>
-      <p:sp>
-        <p:nvSpPr>
-          <p:cNvPr id="11" name="">
-            <a:extLst xmlns:a="http://schemas.openxmlformats.org/drawingml/2006/main">
-              <a:ext uri="{FF2B5EF4-FFF2-40B4-BE49-F238E27FC236}">
-                <a16:creationId xmlns:a16="http://schemas.microsoft.com/office/drawing/2014/main" id="{88B6097C-8534-49C3-B270-FA2262A7EDCD}"/>
-              </a:ext>
-            </a:extLst>
-          </p:cNvPr>
-          <p:cNvSpPr>
-            <a:spLocks xmlns:a="http://schemas.openxmlformats.org/drawingml/2006/main" noGrp="1"/>
-          </p:cNvSpPr>
-          <p:nvPr/>
-        </p:nvSpPr>
-        <p:spPr>
-          <a:xfrm xmlns:a="http://schemas.openxmlformats.org/drawingml/2006/main">
-            <a:off x="960120" y="2009775"/>
-            <a:ext cx="10271474" cy="619125"/>
-          </a:xfrm>
-          <a:prstGeom xmlns:a="http://schemas.openxmlformats.org/drawingml/2006/main" prst="rect">
-            <a:avLst/>
-          </a:prstGeom>
-          <a:noFill xmlns:a="http://schemas.openxmlformats.org/drawingml/2006/main"/>
-          <a:ln xmlns:a="http://schemas.openxmlformats.org/drawingml/2006/main" w="0">
-            <a:noFill/>
-          </a:ln>
-        </p:spPr>
-        <p:txBody>
-          <a:bodyPr xmlns:a="http://schemas.openxmlformats.org/drawingml/2006/main" lIns="0" tIns="0" rIns="0" bIns="0"/>
-          <a:lstStyle xmlns:a="http://schemas.openxmlformats.org/drawingml/2006/main">
-            <a:defPPr>
-              <a:defRPr sz="1575">
-                <a:solidFill>
-                  <a:srgbClr val="1A1A1A"/>
-                </a:solidFill>
-              </a:defRPr>
-            </a:defPPr>
-            <a:lvl1pPr>
-              <a:defRPr sz="1575">
-                <a:solidFill>
-                  <a:srgbClr val="1A1A1A"/>
-                </a:solidFill>
-              </a:defRPr>
-            </a:lvl1pPr>
-            <a:lvl2pPr>
-              <a:defRPr sz="1575">
-                <a:solidFill>
-                  <a:srgbClr val="1A1A1A"/>
-                </a:solidFill>
-              </a:defRPr>
-            </a:lvl2pPr>
-            <a:lvl3pPr>
-              <a:defRPr sz="1575">
-                <a:solidFill>
-                  <a:srgbClr val="1A1A1A"/>
-                </a:solidFill>
-              </a:defRPr>
-            </a:lvl3pPr>
-            <a:lvl4pPr>
-              <a:defRPr sz="1575">
-                <a:solidFill>
-                  <a:srgbClr val="1A1A1A"/>
-                </a:solidFill>
-              </a:defRPr>
-            </a:lvl4pPr>
-            <a:lvl5pPr>
-              <a:defRPr sz="1575">
-                <a:solidFill>
-                  <a:srgbClr val="1A1A1A"/>
-                </a:solidFill>
-              </a:defRPr>
-            </a:lvl5pPr>
-            <a:lvl6pPr>
-              <a:defRPr sz="1575">
-                <a:solidFill>
-                  <a:srgbClr val="1A1A1A"/>
-                </a:solidFill>
-              </a:defRPr>
-            </a:lvl6pPr>
-            <a:lvl7pPr>
-              <a:defRPr sz="1575">
-                <a:solidFill>
-                  <a:srgbClr val="1A1A1A"/>
-                </a:solidFill>
-              </a:defRPr>
-            </a:lvl7pPr>
-            <a:lvl8pPr>
-              <a:defRPr sz="1575">
-                <a:solidFill>
-                  <a:srgbClr val="1A1A1A"/>
-                </a:solidFill>
-              </a:defRPr>
-            </a:lvl8pPr>
-            <a:lvl9pPr>
-              <a:defRPr sz="1575">
-                <a:solidFill>
-                  <a:srgbClr val="1A1A1A"/>
-                </a:solidFill>
-              </a:defRPr>
-            </a:lvl9pPr>
-          </a:lstStyle>
-          <a:p xmlns:a="http://schemas.openxmlformats.org/drawingml/2006/main">
-            <a:pPr>
-              <a:defRPr sz="1575">
-                <a:solidFill>
-                  <a:srgbClr val="1A1A1A"/>
-                </a:solidFill>
-              </a:defRPr>
-            </a:pPr>
-            <a:r>
-              <a:rPr sz="1575">
-                <a:solidFill>
-                  <a:srgbClr val="1A1A1A"/>
-                </a:solidFill>
-              </a:rPr>
-              <a:t>External agent check: 50 of 200 attacks. A: 9/48 successes, C: 0/48, with 2 errors.</a:t>
-            </a:r>
-          </a:p>
-          <a:p xmlns:a="http://schemas.openxmlformats.org/drawingml/2006/main">
-            <a:pPr>
-              <a:defRPr sz="1575">
-                <a:solidFill>
-                  <a:srgbClr val="1A1A1A"/>
-                </a:solidFill>
-              </a:defRPr>
-            </a:pPr>
-            <a:r>
-              <a:rPr sz="1575">
-                <a:solidFill>
-                  <a:srgbClr val="1A1A1A"/>
-                </a:solidFill>
-              </a:rPr>
-              <a:t>Detector check: 50 attack excerpts + 203 clean emails. Misses: 3/50, false alarms: 0/203.</a:t>
-            </a:r>
-          </a:p>
-        </p:txBody>
-      </p:sp>
-      <p:sp>
-        <p:nvSpPr>
-          <p:cNvPr id="12" name="">
-            <a:extLst xmlns:a="http://schemas.openxmlformats.org/drawingml/2006/main">
-              <a:ext uri="{FF2B5EF4-FFF2-40B4-BE49-F238E27FC236}">
-                <a16:creationId xmlns:a16="http://schemas.microsoft.com/office/drawing/2014/main" id="{3B6C9783-3F6A-4B8D-A267-6F790148182E}"/>
-              </a:ext>
-            </a:extLst>
-          </p:cNvPr>
-          <p:cNvSpPr>
-            <a:spLocks xmlns:a="http://schemas.openxmlformats.org/drawingml/2006/main" noGrp="1"/>
-          </p:cNvSpPr>
-          <p:nvPr/>
-        </p:nvSpPr>
-        <p:spPr>
-          <a:xfrm xmlns:a="http://schemas.openxmlformats.org/drawingml/2006/main">
-            <a:off x="960120" y="2771775"/>
-            <a:ext cx="10271474" cy="619125"/>
-          </a:xfrm>
-          <a:prstGeom xmlns:a="http://schemas.openxmlformats.org/drawingml/2006/main" prst="rect">
-            <a:avLst/>
-          </a:prstGeom>
-          <a:noFill xmlns:a="http://schemas.openxmlformats.org/drawingml/2006/main"/>
-          <a:ln xmlns:a="http://schemas.openxmlformats.org/drawingml/2006/main" w="0">
-            <a:noFill/>
-          </a:ln>
-        </p:spPr>
-        <p:txBody>
-          <a:bodyPr xmlns:a="http://schemas.openxmlformats.org/drawingml/2006/main" lIns="0" tIns="0" rIns="0" bIns="0"/>
-          <a:lstStyle xmlns:a="http://schemas.openxmlformats.org/drawingml/2006/main">
-            <a:defPPr>
-              <a:defRPr sz="1575">
-                <a:solidFill>
-                  <a:srgbClr val="1A1A1A"/>
-                </a:solidFill>
-              </a:defRPr>
-            </a:defPPr>
-            <a:lvl1pPr>
-              <a:defRPr sz="1575">
-                <a:solidFill>
-                  <a:srgbClr val="1A1A1A"/>
-                </a:solidFill>
-              </a:defRPr>
-            </a:lvl1pPr>
-            <a:lvl2pPr>
-              <a:defRPr sz="1575">
-                <a:solidFill>
-                  <a:srgbClr val="1A1A1A"/>
-                </a:solidFill>
-              </a:defRPr>
-            </a:lvl2pPr>
-            <a:lvl3pPr>
-              <a:defRPr sz="1575">
-                <a:solidFill>
-                  <a:srgbClr val="1A1A1A"/>
-                </a:solidFill>
-              </a:defRPr>
-            </a:lvl3pPr>
-            <a:lvl4pPr>
-              <a:defRPr sz="1575">
-                <a:solidFill>
-                  <a:srgbClr val="1A1A1A"/>
-                </a:solidFill>
-              </a:defRPr>
-            </a:lvl4pPr>
-            <a:lvl5pPr>
-              <a:defRPr sz="1575">
-                <a:solidFill>
-                  <a:srgbClr val="1A1A1A"/>
-                </a:solidFill>
-              </a:defRPr>
-            </a:lvl5pPr>
-            <a:lvl6pPr>
-              <a:defRPr sz="1575">
-                <a:solidFill>
-                  <a:srgbClr val="1A1A1A"/>
-                </a:solidFill>
-              </a:defRPr>
-            </a:lvl6pPr>
-            <a:lvl7pPr>
-              <a:defRPr sz="1575">
-                <a:solidFill>
-                  <a:srgbClr val="1A1A1A"/>
-                </a:solidFill>
-              </a:defRPr>
-            </a:lvl7pPr>
-            <a:lvl8pPr>
-              <a:defRPr sz="1575">
-                <a:solidFill>
-                  <a:srgbClr val="1A1A1A"/>
-                </a:solidFill>
-              </a:defRPr>
-            </a:lvl8pPr>
-            <a:lvl9pPr>
-              <a:defRPr sz="1575">
-                <a:solidFill>
-                  <a:srgbClr val="1A1A1A"/>
-                </a:solidFill>
-              </a:defRPr>
-            </a:lvl9pPr>
-          </a:lstStyle>
-          <a:p xmlns:a="http://schemas.openxmlformats.org/drawingml/2006/main">
-            <a:pPr>
-              <a:defRPr sz="1575">
-                <a:solidFill>
-                  <a:srgbClr val="1A1A1A"/>
-                </a:solidFill>
-              </a:defRPr>
-            </a:pPr>
-            <a:r>
-              <a:rPr sz="1575">
-                <a:solidFill>
-                  <a:srgbClr val="1A1A1A"/>
-                </a:solidFill>
-              </a:rPr>
-              <a:t>Targets: combined attack success &lt;5%, detector misses &lt;20%, false alarms &lt;15%.</a:t>
-            </a:r>
-          </a:p>
-          <a:p xmlns:a="http://schemas.openxmlformats.org/drawingml/2006/main">
-            <a:pPr>
-              <a:defRPr sz="1575">
-                <a:solidFill>
-                  <a:srgbClr val="1A1A1A"/>
-                </a:solidFill>
-              </a:defRPr>
-            </a:pPr>
-            <a:r>
-              <a:rPr sz="1575">
-                <a:solidFill>
-                  <a:srgbClr val="1A1A1A"/>
-                </a:solidFill>
-              </a:rPr>
-              <a:t>Combined historical dev result: 10%. New live review still needs evaluation.</a:t>
-            </a:r>
-          </a:p>
-        </p:txBody>
-      </p:sp>
-      <p:graphicFrame>
-        <p:nvGraphicFramePr>
-          <p:cNvPr id="13" name="">
-            <a:extLst xmlns:a="http://schemas.openxmlformats.org/drawingml/2006/main">
-              <a:ext uri="{FF2B5EF4-FFF2-40B4-BE49-F238E27FC236}">
-                <a16:creationId xmlns:a16="http://schemas.microsoft.com/office/drawing/2014/main" id="{B309D3EE-81DD-44EE-A23F-A4E05B1BB4F5}"/>
-              </a:ext>
-            </a:extLst>
-          </p:cNvPr>
-          <p:cNvGraphicFramePr/>
-          <p:nvPr/>
-        </p:nvGraphicFramePr>
-        <p:xfrm>
-          <a:off xmlns:a="http://schemas.openxmlformats.org/drawingml/2006/main" x="731520" y="3886200"/>
-          <a:ext xmlns:a="http://schemas.openxmlformats.org/drawingml/2006/main" cx="10728674" cy="2133600"/>
-        </p:xfrm>
-        <a:graphic xmlns:a="http://schemas.openxmlformats.org/drawingml/2006/main">
-          <a:graphicData uri="http://schemas.openxmlformats.org/drawingml/2006/table">
-            <a:tbl>
-              <a:tblPr/>
-              <a:tblGrid>
-                <a:gridCol w="3619500"/>
-                <a:gridCol w="7109174"/>
-              </a:tblGrid>
-              <a:tr h="426720">
-                <a:tc>
-                  <a:txBody>
-                    <a:bodyPr/>
-                    <a:lstStyle/>
-                    <a:p>
-                      <a:r>
-                        <a:rPr sz="1313" b="1">
-                          <a:solidFill>
-                            <a:srgbClr val="FFFFFF"/>
-                          </a:solidFill>
-                        </a:rPr>
-                        <a:t>Final demonstration</a:t>
-                      </a:r>
-                    </a:p>
-                  </a:txBody>
-                  <a:tcPr marL="91440" marR="91440" marT="45720" marB="45720">
-                    <a:lnL w="9525">
-                      <a:solidFill>
-                        <a:srgbClr val="C9D6E3"/>
-                      </a:solidFill>
-                      <a:prstDash val="solid"/>
-                    </a:lnL>
-                    <a:lnR w="9525">
-                      <a:solidFill>
-                        <a:srgbClr val="C9D6E3"/>
-                      </a:solidFill>
-                      <a:prstDash val="solid"/>
-                    </a:lnR>
-                    <a:lnT w="9525">
-                      <a:solidFill>
-                        <a:srgbClr val="C9D6E3"/>
-                      </a:solidFill>
-                      <a:prstDash val="solid"/>
-                    </a:lnT>
-                    <a:lnB w="9525">
-                      <a:solidFill>
-                        <a:srgbClr val="C9D6E3"/>
-                      </a:solidFill>
-                      <a:prstDash val="solid"/>
-                    </a:lnB>
-                    <a:solidFill>
-                      <a:srgbClr val="14375E"/>
-                    </a:solidFill>
-                  </a:tcPr>
-                </a:tc>
-                <a:tc>
-                  <a:txBody>
-                    <a:bodyPr/>
-                    <a:lstStyle/>
-                    <a:p>
-                      <a:r>
-                        <a:rPr sz="1313" b="1">
-                          <a:solidFill>
-                            <a:srgbClr val="FFFFFF"/>
-                          </a:solidFill>
-                        </a:rPr>
-                        <a:t>Evidence still needed</a:t>
-                      </a:r>
-                    </a:p>
-                  </a:txBody>
-                  <a:tcPr marL="91440" marR="91440" marT="45720" marB="45720">
-                    <a:lnR w="9525">
-                      <a:solidFill>
-                        <a:srgbClr val="C9D6E3"/>
-                      </a:solidFill>
-                      <a:prstDash val="solid"/>
-                    </a:lnR>
-                    <a:lnT w="9525">
-                      <a:solidFill>
-                        <a:srgbClr val="C9D6E3"/>
-                      </a:solidFill>
-                      <a:prstDash val="solid"/>
-                    </a:lnT>
-                    <a:lnB w="9525">
-                      <a:solidFill>
-                        <a:srgbClr val="C9D6E3"/>
-                      </a:solidFill>
-                      <a:prstDash val="solid"/>
-                    </a:lnB>
-                    <a:solidFill>
-                      <a:srgbClr val="14375E"/>
-                    </a:solidFill>
-                  </a:tcPr>
-                </a:tc>
-              </a:tr>
-              <a:tr h="426720">
-                <a:tc>
-                  <a:txBody>
-                    <a:bodyPr/>
-                    <a:lstStyle/>
-                    <a:p>
-                      <a:r>
-                        <a:rPr sz="1313" b="0">
-                          <a:solidFill>
-                            <a:srgbClr val="1A1A1A"/>
-                          </a:solidFill>
-                        </a:rPr>
-                        <a:t>Poisoned document with an injected CC</a:t>
-                      </a:r>
-                    </a:p>
-                  </a:txBody>
-                  <a:tcPr marL="91440" marR="91440" marT="45720" marB="45720">
-                    <a:lnL w="9525">
-                      <a:solidFill>
-                        <a:srgbClr val="C9D6E3"/>
-                      </a:solidFill>
-                      <a:prstDash val="solid"/>
-                    </a:lnL>
-                    <a:lnR w="9525">
-                      <a:solidFill>
-                        <a:srgbClr val="C9D6E3"/>
-                      </a:solidFill>
-                      <a:prstDash val="solid"/>
-                    </a:lnR>
-                    <a:lnB w="9525">
-                      <a:solidFill>
-                        <a:srgbClr val="C9D6E3"/>
-                      </a:solidFill>
-                      <a:prstDash val="solid"/>
-                    </a:lnB>
-                    <a:solidFill>
-                      <a:srgbClr val="FFFFFF"/>
-                    </a:solidFill>
-                  </a:tcPr>
-                </a:tc>
-                <a:tc>
-                  <a:txBody>
-                    <a:bodyPr/>
-                    <a:lstStyle/>
-                    <a:p>
-                      <a:r>
-                        <a:rPr sz="1313" b="0">
-                          <a:solidFill>
-                            <a:srgbClr val="1A1A1A"/>
-                          </a:solidFill>
-                        </a:rPr>
-                        <a:t>Baseline proposes attacker CC. Gate strips it and keeps intended mail.</a:t>
-                      </a:r>
-                    </a:p>
-                  </a:txBody>
-                  <a:tcPr marL="91440" marR="91440" marT="45720" marB="45720">
-                    <a:lnR w="9525">
-                      <a:solidFill>
-                        <a:srgbClr val="C9D6E3"/>
-                      </a:solidFill>
-                      <a:prstDash val="solid"/>
-                    </a:lnR>
-                    <a:lnB w="9525">
-                      <a:solidFill>
-                        <a:srgbClr val="C9D6E3"/>
-                      </a:solidFill>
-                      <a:prstDash val="solid"/>
-                    </a:lnB>
-                    <a:solidFill>
-                      <a:srgbClr val="FFFFFF"/>
-                    </a:solidFill>
-                  </a:tcPr>
-                </a:tc>
-              </a:tr>
-              <a:tr h="426720">
-                <a:tc>
-                  <a:txBody>
-                    <a:bodyPr/>
-                    <a:lstStyle/>
-                    <a:p>
-                      <a:r>
-                        <a:rPr sz="1313" b="0">
-                          <a:solidFill>
-                            <a:srgbClr val="1A1A1A"/>
-                          </a:solidFill>
-                        </a:rPr>
-                        <a:t>New live safeguard</a:t>
-                      </a:r>
-                    </a:p>
-                  </a:txBody>
-                  <a:tcPr marL="91440" marR="91440" marT="45720" marB="45720">
-                    <a:lnL w="9525">
-                      <a:solidFill>
-                        <a:srgbClr val="C9D6E3"/>
-                      </a:solidFill>
-                      <a:prstDash val="solid"/>
-                    </a:lnL>
-                    <a:lnR w="9525">
-                      <a:solidFill>
-                        <a:srgbClr val="C9D6E3"/>
-                      </a:solidFill>
-                      <a:prstDash val="solid"/>
-                    </a:lnR>
-                    <a:lnB w="9525">
-                      <a:solidFill>
-                        <a:srgbClr val="C9D6E3"/>
-                      </a:solidFill>
-                      <a:prstDash val="solid"/>
-                    </a:lnB>
-                    <a:solidFill>
-                      <a:srgbClr val="FFFFFF"/>
-                    </a:solidFill>
-                  </a:tcPr>
-                </a:tc>
-                <a:tc>
-                  <a:txBody>
-                    <a:bodyPr/>
-                    <a:lstStyle/>
-                    <a:p>
-                      <a:r>
-                        <a:rPr sz="1313" b="0">
-                          <a:solidFill>
-                            <a:srgbClr val="1A1A1A"/>
-                          </a:solidFill>
-                        </a:rPr>
-                        <a:t>Protected sends wait for review of exact recipients and message.</a:t>
+                        <a:t>The user checks the exact draft before a protected send.</a:t>
                       </a:r>
                     </a:p>
                   </a:txBody>
@@ -5629,81 +5703,7 @@
                             <a:srgbClr val="1A1A1A"/>
                           </a:solidFill>
                         </a:rPr>
-                        <a:t>Freeze the protocol, evaluate held-out attacks and report task utility.</a:t>
-                      </a:r>
-                    </a:p>
-                  </a:txBody>
-                  <a:tcPr marL="91440" marR="91440" marT="45720" marB="45720">
-                    <a:lnR w="9525">
-                      <a:solidFill>
-                        <a:srgbClr val="C9D6E3"/>
-                      </a:solidFill>
-                      <a:prstDash val="solid"/>
-                    </a:lnR>
-                    <a:lnB w="9525">
-                      <a:solidFill>
-                        <a:srgbClr val="C9D6E3"/>
-                      </a:solidFill>
-                      <a:prstDash val="solid"/>
-                    </a:lnB>
-                    <a:solidFill>
-                      <a:srgbClr val="FFFFFF"/>
-                    </a:solidFill>
-                  </a:tcPr>
-                </a:tc>
-              </a:tr>
-              <a:tr h="426720">
-                <a:tc>
-                  <a:txBody>
-                    <a:bodyPr/>
-                    <a:lstStyle/>
-                    <a:p>
-                      <a:r>
-                        <a:rPr sz="1313" b="0">
-                          <a:solidFill>
-                            <a:srgbClr val="1A1A1A"/>
-                          </a:solidFill>
-                        </a:rPr>
-                        <a:t>Honest scope</a:t>
-                      </a:r>
-                    </a:p>
-                  </a:txBody>
-                  <a:tcPr marL="91440" marR="91440" marT="45720" marB="45720">
-                    <a:lnL w="9525">
-                      <a:solidFill>
-                        <a:srgbClr val="C9D6E3"/>
-                      </a:solidFill>
-                      <a:prstDash val="solid"/>
-                    </a:lnL>
-                    <a:lnR w="9525">
-                      <a:solidFill>
-                        <a:srgbClr val="C9D6E3"/>
-                      </a:solidFill>
-                      <a:prstDash val="solid"/>
-                    </a:lnR>
-                    <a:lnB w="9525">
-                      <a:solidFill>
-                        <a:srgbClr val="C9D6E3"/>
-                      </a:solidFill>
-                      <a:prstDash val="solid"/>
-                    </a:lnB>
-                    <a:solidFill>
-                      <a:srgbClr val="FFFFFF"/>
-                    </a:solidFill>
-                  </a:tcPr>
-                </a:tc>
-                <a:tc>
-                  <a:txBody>
-                    <a:bodyPr/>
-                    <a:lstStyle/>
-                    <a:p>
-                      <a:r>
-                        <a:rPr sz="1313" b="0">
-                          <a:solidFill>
-                            <a:srgbClr val="1A1A1A"/>
-                          </a:solidFill>
-                        </a:rPr>
-                        <a:t>Simulated email, no web tool. Live and offline scoring may differ.</a:t>
+                        <a:t>Test examples kept aside and report useful task completion too.</a:t>
                       </a:r>
                     </a:p>
                   </a:txBody>
@@ -5733,7 +5733,7 @@
     </p:spTree>
     <p:extLst>
       <p:ext uri="{BB962C8B-B14F-4D97-AF65-F5344CB8AC3E}">
-        <p14:creationId xmlns:p14="http://schemas.microsoft.com/office/powerpoint/2010/main" val="2032831204"/>
+        <p14:creationId xmlns:p14="http://schemas.microsoft.com/office/powerpoint/2010/main" val="1765548270"/>
       </p:ext>
     </p:extLst>
   </p:cSld>
@@ -5764,7 +5764,7 @@
           <p:cNvPr id="2" name="Text 0">
             <a:extLst xmlns:a="http://schemas.openxmlformats.org/drawingml/2006/main">
               <a:ext uri="{FF2B5EF4-FFF2-40B4-BE49-F238E27FC236}">
-                <a16:creationId xmlns:a16="http://schemas.microsoft.com/office/drawing/2014/main" id="{D638B3AB-92E5-4146-859F-1E72645B121C}"/>
+                <a16:creationId xmlns:a16="http://schemas.microsoft.com/office/drawing/2014/main" id="{A4CD31EA-4110-4269-9353-E87A375270E6}"/>
               </a:ext>
             </a:extLst>
           </p:cNvPr>
@@ -5810,7 +5810,7 @@
           <p:cNvPr id="3" name="Text 1">
             <a:extLst xmlns:a="http://schemas.openxmlformats.org/drawingml/2006/main">
               <a:ext uri="{FF2B5EF4-FFF2-40B4-BE49-F238E27FC236}">
-                <a16:creationId xmlns:a16="http://schemas.microsoft.com/office/drawing/2014/main" id="{DF339EB1-7CA2-4EA4-BDD5-B9FBCAF0AF3A}"/>
+                <a16:creationId xmlns:a16="http://schemas.microsoft.com/office/drawing/2014/main" id="{BEDEC444-822A-49B7-89FD-78607E2C726B}"/>
               </a:ext>
             </a:extLst>
           </p:cNvPr>
@@ -5845,7 +5845,7 @@
                 <a:ea typeface="Calibri"/>
                 <a:cs typeface="Calibri"/>
               </a:rPr>
-              <a:t>Presented by: Belal Ghanimeh</a:t>
+              <a:t>Presented by: Speaker 5</a:t>
             </a:r>
             <a:endParaRPr sz="1100"/>
           </a:p>
@@ -5856,7 +5856,7 @@
           <p:cNvPr id="4" name="Text 2">
             <a:extLst xmlns:a="http://schemas.openxmlformats.org/drawingml/2006/main">
               <a:ext uri="{FF2B5EF4-FFF2-40B4-BE49-F238E27FC236}">
-                <a16:creationId xmlns:a16="http://schemas.microsoft.com/office/drawing/2014/main" id="{B61CD2D8-8DD9-441E-9895-976A522C7411}"/>
+                <a16:creationId xmlns:a16="http://schemas.microsoft.com/office/drawing/2014/main" id="{11821CE6-B82D-4C25-A5EB-4F338A661097}"/>
               </a:ext>
             </a:extLst>
           </p:cNvPr>
@@ -5902,7 +5902,7 @@
           <p:cNvPr id="5" name="Shape 3">
             <a:extLst xmlns:a="http://schemas.openxmlformats.org/drawingml/2006/main">
               <a:ext uri="{FF2B5EF4-FFF2-40B4-BE49-F238E27FC236}">
-                <a16:creationId xmlns:a16="http://schemas.microsoft.com/office/drawing/2014/main" id="{FC19EAD0-F45B-452C-A523-3AB7911E762A}"/>
+                <a16:creationId xmlns:a16="http://schemas.microsoft.com/office/drawing/2014/main" id="{3B54EFC9-384A-4495-A8E1-A04A748F6C2F}"/>
               </a:ext>
             </a:extLst>
           </p:cNvPr>
@@ -5929,7 +5929,7 @@
           <p:cNvPr id="6" name="Text 4">
             <a:extLst xmlns:a="http://schemas.openxmlformats.org/drawingml/2006/main">
               <a:ext uri="{FF2B5EF4-FFF2-40B4-BE49-F238E27FC236}">
-                <a16:creationId xmlns:a16="http://schemas.microsoft.com/office/drawing/2014/main" id="{6B14D786-8651-4768-801C-2AAE0F6F75DC}"/>
+                <a16:creationId xmlns:a16="http://schemas.microsoft.com/office/drawing/2014/main" id="{DCD31AFE-1B38-4272-A89B-E1EDC78A9CE9}"/>
               </a:ext>
             </a:extLst>
           </p:cNvPr>
@@ -5975,7 +5975,7 @@
           <p:cNvPr id="11" name="Table 0">
             <a:extLst xmlns:a="http://schemas.openxmlformats.org/drawingml/2006/main">
               <a:ext uri="{FF2B5EF4-FFF2-40B4-BE49-F238E27FC236}">
-                <a16:creationId xmlns:a16="http://schemas.microsoft.com/office/drawing/2014/main" id="{20EDBE38-2C76-407A-B5D3-383F07818D2F}"/>
+                <a16:creationId xmlns:a16="http://schemas.microsoft.com/office/drawing/2014/main" id="{398AC651-363B-460B-A126-C0940CD0D35E}"/>
               </a:ext>
             </a:extLst>
           </p:cNvPr>
@@ -5983,8 +5983,8 @@
           <p:nvPr/>
         </p:nvGraphicFramePr>
         <p:xfrm>
-          <a:off xmlns:a="http://schemas.openxmlformats.org/drawingml/2006/main" x="731520" y="3676650"/>
-          <a:ext xmlns:a="http://schemas.openxmlformats.org/drawingml/2006/main" cx="10728674" cy="2447925"/>
+          <a:off xmlns:a="http://schemas.openxmlformats.org/drawingml/2006/main" x="731520" y="3829050"/>
+          <a:ext xmlns:a="http://schemas.openxmlformats.org/drawingml/2006/main" cx="10728674" cy="2276475"/>
         </p:xfrm>
         <a:graphic xmlns:a="http://schemas.openxmlformats.org/drawingml/2006/main">
           <a:graphicData uri="http://schemas.openxmlformats.org/drawingml/2006/table">
@@ -5996,7 +5996,7 @@
                 <a:gridCol w="2682164"/>
                 <a:gridCol w="2682164"/>
               </a:tblGrid>
-              <a:tr h="304800">
+              <a:tr h="323850">
                 <a:tc>
                   <a:txBody>
                     <a:bodyPr/>
@@ -6006,7 +6006,7 @@
                         <a:buNone/>
                       </a:pPr>
                       <a:r>
-                        <a:rPr sz="1200" b="1">
+                        <a:rPr sz="1275" b="1">
                           <a:solidFill>
                             <a:srgbClr val="FFFFFF"/>
                           </a:solidFill>
@@ -6062,7 +6062,7 @@
                         <a:buNone/>
                       </a:pPr>
                       <a:r>
-                        <a:rPr sz="1200" b="1">
+                        <a:rPr sz="1275" b="1">
                           <a:solidFill>
                             <a:srgbClr val="FFFFFF"/>
                           </a:solidFill>
@@ -6118,7 +6118,7 @@
                         <a:buNone/>
                       </a:pPr>
                       <a:r>
-                        <a:rPr sz="1200" b="1">
+                        <a:rPr sz="1275" b="1">
                           <a:solidFill>
                             <a:srgbClr val="FFFFFF"/>
                           </a:solidFill>
@@ -6174,7 +6174,7 @@
                         <a:buNone/>
                       </a:pPr>
                       <a:r>
-                        <a:rPr sz="1200" b="1">
+                        <a:rPr sz="1275" b="1">
                           <a:solidFill>
                             <a:srgbClr val="FFFFFF"/>
                           </a:solidFill>
@@ -6222,7 +6222,7 @@
                   </a:tcPr>
                 </a:tc>
               </a:tr>
-              <a:tr h="304800">
+              <a:tr h="323850">
                 <a:tc>
                   <a:txBody>
                     <a:bodyPr/>
@@ -6232,7 +6232,7 @@
                         <a:buNone/>
                       </a:pPr>
                       <a:r>
-                        <a:rPr sz="1200" b="0">
+                        <a:rPr sz="1275" b="0">
                           <a:solidFill>
                             <a:srgbClr val="1A1A1A"/>
                           </a:solidFill>
@@ -6240,7 +6240,7 @@
                           <a:ea typeface="Calibri"/>
                           <a:cs typeface="Calibri"/>
                         </a:rPr>
-                        <a:t>Agent + both defenses</a:t>
+                        <a:t>Agent and both defenses</a:t>
                       </a:r>
                       <a:endParaRPr sz="1200">
                         <a:latin typeface="Calibri"/>
@@ -6285,7 +6285,7 @@
                         <a:buNone/>
                       </a:pPr>
                       <a:r>
-                        <a:rPr sz="1200" b="0">
+                        <a:rPr sz="1275" b="0">
                           <a:solidFill>
                             <a:srgbClr val="1A1A1A"/>
                           </a:solidFill>
@@ -6338,7 +6338,7 @@
                         <a:buNone/>
                       </a:pPr>
                       <a:r>
-                        <a:rPr sz="1200" b="0">
+                        <a:rPr sz="1275" b="0">
                           <a:solidFill>
                             <a:srgbClr val="1A1A1A"/>
                           </a:solidFill>
@@ -6346,7 +6346,7 @@
                           <a:ea typeface="Calibri"/>
                           <a:cs typeface="Calibri"/>
                         </a:rPr>
-                        <a:t>Marawan / Hamza / Kholoud</a:t>
+                        <a:t>Team</a:t>
                       </a:r>
                       <a:endParaRPr sz="1200">
                         <a:latin typeface="Calibri"/>
@@ -6391,7 +6391,7 @@
                         <a:buNone/>
                       </a:pPr>
                       <a:r>
-                        <a:rPr sz="1200" b="0">
+                        <a:rPr sz="1275" b="0">
                           <a:solidFill>
                             <a:srgbClr val="1A1A1A"/>
                           </a:solidFill>
@@ -6436,7 +6436,7 @@
                   </a:tcPr>
                 </a:tc>
               </a:tr>
-              <a:tr h="304800">
+              <a:tr h="323850">
                 <a:tc>
                   <a:txBody>
                     <a:bodyPr/>
@@ -6446,7 +6446,7 @@
                         <a:buNone/>
                       </a:pPr>
                       <a:r>
-                        <a:rPr sz="1200" b="0">
+                        <a:rPr sz="1275" b="0">
                           <a:solidFill>
                             <a:srgbClr val="1A1A1A"/>
                           </a:solidFill>
@@ -6454,7 +6454,7 @@
                           <a:ea typeface="Calibri"/>
                           <a:cs typeface="Calibri"/>
                         </a:rPr>
-                        <a:t>Corpus + initial evaluation</a:t>
+                        <a:t>Attack data and early results</a:t>
                       </a:r>
                       <a:endParaRPr sz="1200">
                         <a:latin typeface="Calibri"/>
@@ -6499,7 +6499,7 @@
                         <a:buNone/>
                       </a:pPr>
                       <a:r>
-                        <a:rPr sz="1200" b="0">
+                        <a:rPr sz="1275" b="0">
                           <a:solidFill>
                             <a:srgbClr val="1A1A1A"/>
                           </a:solidFill>
@@ -6552,7 +6552,7 @@
                         <a:buNone/>
                       </a:pPr>
                       <a:r>
-                        <a:rPr sz="1200" b="0">
+                        <a:rPr sz="1275" b="0">
                           <a:solidFill>
                             <a:srgbClr val="1A1A1A"/>
                           </a:solidFill>
@@ -6560,7 +6560,7 @@
                           <a:ea typeface="Calibri"/>
                           <a:cs typeface="Calibri"/>
                         </a:rPr>
-                        <a:t>Youssef / Belal</a:t>
+                        <a:t>Team</a:t>
                       </a:r>
                       <a:endParaRPr sz="1200">
                         <a:latin typeface="Calibri"/>
@@ -6605,7 +6605,7 @@
                         <a:buNone/>
                       </a:pPr>
                       <a:r>
-                        <a:rPr sz="1200" b="0">
+                        <a:rPr sz="1275" b="0">
                           <a:solidFill>
                             <a:srgbClr val="1A1A1A"/>
                           </a:solidFill>
@@ -6613,7 +6613,7 @@
                           <a:ea typeface="Calibri"/>
                           <a:cs typeface="Calibri"/>
                         </a:rPr>
-                        <a:t>Preliminary results</a:t>
+                        <a:t>Initial results</a:t>
                       </a:r>
                       <a:endParaRPr sz="1200">
                         <a:latin typeface="Calibri"/>
@@ -6650,7 +6650,7 @@
                   </a:tcPr>
                 </a:tc>
               </a:tr>
-              <a:tr h="304800">
+              <a:tr h="323850">
                 <a:tc>
                   <a:txBody>
                     <a:bodyPr/>
@@ -6660,7 +6660,7 @@
                         <a:buNone/>
                       </a:pPr>
                       <a:r>
-                        <a:rPr sz="1200" b="0">
+                        <a:rPr sz="1275" b="0">
                           <a:solidFill>
                             <a:srgbClr val="1A1A1A"/>
                           </a:solidFill>
@@ -6668,7 +6668,7 @@
                           <a:ea typeface="Calibri"/>
                           <a:cs typeface="Calibri"/>
                         </a:rPr>
-                        <a:t>Runtime + explicit live review</a:t>
+                        <a:t>Live approval and local checks</a:t>
                       </a:r>
                       <a:endParaRPr sz="1200">
                         <a:latin typeface="Calibri"/>
@@ -6713,7 +6713,7 @@
                         <a:buNone/>
                       </a:pPr>
                       <a:r>
-                        <a:rPr sz="1200" b="0">
+                        <a:rPr sz="1275" b="0">
                           <a:solidFill>
                             <a:srgbClr val="1A1A1A"/>
                           </a:solidFill>
@@ -6766,7 +6766,7 @@
                         <a:buNone/>
                       </a:pPr>
                       <a:r>
-                        <a:rPr sz="1200" b="0">
+                        <a:rPr sz="1275" b="0">
                           <a:solidFill>
                             <a:srgbClr val="1A1A1A"/>
                           </a:solidFill>
@@ -6819,7 +6819,7 @@
                         <a:buNone/>
                       </a:pPr>
                       <a:r>
-                        <a:rPr sz="1200" b="0">
+                        <a:rPr sz="1275" b="0">
                           <a:solidFill>
                             <a:srgbClr val="1A1A1A"/>
                           </a:solidFill>
@@ -6827,7 +6827,7 @@
                           <a:ea typeface="Calibri"/>
                           <a:cs typeface="Calibri"/>
                         </a:rPr>
-                        <a:t>Local checks passed</a:t>
+                        <a:t>Added and checked</a:t>
                       </a:r>
                       <a:endParaRPr sz="1200">
                         <a:latin typeface="Calibri"/>
@@ -6864,7 +6864,7 @@
                   </a:tcPr>
                 </a:tc>
               </a:tr>
-              <a:tr h="304800">
+              <a:tr h="323850">
                 <a:tc>
                   <a:txBody>
                     <a:bodyPr/>
@@ -6874,7 +6874,7 @@
                         <a:buNone/>
                       </a:pPr>
                       <a:r>
-                        <a:rPr sz="1200" b="0">
+                        <a:rPr sz="1275" b="0">
                           <a:solidFill>
                             <a:srgbClr val="1A1A1A"/>
                           </a:solidFill>
@@ -6882,7 +6882,7 @@
                           <a:ea typeface="Calibri"/>
                           <a:cs typeface="Calibri"/>
                         </a:rPr>
-                        <a:t>Hosted API check + rehearsal</a:t>
+                        <a:t>Hosted model check and rehearsal</a:t>
                       </a:r>
                       <a:endParaRPr sz="1200">
                         <a:latin typeface="Calibri"/>
@@ -6927,7 +6927,7 @@
                         <a:buNone/>
                       </a:pPr>
                       <a:r>
-                        <a:rPr sz="1200" b="0">
+                        <a:rPr sz="1275" b="0">
                           <a:solidFill>
                             <a:srgbClr val="1A1A1A"/>
                           </a:solidFill>
@@ -6980,7 +6980,7 @@
                         <a:buNone/>
                       </a:pPr>
                       <a:r>
-                        <a:rPr sz="1200" b="0">
+                        <a:rPr sz="1275" b="0">
                           <a:solidFill>
                             <a:srgbClr val="1A1A1A"/>
                           </a:solidFill>
@@ -6988,7 +6988,7 @@
                           <a:ea typeface="Calibri"/>
                           <a:cs typeface="Calibri"/>
                         </a:rPr>
-                        <a:t>All</a:t>
+                        <a:t>Team</a:t>
                       </a:r>
                       <a:endParaRPr sz="1200">
                         <a:latin typeface="Calibri"/>
@@ -7033,7 +7033,7 @@
                         <a:buNone/>
                       </a:pPr>
                       <a:r>
-                        <a:rPr sz="1200" b="0">
+                        <a:rPr sz="1275" b="0">
                           <a:solidFill>
                             <a:srgbClr val="1A1A1A"/>
                           </a:solidFill>
@@ -7078,19 +7078,19 @@
                   </a:tcPr>
                 </a:tc>
               </a:tr>
-              <a:tr h="304800">
+              <a:tr h="323850">
                 <a:tc>
                   <a:txBody>
                     <a:bodyPr/>
                     <a:lstStyle/>
                     <a:p>
                       <a:r>
-                        <a:rPr sz="1200" b="0">
+                        <a:rPr sz="1275" b="0">
                           <a:solidFill>
                             <a:srgbClr val="1A1A1A"/>
                           </a:solidFill>
                         </a:rPr>
-                        <a:t>Freeze + held-out evaluation</a:t>
+                        <a:t>Freeze system and final testing</a:t>
                       </a:r>
                     </a:p>
                   </a:txBody>
@@ -7127,7 +7127,7 @@
                     <a:lstStyle/>
                     <a:p>
                       <a:r>
-                        <a:rPr sz="1200" b="0">
+                        <a:rPr sz="1275" b="0">
                           <a:solidFill>
                             <a:srgbClr val="1A1A1A"/>
                           </a:solidFill>
@@ -7169,12 +7169,12 @@
                     <a:lstStyle/>
                     <a:p>
                       <a:r>
-                        <a:rPr sz="1200" b="0">
+                        <a:rPr sz="1275" b="0">
                           <a:solidFill>
                             <a:srgbClr val="1A1A1A"/>
                           </a:solidFill>
                         </a:rPr>
-                        <a:t>Belal + all</a:t>
+                        <a:t>Team</a:t>
                       </a:r>
                     </a:p>
                   </a:txBody>
@@ -7211,7 +7211,7 @@
                     <a:lstStyle/>
                     <a:p>
                       <a:r>
-                        <a:rPr sz="1200" b="0">
+                        <a:rPr sz="1275" b="0">
                           <a:solidFill>
                             <a:srgbClr val="1A1A1A"/>
                           </a:solidFill>
@@ -7248,19 +7248,19 @@
                   </a:tcPr>
                 </a:tc>
               </a:tr>
-              <a:tr h="304800">
+              <a:tr h="323850">
                 <a:tc>
                   <a:txBody>
                     <a:bodyPr/>
                     <a:lstStyle/>
                     <a:p>
                       <a:r>
-                        <a:rPr sz="1200" b="0">
+                        <a:rPr sz="1275" b="0">
                           <a:solidFill>
                             <a:srgbClr val="1A1A1A"/>
                           </a:solidFill>
                         </a:rPr>
-                        <a:t>Final report + presentation</a:t>
+                        <a:t>Final report and presentation</a:t>
                       </a:r>
                     </a:p>
                   </a:txBody>
@@ -7297,7 +7297,7 @@
                     <a:lstStyle/>
                     <a:p>
                       <a:r>
-                        <a:rPr sz="1200" b="0">
+                        <a:rPr sz="1275" b="0">
                           <a:solidFill>
                             <a:srgbClr val="1A1A1A"/>
                           </a:solidFill>
@@ -7339,12 +7339,12 @@
                     <a:lstStyle/>
                     <a:p>
                       <a:r>
-                        <a:rPr sz="1200" b="0">
+                        <a:rPr sz="1275" b="0">
                           <a:solidFill>
                             <a:srgbClr val="1A1A1A"/>
                           </a:solidFill>
                         </a:rPr>
-                        <a:t>All</a:t>
+                        <a:t>Team</a:t>
                       </a:r>
                     </a:p>
                   </a:txBody>
@@ -7381,182 +7381,12 @@
                     <a:lstStyle/>
                     <a:p>
                       <a:r>
-                        <a:rPr sz="1200" b="0">
+                        <a:rPr sz="1275" b="0">
                           <a:solidFill>
                             <a:srgbClr val="1A1A1A"/>
                           </a:solidFill>
                         </a:rPr>
                         <a:t>Planned</a:t>
-                      </a:r>
-                    </a:p>
-                  </a:txBody>
-                  <a:tcPr marL="91440" marR="91440" marT="45720" marB="45720">
-                    <a:lnL w="12700" cmpd="sng">
-                      <a:solidFill>
-                        <a:srgbClr val="D6DEE6"/>
-                      </a:solidFill>
-                      <a:prstDash val="solid"/>
-                    </a:lnL>
-                    <a:lnR w="12700" cmpd="sng">
-                      <a:solidFill>
-                        <a:srgbClr val="D6DEE6"/>
-                      </a:solidFill>
-                      <a:prstDash val="solid"/>
-                    </a:lnR>
-                    <a:lnT w="12700" cmpd="sng">
-                      <a:solidFill>
-                        <a:srgbClr val="D6DEE6"/>
-                      </a:solidFill>
-                      <a:prstDash val="solid"/>
-                    </a:lnT>
-                    <a:lnB w="12700" cmpd="sng">
-                      <a:solidFill>
-                        <a:srgbClr val="D6DEE6"/>
-                      </a:solidFill>
-                      <a:prstDash val="solid"/>
-                    </a:lnB>
-                  </a:tcPr>
-                </a:tc>
-              </a:tr>
-              <a:tr h="304800">
-                <a:tc>
-                  <a:txBody>
-                    <a:bodyPr/>
-                    <a:lstStyle/>
-                    <a:p>
-                      <a:r>
-                        <a:rPr sz="1200" b="0">
-                          <a:solidFill>
-                            <a:srgbClr val="1A1A1A"/>
-                          </a:solidFill>
-                        </a:rPr>
-                        <a:t>*Confirm Week 14 deadline</a:t>
-                      </a:r>
-                    </a:p>
-                  </a:txBody>
-                  <a:tcPr marL="91440" marR="91440" marT="45720" marB="45720">
-                    <a:lnL w="12700" cmpd="sng">
-                      <a:solidFill>
-                        <a:srgbClr val="D6DEE6"/>
-                      </a:solidFill>
-                      <a:prstDash val="solid"/>
-                    </a:lnL>
-                    <a:lnR w="12700" cmpd="sng">
-                      <a:solidFill>
-                        <a:srgbClr val="D6DEE6"/>
-                      </a:solidFill>
-                      <a:prstDash val="solid"/>
-                    </a:lnR>
-                    <a:lnT w="12700" cmpd="sng">
-                      <a:solidFill>
-                        <a:srgbClr val="D6DEE6"/>
-                      </a:solidFill>
-                      <a:prstDash val="solid"/>
-                    </a:lnT>
-                    <a:lnB w="12700" cmpd="sng">
-                      <a:solidFill>
-                        <a:srgbClr val="D6DEE6"/>
-                      </a:solidFill>
-                      <a:prstDash val="solid"/>
-                    </a:lnB>
-                  </a:tcPr>
-                </a:tc>
-                <a:tc>
-                  <a:txBody>
-                    <a:bodyPr/>
-                    <a:lstStyle/>
-                    <a:p>
-                      <a:r>
-                        <a:rPr sz="1200" b="0">
-                          <a:solidFill>
-                            <a:srgbClr val="1A1A1A"/>
-                          </a:solidFill>
-                        </a:rPr>
-                        <a:t>With instructor</a:t>
-                      </a:r>
-                    </a:p>
-                  </a:txBody>
-                  <a:tcPr marL="91440" marR="91440" marT="45720" marB="45720">
-                    <a:lnL w="12700" cmpd="sng">
-                      <a:solidFill>
-                        <a:srgbClr val="D6DEE6"/>
-                      </a:solidFill>
-                      <a:prstDash val="solid"/>
-                    </a:lnL>
-                    <a:lnR w="12700" cmpd="sng">
-                      <a:solidFill>
-                        <a:srgbClr val="D6DEE6"/>
-                      </a:solidFill>
-                      <a:prstDash val="solid"/>
-                    </a:lnR>
-                    <a:lnT w="12700" cmpd="sng">
-                      <a:solidFill>
-                        <a:srgbClr val="D6DEE6"/>
-                      </a:solidFill>
-                      <a:prstDash val="solid"/>
-                    </a:lnT>
-                    <a:lnB w="12700" cmpd="sng">
-                      <a:solidFill>
-                        <a:srgbClr val="D6DEE6"/>
-                      </a:solidFill>
-                      <a:prstDash val="solid"/>
-                    </a:lnB>
-                  </a:tcPr>
-                </a:tc>
-                <a:tc>
-                  <a:txBody>
-                    <a:bodyPr/>
-                    <a:lstStyle/>
-                    <a:p>
-                      <a:r>
-                        <a:rPr sz="1200" b="0">
-                          <a:solidFill>
-                            <a:srgbClr val="1A1A1A"/>
-                          </a:solidFill>
-                        </a:rPr>
-                        <a:t>All</a:t>
-                      </a:r>
-                    </a:p>
-                  </a:txBody>
-                  <a:tcPr marL="91440" marR="91440" marT="45720" marB="45720">
-                    <a:lnL w="12700" cmpd="sng">
-                      <a:solidFill>
-                        <a:srgbClr val="D6DEE6"/>
-                      </a:solidFill>
-                      <a:prstDash val="solid"/>
-                    </a:lnL>
-                    <a:lnR w="12700" cmpd="sng">
-                      <a:solidFill>
-                        <a:srgbClr val="D6DEE6"/>
-                      </a:solidFill>
-                      <a:prstDash val="solid"/>
-                    </a:lnR>
-                    <a:lnT w="12700" cmpd="sng">
-                      <a:solidFill>
-                        <a:srgbClr val="D6DEE6"/>
-                      </a:solidFill>
-                      <a:prstDash val="solid"/>
-                    </a:lnT>
-                    <a:lnB w="12700" cmpd="sng">
-                      <a:solidFill>
-                        <a:srgbClr val="D6DEE6"/>
-                      </a:solidFill>
-                      <a:prstDash val="solid"/>
-                    </a:lnB>
-                  </a:tcPr>
-                </a:tc>
-                <a:tc>
-                  <a:txBody>
-                    <a:bodyPr/>
-                    <a:lstStyle/>
-                    <a:p>
-                      <a:r>
-                        <a:rPr sz="1200" b="0">
-                          <a:solidFill>
-                            <a:srgbClr val="1A1A1A"/>
-                          </a:solidFill>
-                        </a:rPr>
-                        <a:t>Schedule check</a:t>
                       </a:r>
                     </a:p>
                   </a:txBody>
@@ -7597,7 +7427,7 @@
           <p:cNvPr id="9" name="Text 6">
             <a:extLst xmlns:a="http://schemas.openxmlformats.org/drawingml/2006/main">
               <a:ext uri="{FF2B5EF4-FFF2-40B4-BE49-F238E27FC236}">
-                <a16:creationId xmlns:a16="http://schemas.microsoft.com/office/drawing/2014/main" id="{161A41F5-EE5C-4211-9315-F464AD6BD1B3}"/>
+                <a16:creationId xmlns:a16="http://schemas.microsoft.com/office/drawing/2014/main" id="{4D77B4A3-9196-44B3-B070-1814DAB92956}"/>
               </a:ext>
             </a:extLst>
           </p:cNvPr>
@@ -7643,7 +7473,7 @@
           <p:cNvPr id="10" name="Text 7">
             <a:extLst xmlns:a="http://schemas.openxmlformats.org/drawingml/2006/main">
               <a:ext uri="{FF2B5EF4-FFF2-40B4-BE49-F238E27FC236}">
-                <a16:creationId xmlns:a16="http://schemas.microsoft.com/office/drawing/2014/main" id="{8A278287-506E-436D-806A-1B0F1BB89759}"/>
+                <a16:creationId xmlns:a16="http://schemas.microsoft.com/office/drawing/2014/main" id="{F2B11FB7-F81B-4E1C-A044-8BF5126BCA53}"/>
               </a:ext>
             </a:extLst>
           </p:cNvPr>
@@ -7689,7 +7519,7 @@
           <p:cNvPr id="12" name="">
             <a:extLst xmlns:a="http://schemas.openxmlformats.org/drawingml/2006/main">
               <a:ext uri="{FF2B5EF4-FFF2-40B4-BE49-F238E27FC236}">
-                <a16:creationId xmlns:a16="http://schemas.microsoft.com/office/drawing/2014/main" id="{BBCBEAF6-ED29-40F7-AF39-9F66A0BF5193}"/>
+                <a16:creationId xmlns:a16="http://schemas.microsoft.com/office/drawing/2014/main" id="{4728C76D-B732-4C7C-8E9A-AF3CD68D6076}"/>
               </a:ext>
             </a:extLst>
           </p:cNvPr>
@@ -7701,7 +7531,144 @@
         <p:spPr>
           <a:xfrm xmlns:a="http://schemas.openxmlformats.org/drawingml/2006/main">
             <a:off x="960120" y="2009775"/>
-            <a:ext cx="10271474" cy="609600"/>
+            <a:ext cx="10271474" cy="647700"/>
+          </a:xfrm>
+          <a:prstGeom xmlns:a="http://schemas.openxmlformats.org/drawingml/2006/main" prst="rect">
+            <a:avLst/>
+          </a:prstGeom>
+          <a:noFill xmlns:a="http://schemas.openxmlformats.org/drawingml/2006/main"/>
+          <a:ln xmlns:a="http://schemas.openxmlformats.org/drawingml/2006/main" w="0">
+            <a:noFill/>
+          </a:ln>
+        </p:spPr>
+        <p:txBody>
+          <a:bodyPr xmlns:a="http://schemas.openxmlformats.org/drawingml/2006/main" lIns="0" tIns="0" rIns="0" bIns="0"/>
+          <a:lstStyle xmlns:a="http://schemas.openxmlformats.org/drawingml/2006/main">
+            <a:defPPr>
+              <a:defRPr sz="1650">
+                <a:solidFill>
+                  <a:srgbClr val="1A1A1A"/>
+                </a:solidFill>
+              </a:defRPr>
+            </a:defPPr>
+            <a:lvl1pPr>
+              <a:defRPr sz="1650">
+                <a:solidFill>
+                  <a:srgbClr val="1A1A1A"/>
+                </a:solidFill>
+              </a:defRPr>
+            </a:lvl1pPr>
+            <a:lvl2pPr>
+              <a:defRPr sz="1650">
+                <a:solidFill>
+                  <a:srgbClr val="1A1A1A"/>
+                </a:solidFill>
+              </a:defRPr>
+            </a:lvl2pPr>
+            <a:lvl3pPr>
+              <a:defRPr sz="1650">
+                <a:solidFill>
+                  <a:srgbClr val="1A1A1A"/>
+                </a:solidFill>
+              </a:defRPr>
+            </a:lvl3pPr>
+            <a:lvl4pPr>
+              <a:defRPr sz="1650">
+                <a:solidFill>
+                  <a:srgbClr val="1A1A1A"/>
+                </a:solidFill>
+              </a:defRPr>
+            </a:lvl4pPr>
+            <a:lvl5pPr>
+              <a:defRPr sz="1650">
+                <a:solidFill>
+                  <a:srgbClr val="1A1A1A"/>
+                </a:solidFill>
+              </a:defRPr>
+            </a:lvl5pPr>
+            <a:lvl6pPr>
+              <a:defRPr sz="1650">
+                <a:solidFill>
+                  <a:srgbClr val="1A1A1A"/>
+                </a:solidFill>
+              </a:defRPr>
+            </a:lvl6pPr>
+            <a:lvl7pPr>
+              <a:defRPr sz="1650">
+                <a:solidFill>
+                  <a:srgbClr val="1A1A1A"/>
+                </a:solidFill>
+              </a:defRPr>
+            </a:lvl7pPr>
+            <a:lvl8pPr>
+              <a:defRPr sz="1650">
+                <a:solidFill>
+                  <a:srgbClr val="1A1A1A"/>
+                </a:solidFill>
+              </a:defRPr>
+            </a:lvl8pPr>
+            <a:lvl9pPr>
+              <a:defRPr sz="1650">
+                <a:solidFill>
+                  <a:srgbClr val="1A1A1A"/>
+                </a:solidFill>
+              </a:defRPr>
+            </a:lvl9pPr>
+          </a:lstStyle>
+          <a:p xmlns:a="http://schemas.openxmlformats.org/drawingml/2006/main">
+            <a:pPr>
+              <a:defRPr sz="1650">
+                <a:solidFill>
+                  <a:srgbClr val="1A1A1A"/>
+                </a:solidFill>
+              </a:defRPr>
+            </a:pPr>
+            <a:r>
+              <a:rPr sz="1650">
+                <a:solidFill>
+                  <a:srgbClr val="1A1A1A"/>
+                </a:solidFill>
+              </a:rPr>
+              <a:t>Completed: the core agent, two defenses and preliminary experiments.</a:t>
+            </a:r>
+          </a:p>
+          <a:p xmlns:a="http://schemas.openxmlformats.org/drawingml/2006/main">
+            <a:pPr>
+              <a:defRPr sz="1650">
+                <a:solidFill>
+                  <a:srgbClr val="1A1A1A"/>
+                </a:solidFill>
+              </a:defRPr>
+            </a:pPr>
+            <a:r>
+              <a:rPr sz="1650">
+                <a:solidFill>
+                  <a:srgbClr val="1A1A1A"/>
+                </a:solidFill>
+              </a:rPr>
+              <a:t>Added: live email approval and local reliability checks.</a:t>
+            </a:r>
+          </a:p>
+        </p:txBody>
+      </p:sp>
+      <p:sp>
+        <p:nvSpPr>
+          <p:cNvPr id="13" name="">
+            <a:extLst xmlns:a="http://schemas.openxmlformats.org/drawingml/2006/main">
+              <a:ext uri="{FF2B5EF4-FFF2-40B4-BE49-F238E27FC236}">
+                <a16:creationId xmlns:a16="http://schemas.microsoft.com/office/drawing/2014/main" id="{330BE829-43F9-4F41-9C21-132A92AEECDE}"/>
+              </a:ext>
+            </a:extLst>
+          </p:cNvPr>
+          <p:cNvSpPr>
+            <a:spLocks xmlns:a="http://schemas.openxmlformats.org/drawingml/2006/main" noGrp="1"/>
+          </p:cNvSpPr>
+          <p:nvPr/>
+        </p:nvSpPr>
+        <p:spPr>
+          <a:xfrm xmlns:a="http://schemas.openxmlformats.org/drawingml/2006/main">
+            <a:off x="960120" y="2857500"/>
+            <a:ext cx="10271474" cy="647700"/>
           </a:xfrm>
           <a:prstGeom xmlns:a="http://schemas.openxmlformats.org/drawingml/2006/main" prst="rect">
             <a:avLst/>
@@ -7799,7 +7766,7 @@
                   <a:srgbClr val="1A1A1A"/>
                 </a:solidFill>
               </a:rPr>
-              <a:t>Core prototype and preliminary experiments are complete. Added on October 21:</a:t>
+              <a:t>Remaining: check hosted models, rehearse the demo and evaluate the final system.</a:t>
             </a:r>
           </a:p>
           <a:p xmlns:a="http://schemas.openxmlformats.org/drawingml/2006/main">
@@ -7816,144 +7783,7 @@
                   <a:srgbClr val="1A1A1A"/>
                 </a:solidFill>
               </a:rPr>
-              <a:t>real review of protected emails, a retrieval startup fix and regression checks.</a:t>
-            </a:r>
-          </a:p>
-        </p:txBody>
-      </p:sp>
-      <p:sp>
-        <p:nvSpPr>
-          <p:cNvPr id="13" name="">
-            <a:extLst xmlns:a="http://schemas.openxmlformats.org/drawingml/2006/main">
-              <a:ext uri="{FF2B5EF4-FFF2-40B4-BE49-F238E27FC236}">
-                <a16:creationId xmlns:a16="http://schemas.microsoft.com/office/drawing/2014/main" id="{4AE02CDF-4E25-45C7-88B2-9CD8EE645E69}"/>
-              </a:ext>
-            </a:extLst>
-          </p:cNvPr>
-          <p:cNvSpPr>
-            <a:spLocks xmlns:a="http://schemas.openxmlformats.org/drawingml/2006/main" noGrp="1"/>
-          </p:cNvSpPr>
-          <p:nvPr/>
-        </p:nvSpPr>
-        <p:spPr>
-          <a:xfrm xmlns:a="http://schemas.openxmlformats.org/drawingml/2006/main">
-            <a:off x="960120" y="2771775"/>
-            <a:ext cx="10271474" cy="609600"/>
-          </a:xfrm>
-          <a:prstGeom xmlns:a="http://schemas.openxmlformats.org/drawingml/2006/main" prst="rect">
-            <a:avLst/>
-          </a:prstGeom>
-          <a:noFill xmlns:a="http://schemas.openxmlformats.org/drawingml/2006/main"/>
-          <a:ln xmlns:a="http://schemas.openxmlformats.org/drawingml/2006/main" w="0">
-            <a:noFill/>
-          </a:ln>
-        </p:spPr>
-        <p:txBody>
-          <a:bodyPr xmlns:a="http://schemas.openxmlformats.org/drawingml/2006/main" lIns="0" tIns="0" rIns="0" bIns="0"/>
-          <a:lstStyle xmlns:a="http://schemas.openxmlformats.org/drawingml/2006/main">
-            <a:defPPr>
-              <a:defRPr sz="1575">
-                <a:solidFill>
-                  <a:srgbClr val="1A1A1A"/>
-                </a:solidFill>
-              </a:defRPr>
-            </a:defPPr>
-            <a:lvl1pPr>
-              <a:defRPr sz="1575">
-                <a:solidFill>
-                  <a:srgbClr val="1A1A1A"/>
-                </a:solidFill>
-              </a:defRPr>
-            </a:lvl1pPr>
-            <a:lvl2pPr>
-              <a:defRPr sz="1575">
-                <a:solidFill>
-                  <a:srgbClr val="1A1A1A"/>
-                </a:solidFill>
-              </a:defRPr>
-            </a:lvl2pPr>
-            <a:lvl3pPr>
-              <a:defRPr sz="1575">
-                <a:solidFill>
-                  <a:srgbClr val="1A1A1A"/>
-                </a:solidFill>
-              </a:defRPr>
-            </a:lvl3pPr>
-            <a:lvl4pPr>
-              <a:defRPr sz="1575">
-                <a:solidFill>
-                  <a:srgbClr val="1A1A1A"/>
-                </a:solidFill>
-              </a:defRPr>
-            </a:lvl4pPr>
-            <a:lvl5pPr>
-              <a:defRPr sz="1575">
-                <a:solidFill>
-                  <a:srgbClr val="1A1A1A"/>
-                </a:solidFill>
-              </a:defRPr>
-            </a:lvl5pPr>
-            <a:lvl6pPr>
-              <a:defRPr sz="1575">
-                <a:solidFill>
-                  <a:srgbClr val="1A1A1A"/>
-                </a:solidFill>
-              </a:defRPr>
-            </a:lvl6pPr>
-            <a:lvl7pPr>
-              <a:defRPr sz="1575">
-                <a:solidFill>
-                  <a:srgbClr val="1A1A1A"/>
-                </a:solidFill>
-              </a:defRPr>
-            </a:lvl7pPr>
-            <a:lvl8pPr>
-              <a:defRPr sz="1575">
-                <a:solidFill>
-                  <a:srgbClr val="1A1A1A"/>
-                </a:solidFill>
-              </a:defRPr>
-            </a:lvl8pPr>
-            <a:lvl9pPr>
-              <a:defRPr sz="1575">
-                <a:solidFill>
-                  <a:srgbClr val="1A1A1A"/>
-                </a:solidFill>
-              </a:defRPr>
-            </a:lvl9pPr>
-          </a:lstStyle>
-          <a:p xmlns:a="http://schemas.openxmlformats.org/drawingml/2006/main">
-            <a:pPr>
-              <a:defRPr sz="1575">
-                <a:solidFill>
-                  <a:srgbClr val="1A1A1A"/>
-                </a:solidFill>
-              </a:defRPr>
-            </a:pPr>
-            <a:r>
-              <a:rPr sz="1575">
-                <a:solidFill>
-                  <a:srgbClr val="1A1A1A"/>
-                </a:solidFill>
-              </a:rPr>
-              <a:t>Remaining: verify hosted APIs, rehearse the live demo and run the frozen final evaluation.</a:t>
-            </a:r>
-          </a:p>
-          <a:p xmlns:a="http://schemas.openxmlformats.org/drawingml/2006/main">
-            <a:pPr>
-              <a:defRPr sz="1575">
-                <a:solidFill>
-                  <a:srgbClr val="1A1A1A"/>
-                </a:solidFill>
-              </a:defRPr>
-            </a:pPr>
-            <a:r>
-              <a:rPr sz="1575">
-                <a:solidFill>
-                  <a:srgbClr val="1A1A1A"/>
-                </a:solidFill>
-              </a:rPr>
-              <a:t>Future dates are proposed team targets, pending the confirmed class schedule.</a:t>
+              <a:t>The dates below are team targets. Confirm the course’s Week 14 deadline.</a:t>
             </a:r>
           </a:p>
         </p:txBody>
@@ -7961,7 +7791,7 @@
     </p:spTree>
     <p:extLst>
       <p:ext uri="{BB962C8B-B14F-4D97-AF65-F5344CB8AC3E}">
-        <p14:creationId xmlns:p14="http://schemas.microsoft.com/office/powerpoint/2010/main" val="1214647066"/>
+        <p14:creationId xmlns:p14="http://schemas.microsoft.com/office/powerpoint/2010/main" val="1481086393"/>
       </p:ext>
     </p:extLst>
   </p:cSld>

--- a/docs/presentation/COE444_Progress_Report_Final.pptx
+++ b/docs/presentation/COE444_Progress_Report_Final.pptx
@@ -2,17 +2,17 @@
 <file path=ppt/presentation.xml><?xml version="1.0" encoding="utf-8"?>
 <p:presentation xmlns:p="http://schemas.openxmlformats.org/presentationml/2006/main">
   <p:sldMasterIdLst>
-    <p:sldMasterId xmlns:r="http://schemas.openxmlformats.org/officeDocument/2006/relationships" id="2147483648" r:id="R70a378df7ac0475f"/>
+    <p:sldMasterId xmlns:r="http://schemas.openxmlformats.org/officeDocument/2006/relationships" id="2147483648" r:id="Rb3d1da4fb7164430"/>
   </p:sldMasterIdLst>
   <p:notesMasterIdLst>
-    <p:notesMasterId xmlns:r="http://schemas.openxmlformats.org/officeDocument/2006/relationships" r:id="R137275f153734463"/>
+    <p:notesMasterId xmlns:r="http://schemas.openxmlformats.org/officeDocument/2006/relationships" r:id="Rda91c7db7f444de7"/>
   </p:notesMasterIdLst>
   <p:sldIdLst>
-    <p:sldId xmlns:r="http://schemas.openxmlformats.org/officeDocument/2006/relationships" id="256" r:id="R265ce9279d544879"/>
-    <p:sldId xmlns:r="http://schemas.openxmlformats.org/officeDocument/2006/relationships" id="257" r:id="Rd1ad5be034e0444e"/>
-    <p:sldId xmlns:r="http://schemas.openxmlformats.org/officeDocument/2006/relationships" id="258" r:id="R9d2bd871a43a431b"/>
-    <p:sldId xmlns:r="http://schemas.openxmlformats.org/officeDocument/2006/relationships" id="259" r:id="R5fa22e7c034b4551"/>
-    <p:sldId xmlns:r="http://schemas.openxmlformats.org/officeDocument/2006/relationships" id="260" r:id="R40b46a9352754f2e"/>
+    <p:sldId xmlns:r="http://schemas.openxmlformats.org/officeDocument/2006/relationships" id="256" r:id="R5a9d3c81f76e4126"/>
+    <p:sldId xmlns:r="http://schemas.openxmlformats.org/officeDocument/2006/relationships" id="257" r:id="R84f118e5188b4936"/>
+    <p:sldId xmlns:r="http://schemas.openxmlformats.org/officeDocument/2006/relationships" id="258" r:id="R6dc3cf03af3e4004"/>
+    <p:sldId xmlns:r="http://schemas.openxmlformats.org/officeDocument/2006/relationships" id="259" r:id="R239a3dfe8c2e428e"/>
+    <p:sldId xmlns:r="http://schemas.openxmlformats.org/officeDocument/2006/relationships" id="260" r:id="R5ffabd0039d444a2"/>
   </p:sldIdLst>
   <p:sldSz cx="12192000" cy="6858000"/>
   <p:notesSz cx="6858000" cy="9144000"/>
@@ -940,7 +940,7 @@
   </p:cSld>
   <p:clrMap bg1="lt1" tx1="dk1" bg2="lt2" tx2="dk2" accent1="accent1" accent2="accent2" accent3="accent3" accent4="accent4" accent5="accent5" accent6="accent6" hlink="hlink" folHlink="folHlink"/>
   <p:sldLayoutIdLst>
-    <p:sldLayoutId xmlns:r="http://schemas.openxmlformats.org/officeDocument/2006/relationships" id="2147483649" r:id="Rce72ea840a2147c5"/>
+    <p:sldLayoutId xmlns:r="http://schemas.openxmlformats.org/officeDocument/2006/relationships" id="2147483649" r:id="R2f49a5de85694e21"/>
   </p:sldLayoutIdLst>
   <p:hf sldNum="0" hdr="0" ftr="0" dt="0"/>
   <p:txStyles>
@@ -1511,7 +1511,7 @@
           <p:cNvPr id="2" name="Shape 0">
             <a:extLst xmlns:a="http://schemas.openxmlformats.org/drawingml/2006/main">
               <a:ext uri="{FF2B5EF4-FFF2-40B4-BE49-F238E27FC236}">
-                <a16:creationId xmlns:a16="http://schemas.microsoft.com/office/drawing/2014/main" id="{DF8400B6-0449-459F-BF07-73AD8ED86F34}"/>
+                <a16:creationId xmlns:a16="http://schemas.microsoft.com/office/drawing/2014/main" id="{AE94D3B1-64D1-4B17-8F06-89719203BD28}"/>
               </a:ext>
             </a:extLst>
           </p:cNvPr>
@@ -1538,7 +1538,7 @@
           <p:cNvPr id="3" name="Text 1">
             <a:extLst xmlns:a="http://schemas.openxmlformats.org/drawingml/2006/main">
               <a:ext uri="{FF2B5EF4-FFF2-40B4-BE49-F238E27FC236}">
-                <a16:creationId xmlns:a16="http://schemas.microsoft.com/office/drawing/2014/main" id="{89AEE735-7A03-49D0-B26A-49FFDA591D58}"/>
+                <a16:creationId xmlns:a16="http://schemas.microsoft.com/office/drawing/2014/main" id="{AB84AA32-CB68-429C-884F-CAB525138E71}"/>
               </a:ext>
             </a:extLst>
           </p:cNvPr>
@@ -1682,7 +1682,7 @@
           <p:cNvPr id="4" name="Text 2">
             <a:extLst xmlns:a="http://schemas.openxmlformats.org/drawingml/2006/main">
               <a:ext uri="{FF2B5EF4-FFF2-40B4-BE49-F238E27FC236}">
-                <a16:creationId xmlns:a16="http://schemas.microsoft.com/office/drawing/2014/main" id="{B30EC614-F94D-4124-B781-AD66DC77CC96}"/>
+                <a16:creationId xmlns:a16="http://schemas.microsoft.com/office/drawing/2014/main" id="{6FC8A675-8AF0-4965-9E6C-ADC86614E1E3}"/>
               </a:ext>
             </a:extLst>
           </p:cNvPr>
@@ -1728,7 +1728,7 @@
           <p:cNvPr id="5" name="Text 3">
             <a:extLst xmlns:a="http://schemas.openxmlformats.org/drawingml/2006/main">
               <a:ext uri="{FF2B5EF4-FFF2-40B4-BE49-F238E27FC236}">
-                <a16:creationId xmlns:a16="http://schemas.microsoft.com/office/drawing/2014/main" id="{70FB2AF9-F8F1-441E-AD20-82781B3C2C66}"/>
+                <a16:creationId xmlns:a16="http://schemas.microsoft.com/office/drawing/2014/main" id="{E9AB7974-47AA-45D0-B950-39AC38C8D65E}"/>
               </a:ext>
             </a:extLst>
           </p:cNvPr>
@@ -1774,7 +1774,7 @@
           <p:cNvPr id="6" name="Text 4">
             <a:extLst xmlns:a="http://schemas.openxmlformats.org/drawingml/2006/main">
               <a:ext uri="{FF2B5EF4-FFF2-40B4-BE49-F238E27FC236}">
-                <a16:creationId xmlns:a16="http://schemas.microsoft.com/office/drawing/2014/main" id="{06A8F4B8-7874-477A-AE95-3E3120E7A762}"/>
+                <a16:creationId xmlns:a16="http://schemas.microsoft.com/office/drawing/2014/main" id="{E28BE37A-A5D1-4DD8-80C0-C616DFB596AE}"/>
               </a:ext>
             </a:extLst>
           </p:cNvPr>
@@ -1820,7 +1820,7 @@
           <p:cNvPr id="7" name="Text 5">
             <a:extLst xmlns:a="http://schemas.openxmlformats.org/drawingml/2006/main">
               <a:ext uri="{FF2B5EF4-FFF2-40B4-BE49-F238E27FC236}">
-                <a16:creationId xmlns:a16="http://schemas.microsoft.com/office/drawing/2014/main" id="{E8BE516D-1E92-41BF-8652-82AF03DD0B07}"/>
+                <a16:creationId xmlns:a16="http://schemas.microsoft.com/office/drawing/2014/main" id="{A2D56E62-6295-4579-80D7-9338B2981BE5}"/>
               </a:ext>
             </a:extLst>
           </p:cNvPr>
@@ -1866,7 +1866,7 @@
           <p:cNvPr id="8" name="Text 6">
             <a:extLst xmlns:a="http://schemas.openxmlformats.org/drawingml/2006/main">
               <a:ext uri="{FF2B5EF4-FFF2-40B4-BE49-F238E27FC236}">
-                <a16:creationId xmlns:a16="http://schemas.microsoft.com/office/drawing/2014/main" id="{793A6A2C-679C-48AC-BF2A-F929590CE135}"/>
+                <a16:creationId xmlns:a16="http://schemas.microsoft.com/office/drawing/2014/main" id="{F1138344-5AB7-4D50-BA53-A89AF16D2E6D}"/>
               </a:ext>
             </a:extLst>
           </p:cNvPr>
@@ -2010,7 +2010,7 @@
           <p:cNvPr id="9" name="Text 7">
             <a:extLst xmlns:a="http://schemas.openxmlformats.org/drawingml/2006/main">
               <a:ext uri="{FF2B5EF4-FFF2-40B4-BE49-F238E27FC236}">
-                <a16:creationId xmlns:a16="http://schemas.microsoft.com/office/drawing/2014/main" id="{6EA5CCC6-88F8-4922-B6A5-EB712C6299A5}"/>
+                <a16:creationId xmlns:a16="http://schemas.microsoft.com/office/drawing/2014/main" id="{0139DA1A-A428-4FD0-A655-BEB95595CBFB}"/>
               </a:ext>
             </a:extLst>
           </p:cNvPr>
@@ -2056,7 +2056,7 @@
           <p:cNvPr id="10" name="Text 8">
             <a:extLst xmlns:a="http://schemas.openxmlformats.org/drawingml/2006/main">
               <a:ext uri="{FF2B5EF4-FFF2-40B4-BE49-F238E27FC236}">
-                <a16:creationId xmlns:a16="http://schemas.microsoft.com/office/drawing/2014/main" id="{4821F314-A1E7-44DD-A780-31BB855C84E4}"/>
+                <a16:creationId xmlns:a16="http://schemas.microsoft.com/office/drawing/2014/main" id="{FC98CE25-F8D3-47FC-83C5-6716A70B7950}"/>
               </a:ext>
             </a:extLst>
           </p:cNvPr>
@@ -2102,7 +2102,7 @@
           <p:cNvPr id="11" name="Text 9">
             <a:extLst xmlns:a="http://schemas.openxmlformats.org/drawingml/2006/main">
               <a:ext uri="{FF2B5EF4-FFF2-40B4-BE49-F238E27FC236}">
-                <a16:creationId xmlns:a16="http://schemas.microsoft.com/office/drawing/2014/main" id="{D954B445-82C4-4BD8-A02D-7E523CCD2903}"/>
+                <a16:creationId xmlns:a16="http://schemas.microsoft.com/office/drawing/2014/main" id="{F04ADB8D-F47B-47DB-A0C6-409132C07A14}"/>
               </a:ext>
             </a:extLst>
           </p:cNvPr>
@@ -2148,7 +2148,7 @@
           <p:cNvPr id="12" name="Text 10">
             <a:extLst xmlns:a="http://schemas.openxmlformats.org/drawingml/2006/main">
               <a:ext uri="{FF2B5EF4-FFF2-40B4-BE49-F238E27FC236}">
-                <a16:creationId xmlns:a16="http://schemas.microsoft.com/office/drawing/2014/main" id="{0910AB33-8BD1-448C-9F44-985F959746CA}"/>
+                <a16:creationId xmlns:a16="http://schemas.microsoft.com/office/drawing/2014/main" id="{A18CE035-54BB-4E61-9BA6-0A58A889A746}"/>
               </a:ext>
             </a:extLst>
           </p:cNvPr>
@@ -2194,7 +2194,7 @@
           <p:cNvPr id="13" name="Text 11">
             <a:extLst xmlns:a="http://schemas.openxmlformats.org/drawingml/2006/main">
               <a:ext uri="{FF2B5EF4-FFF2-40B4-BE49-F238E27FC236}">
-                <a16:creationId xmlns:a16="http://schemas.microsoft.com/office/drawing/2014/main" id="{7778FD06-2696-41B2-AB87-F0B6621CD4D9}"/>
+                <a16:creationId xmlns:a16="http://schemas.microsoft.com/office/drawing/2014/main" id="{FB5168AC-9125-4AB3-B56B-2E29A41DA50E}"/>
               </a:ext>
             </a:extLst>
           </p:cNvPr>
@@ -2240,7 +2240,7 @@
           <p:cNvPr id="14" name="Text 12">
             <a:extLst xmlns:a="http://schemas.openxmlformats.org/drawingml/2006/main">
               <a:ext uri="{FF2B5EF4-FFF2-40B4-BE49-F238E27FC236}">
-                <a16:creationId xmlns:a16="http://schemas.microsoft.com/office/drawing/2014/main" id="{201B333F-28CB-43DD-B748-7D66AB6C8031}"/>
+                <a16:creationId xmlns:a16="http://schemas.microsoft.com/office/drawing/2014/main" id="{F7A3DA0A-3B74-41F0-9414-8C1AB0FDAA37}"/>
               </a:ext>
             </a:extLst>
           </p:cNvPr>
@@ -2286,7 +2286,7 @@
           <p:cNvPr id="15" name="Text 13">
             <a:extLst xmlns:a="http://schemas.openxmlformats.org/drawingml/2006/main">
               <a:ext uri="{FF2B5EF4-FFF2-40B4-BE49-F238E27FC236}">
-                <a16:creationId xmlns:a16="http://schemas.microsoft.com/office/drawing/2014/main" id="{8C7C6EE1-7DEB-4758-9AFF-6C677C945B4B}"/>
+                <a16:creationId xmlns:a16="http://schemas.microsoft.com/office/drawing/2014/main" id="{F932886E-02D1-4AA0-8D68-E134783B7860}"/>
               </a:ext>
             </a:extLst>
           </p:cNvPr>
@@ -2332,7 +2332,7 @@
           <p:cNvPr id="16" name="Text 14">
             <a:extLst xmlns:a="http://schemas.openxmlformats.org/drawingml/2006/main">
               <a:ext uri="{FF2B5EF4-FFF2-40B4-BE49-F238E27FC236}">
-                <a16:creationId xmlns:a16="http://schemas.microsoft.com/office/drawing/2014/main" id="{DC1B97D4-FD92-4B9E-AF92-AD0C621EB888}"/>
+                <a16:creationId xmlns:a16="http://schemas.microsoft.com/office/drawing/2014/main" id="{00CF47CB-2E0D-4A1F-8202-746B039FEDB8}"/>
               </a:ext>
             </a:extLst>
           </p:cNvPr>
@@ -2376,7 +2376,7 @@
     </p:spTree>
     <p:extLst>
       <p:ext uri="{BB962C8B-B14F-4D97-AF65-F5344CB8AC3E}">
-        <p14:creationId xmlns:p14="http://schemas.microsoft.com/office/powerpoint/2010/main" val="1783756700"/>
+        <p14:creationId xmlns:p14="http://schemas.microsoft.com/office/powerpoint/2010/main" val="835945727"/>
       </p:ext>
     </p:extLst>
   </p:cSld>
@@ -2407,7 +2407,7 @@
           <p:cNvPr id="2" name="Text 0">
             <a:extLst xmlns:a="http://schemas.openxmlformats.org/drawingml/2006/main">
               <a:ext uri="{FF2B5EF4-FFF2-40B4-BE49-F238E27FC236}">
-                <a16:creationId xmlns:a16="http://schemas.microsoft.com/office/drawing/2014/main" id="{0D17828D-9DA5-4587-B7E7-3045D8747FE8}"/>
+                <a16:creationId xmlns:a16="http://schemas.microsoft.com/office/drawing/2014/main" id="{F140F9A6-9584-44A5-8188-5222A866A01B}"/>
               </a:ext>
             </a:extLst>
           </p:cNvPr>
@@ -2453,7 +2453,7 @@
           <p:cNvPr id="3" name="Text 1">
             <a:extLst xmlns:a="http://schemas.openxmlformats.org/drawingml/2006/main">
               <a:ext uri="{FF2B5EF4-FFF2-40B4-BE49-F238E27FC236}">
-                <a16:creationId xmlns:a16="http://schemas.microsoft.com/office/drawing/2014/main" id="{E8E7D34B-3AF4-4581-B991-B6A3E8DD0074}"/>
+                <a16:creationId xmlns:a16="http://schemas.microsoft.com/office/drawing/2014/main" id="{437BAB68-11DC-4FE0-B498-131ADDF4FE25}"/>
               </a:ext>
             </a:extLst>
           </p:cNvPr>
@@ -2499,7 +2499,7 @@
           <p:cNvPr id="4" name="Text 2">
             <a:extLst xmlns:a="http://schemas.openxmlformats.org/drawingml/2006/main">
               <a:ext uri="{FF2B5EF4-FFF2-40B4-BE49-F238E27FC236}">
-                <a16:creationId xmlns:a16="http://schemas.microsoft.com/office/drawing/2014/main" id="{C736904F-D6CE-4216-AEFD-258CD45F4B00}"/>
+                <a16:creationId xmlns:a16="http://schemas.microsoft.com/office/drawing/2014/main" id="{5E55BF23-D45A-4E3B-803A-190D5324CBB3}"/>
               </a:ext>
             </a:extLst>
           </p:cNvPr>
@@ -2545,7 +2545,7 @@
           <p:cNvPr id="5" name="Shape 3">
             <a:extLst xmlns:a="http://schemas.openxmlformats.org/drawingml/2006/main">
               <a:ext uri="{FF2B5EF4-FFF2-40B4-BE49-F238E27FC236}">
-                <a16:creationId xmlns:a16="http://schemas.microsoft.com/office/drawing/2014/main" id="{74795ABD-1D2C-40ED-AD69-39EEDB2E17AD}"/>
+                <a16:creationId xmlns:a16="http://schemas.microsoft.com/office/drawing/2014/main" id="{A2272013-BCBF-439B-AA89-C64630DA8863}"/>
               </a:ext>
             </a:extLst>
           </p:cNvPr>
@@ -2572,7 +2572,7 @@
           <p:cNvPr id="6" name="Text 4">
             <a:extLst xmlns:a="http://schemas.openxmlformats.org/drawingml/2006/main">
               <a:ext uri="{FF2B5EF4-FFF2-40B4-BE49-F238E27FC236}">
-                <a16:creationId xmlns:a16="http://schemas.microsoft.com/office/drawing/2014/main" id="{5B6E0E35-CE7E-4C58-BF89-ADBF210D6F1A}"/>
+                <a16:creationId xmlns:a16="http://schemas.microsoft.com/office/drawing/2014/main" id="{F59BC3A1-22F9-4025-A18D-7673DC834B74}"/>
               </a:ext>
             </a:extLst>
           </p:cNvPr>
@@ -2607,7 +2607,7 @@
                 <a:ea typeface="Calibri"/>
                 <a:cs typeface="Calibri"/>
               </a:rPr>
-              <a:t>PROBLEM AND REFINEMENTS</a:t>
+              <a:t>THE PROBLEM WE ARE TESTING</a:t>
             </a:r>
             <a:endParaRPr sz="1100"/>
           </a:p>
@@ -2618,7 +2618,7 @@
           <p:cNvPr id="9" name="Text 7">
             <a:extLst xmlns:a="http://schemas.openxmlformats.org/drawingml/2006/main">
               <a:ext uri="{FF2B5EF4-FFF2-40B4-BE49-F238E27FC236}">
-                <a16:creationId xmlns:a16="http://schemas.microsoft.com/office/drawing/2014/main" id="{180912ED-31DF-48FB-A07F-3EA9F6B9B8F7}"/>
+                <a16:creationId xmlns:a16="http://schemas.microsoft.com/office/drawing/2014/main" id="{E7B8BCC2-E36D-40EB-B1AF-06E3827E0DD1}"/>
               </a:ext>
             </a:extLst>
           </p:cNvPr>
@@ -2664,7 +2664,7 @@
           <p:cNvPr id="10" name="Text 8">
             <a:extLst xmlns:a="http://schemas.openxmlformats.org/drawingml/2006/main">
               <a:ext uri="{FF2B5EF4-FFF2-40B4-BE49-F238E27FC236}">
-                <a16:creationId xmlns:a16="http://schemas.microsoft.com/office/drawing/2014/main" id="{C7548D54-59BE-4DD0-9886-74747849DAD5}"/>
+                <a16:creationId xmlns:a16="http://schemas.microsoft.com/office/drawing/2014/main" id="{A7FEF28B-4C20-4F2D-86E9-C9DA16694C14}"/>
               </a:ext>
             </a:extLst>
           </p:cNvPr>
@@ -2710,7 +2710,7 @@
           <p:cNvPr id="11" name="">
             <a:extLst xmlns:a="http://schemas.openxmlformats.org/drawingml/2006/main">
               <a:ext uri="{FF2B5EF4-FFF2-40B4-BE49-F238E27FC236}">
-                <a16:creationId xmlns:a16="http://schemas.microsoft.com/office/drawing/2014/main" id="{96E562D3-087F-4A00-8FA3-D43A77567AA8}"/>
+                <a16:creationId xmlns:a16="http://schemas.microsoft.com/office/drawing/2014/main" id="{5CB1A334-7984-44BA-A11B-E2D2F780C73D}"/>
               </a:ext>
             </a:extLst>
           </p:cNvPr>
@@ -2722,7 +2722,7 @@
         <p:spPr>
           <a:xfrm xmlns:a="http://schemas.openxmlformats.org/drawingml/2006/main">
             <a:off x="960120" y="2009775"/>
-            <a:ext cx="10271474" cy="704850"/>
+            <a:ext cx="10271474" cy="1714500"/>
           </a:xfrm>
           <a:prstGeom xmlns:a="http://schemas.openxmlformats.org/drawingml/2006/main" prst="rect">
             <a:avLst/>
@@ -2733,73 +2733,75 @@
           </a:ln>
         </p:spPr>
         <p:txBody>
-          <a:bodyPr xmlns:a="http://schemas.openxmlformats.org/drawingml/2006/main" lIns="0" tIns="0" rIns="0" bIns="0"/>
+          <a:bodyPr xmlns:a="http://schemas.openxmlformats.org/drawingml/2006/main" lIns="0" tIns="0" rIns="0" bIns="0">
+            <a:noAutofit/>
+          </a:bodyPr>
           <a:lstStyle xmlns:a="http://schemas.openxmlformats.org/drawingml/2006/main">
             <a:defPPr>
-              <a:defRPr sz="1725">
+              <a:defRPr sz="1575">
                 <a:solidFill>
                   <a:srgbClr val="1A1A1A"/>
                 </a:solidFill>
               </a:defRPr>
             </a:defPPr>
             <a:lvl1pPr>
-              <a:defRPr sz="1725">
+              <a:defRPr sz="1575">
                 <a:solidFill>
                   <a:srgbClr val="1A1A1A"/>
                 </a:solidFill>
               </a:defRPr>
             </a:lvl1pPr>
             <a:lvl2pPr>
-              <a:defRPr sz="1725">
+              <a:defRPr sz="1575">
                 <a:solidFill>
                   <a:srgbClr val="1A1A1A"/>
                 </a:solidFill>
               </a:defRPr>
             </a:lvl2pPr>
             <a:lvl3pPr>
-              <a:defRPr sz="1725">
+              <a:defRPr sz="1575">
                 <a:solidFill>
                   <a:srgbClr val="1A1A1A"/>
                 </a:solidFill>
               </a:defRPr>
             </a:lvl3pPr>
             <a:lvl4pPr>
-              <a:defRPr sz="1725">
+              <a:defRPr sz="1575">
                 <a:solidFill>
                   <a:srgbClr val="1A1A1A"/>
                 </a:solidFill>
               </a:defRPr>
             </a:lvl4pPr>
             <a:lvl5pPr>
-              <a:defRPr sz="1725">
+              <a:defRPr sz="1575">
                 <a:solidFill>
                   <a:srgbClr val="1A1A1A"/>
                 </a:solidFill>
               </a:defRPr>
             </a:lvl5pPr>
             <a:lvl6pPr>
-              <a:defRPr sz="1725">
+              <a:defRPr sz="1575">
                 <a:solidFill>
                   <a:srgbClr val="1A1A1A"/>
                 </a:solidFill>
               </a:defRPr>
             </a:lvl6pPr>
             <a:lvl7pPr>
-              <a:defRPr sz="1725">
+              <a:defRPr sz="1575">
                 <a:solidFill>
                   <a:srgbClr val="1A1A1A"/>
                 </a:solidFill>
               </a:defRPr>
             </a:lvl7pPr>
             <a:lvl8pPr>
-              <a:defRPr sz="1725">
+              <a:defRPr sz="1575">
                 <a:solidFill>
                   <a:srgbClr val="1A1A1A"/>
                 </a:solidFill>
               </a:defRPr>
             </a:lvl8pPr>
             <a:lvl9pPr>
-              <a:defRPr sz="1725">
+              <a:defRPr sz="1575">
                 <a:solidFill>
                   <a:srgbClr val="1A1A1A"/>
                 </a:solidFill>
@@ -2807,184 +2809,97 @@
             </a:lvl9pPr>
           </a:lstStyle>
           <a:p xmlns:a="http://schemas.openxmlformats.org/drawingml/2006/main">
-            <a:pPr>
-              <a:defRPr sz="1725">
+            <a:pPr marL="190500" indent="-101600">
+              <a:spcAft>
+                <a:spcPts val="800"/>
+              </a:spcAft>
+              <a:buChar char="•"/>
+              <a:defRPr sz="1575">
                 <a:solidFill>
                   <a:srgbClr val="1A1A1A"/>
                 </a:solidFill>
               </a:defRPr>
             </a:pPr>
             <a:r>
-              <a:rPr sz="1725">
+              <a:rPr sz="1575">
                 <a:solidFill>
                   <a:srgbClr val="1A1A1A"/>
                 </a:solidFill>
               </a:rPr>
-              <a:t>Our AI agent chooses tools and steps to complete a user’s task.</a:t>
+              <a:t>Our agent chooses tools, reads the results and decides its next step to complete a user’s task.</a:t>
             </a:r>
           </a:p>
           <a:p xmlns:a="http://schemas.openxmlformats.org/drawingml/2006/main">
-            <a:pPr>
-              <a:defRPr sz="1725">
+            <a:pPr marL="190500" indent="-101600">
+              <a:spcAft>
+                <a:spcPts val="800"/>
+              </a:spcAft>
+              <a:buChar char="•"/>
+              <a:defRPr sz="1575">
                 <a:solidFill>
                   <a:srgbClr val="1A1A1A"/>
                 </a:solidFill>
               </a:defRPr>
             </a:pPr>
             <a:r>
-              <a:rPr sz="1725">
+              <a:rPr sz="1575">
                 <a:solidFill>
                   <a:srgbClr val="1A1A1A"/>
                 </a:solidFill>
               </a:rPr>
-              <a:t>An attacker hides instructions in text the agent reads and tries to change its actions.</a:t>
-            </a:r>
-          </a:p>
-        </p:txBody>
-      </p:sp>
-      <p:sp>
-        <p:nvSpPr>
-          <p:cNvPr id="12" name="">
-            <a:extLst xmlns:a="http://schemas.openxmlformats.org/drawingml/2006/main">
-              <a:ext uri="{FF2B5EF4-FFF2-40B4-BE49-F238E27FC236}">
-                <a16:creationId xmlns:a16="http://schemas.microsoft.com/office/drawing/2014/main" id="{09D59C3A-12BB-42EB-8425-323BA2D3B940}"/>
-              </a:ext>
-            </a:extLst>
-          </p:cNvPr>
-          <p:cNvSpPr>
-            <a:spLocks xmlns:a="http://schemas.openxmlformats.org/drawingml/2006/main" noGrp="1"/>
-          </p:cNvSpPr>
-          <p:nvPr/>
-        </p:nvSpPr>
-        <p:spPr>
-          <a:xfrm xmlns:a="http://schemas.openxmlformats.org/drawingml/2006/main">
-            <a:off x="960120" y="2886075"/>
-            <a:ext cx="10271474" cy="704850"/>
-          </a:xfrm>
-          <a:prstGeom xmlns:a="http://schemas.openxmlformats.org/drawingml/2006/main" prst="rect">
-            <a:avLst/>
-          </a:prstGeom>
-          <a:noFill xmlns:a="http://schemas.openxmlformats.org/drawingml/2006/main"/>
-          <a:ln xmlns:a="http://schemas.openxmlformats.org/drawingml/2006/main" w="0">
-            <a:noFill/>
-          </a:ln>
-        </p:spPr>
-        <p:txBody>
-          <a:bodyPr xmlns:a="http://schemas.openxmlformats.org/drawingml/2006/main" lIns="0" tIns="0" rIns="0" bIns="0"/>
-          <a:lstStyle xmlns:a="http://schemas.openxmlformats.org/drawingml/2006/main">
-            <a:defPPr>
-              <a:defRPr sz="1725">
-                <a:solidFill>
-                  <a:srgbClr val="1A1A1A"/>
-                </a:solidFill>
-              </a:defRPr>
-            </a:defPPr>
-            <a:lvl1pPr>
-              <a:defRPr sz="1725">
-                <a:solidFill>
-                  <a:srgbClr val="1A1A1A"/>
-                </a:solidFill>
-              </a:defRPr>
-            </a:lvl1pPr>
-            <a:lvl2pPr>
-              <a:defRPr sz="1725">
-                <a:solidFill>
-                  <a:srgbClr val="1A1A1A"/>
-                </a:solidFill>
-              </a:defRPr>
-            </a:lvl2pPr>
-            <a:lvl3pPr>
-              <a:defRPr sz="1725">
-                <a:solidFill>
-                  <a:srgbClr val="1A1A1A"/>
-                </a:solidFill>
-              </a:defRPr>
-            </a:lvl3pPr>
-            <a:lvl4pPr>
-              <a:defRPr sz="1725">
-                <a:solidFill>
-                  <a:srgbClr val="1A1A1A"/>
-                </a:solidFill>
-              </a:defRPr>
-            </a:lvl4pPr>
-            <a:lvl5pPr>
-              <a:defRPr sz="1725">
-                <a:solidFill>
-                  <a:srgbClr val="1A1A1A"/>
-                </a:solidFill>
-              </a:defRPr>
-            </a:lvl5pPr>
-            <a:lvl6pPr>
-              <a:defRPr sz="1725">
-                <a:solidFill>
-                  <a:srgbClr val="1A1A1A"/>
-                </a:solidFill>
-              </a:defRPr>
-            </a:lvl6pPr>
-            <a:lvl7pPr>
-              <a:defRPr sz="1725">
-                <a:solidFill>
-                  <a:srgbClr val="1A1A1A"/>
-                </a:solidFill>
-              </a:defRPr>
-            </a:lvl7pPr>
-            <a:lvl8pPr>
-              <a:defRPr sz="1725">
-                <a:solidFill>
-                  <a:srgbClr val="1A1A1A"/>
-                </a:solidFill>
-              </a:defRPr>
-            </a:lvl8pPr>
-            <a:lvl9pPr>
-              <a:defRPr sz="1725">
-                <a:solidFill>
-                  <a:srgbClr val="1A1A1A"/>
-                </a:solidFill>
-              </a:defRPr>
-            </a:lvl9pPr>
-          </a:lstStyle>
-          <a:p xmlns:a="http://schemas.openxmlformats.org/drawingml/2006/main">
-            <a:pPr>
-              <a:defRPr sz="1725">
-                <a:solidFill>
-                  <a:srgbClr val="1A1A1A"/>
-                </a:solidFill>
-              </a:defRPr>
-            </a:pPr>
-            <a:r>
-              <a:rPr sz="1725">
-                <a:solidFill>
-                  <a:srgbClr val="1A1A1A"/>
-                </a:solidFill>
-              </a:rPr>
-              <a:t>Example: the user asks for a policy email. A poisoned document tells the agent</a:t>
+              <a:t>An attacker hides instructions in a document the agent finds during that task.</a:t>
             </a:r>
           </a:p>
           <a:p xmlns:a="http://schemas.openxmlformats.org/drawingml/2006/main">
-            <a:pPr>
-              <a:defRPr sz="1725">
+            <a:pPr marL="190500" indent="-101600">
+              <a:spcAft>
+                <a:spcPts val="800"/>
+              </a:spcAft>
+              <a:buChar char="•"/>
+              <a:defRPr sz="1575">
                 <a:solidFill>
                   <a:srgbClr val="1A1A1A"/>
                 </a:solidFill>
               </a:defRPr>
             </a:pPr>
             <a:r>
-              <a:rPr sz="1725">
+              <a:rPr sz="1575">
                 <a:solidFill>
                   <a:srgbClr val="1A1A1A"/>
                 </a:solidFill>
               </a:rPr>
-              <a:t>to copy an attacker. Our goal is to stop that action while keeping the task useful.</a:t>
+              <a:t>Example: the user asks for a policy email, but the document tells the agent to copy an attacker.</a:t>
+            </a:r>
+          </a:p>
+          <a:p xmlns:a="http://schemas.openxmlformats.org/drawingml/2006/main">
+            <a:pPr marL="190500" indent="-101600">
+              <a:spcAft>
+                <a:spcPts val="800"/>
+              </a:spcAft>
+              <a:buChar char="•"/>
+              <a:defRPr sz="1575">
+                <a:solidFill>
+                  <a:srgbClr val="1A1A1A"/>
+                </a:solidFill>
+              </a:defRPr>
+            </a:pPr>
+            <a:r>
+              <a:rPr sz="1575">
+                <a:solidFill>
+                  <a:srgbClr val="1A1A1A"/>
+                </a:solidFill>
+              </a:rPr>
+              <a:t>We test whether our defenses stop the attacker’s action while the agent still helps the user.</a:t>
             </a:r>
           </a:p>
         </p:txBody>
       </p:sp>
       <p:graphicFrame>
         <p:nvGraphicFramePr>
-          <p:cNvPr id="13" name="">
+          <p:cNvPr id="12" name="">
             <a:extLst xmlns:a="http://schemas.openxmlformats.org/drawingml/2006/main">
               <a:ext uri="{FF2B5EF4-FFF2-40B4-BE49-F238E27FC236}">
-                <a16:creationId xmlns:a16="http://schemas.microsoft.com/office/drawing/2014/main" id="{DD0A1B8F-97B6-41D1-8417-61671A374950}"/>
+                <a16:creationId xmlns:a16="http://schemas.microsoft.com/office/drawing/2014/main" id="{CB96BB18-028D-4420-B275-38AA79FB5290}"/>
               </a:ext>
             </a:extLst>
           </p:cNvPr>
@@ -3392,7 +3307,7 @@
     </p:spTree>
     <p:extLst>
       <p:ext uri="{BB962C8B-B14F-4D97-AF65-F5344CB8AC3E}">
-        <p14:creationId xmlns:p14="http://schemas.microsoft.com/office/powerpoint/2010/main" val="1921065667"/>
+        <p14:creationId xmlns:p14="http://schemas.microsoft.com/office/powerpoint/2010/main" val="1101021732"/>
       </p:ext>
     </p:extLst>
   </p:cSld>
@@ -3423,7 +3338,7 @@
           <p:cNvPr id="2" name="Text 0">
             <a:extLst xmlns:a="http://schemas.openxmlformats.org/drawingml/2006/main">
               <a:ext uri="{FF2B5EF4-FFF2-40B4-BE49-F238E27FC236}">
-                <a16:creationId xmlns:a16="http://schemas.microsoft.com/office/drawing/2014/main" id="{8063E416-9C61-479A-9FE6-754AAFC47E2F}"/>
+                <a16:creationId xmlns:a16="http://schemas.microsoft.com/office/drawing/2014/main" id="{F9104FF5-962A-419D-A8A2-DAB095F6D551}"/>
               </a:ext>
             </a:extLst>
           </p:cNvPr>
@@ -3469,7 +3384,7 @@
           <p:cNvPr id="3" name="Text 1">
             <a:extLst xmlns:a="http://schemas.openxmlformats.org/drawingml/2006/main">
               <a:ext uri="{FF2B5EF4-FFF2-40B4-BE49-F238E27FC236}">
-                <a16:creationId xmlns:a16="http://schemas.microsoft.com/office/drawing/2014/main" id="{F2105F84-72F0-41BD-B80D-9B6CFFC10AAF}"/>
+                <a16:creationId xmlns:a16="http://schemas.microsoft.com/office/drawing/2014/main" id="{07273ACB-30C1-412C-866D-0C96238BF131}"/>
               </a:ext>
             </a:extLst>
           </p:cNvPr>
@@ -3515,7 +3430,7 @@
           <p:cNvPr id="4" name="Text 2">
             <a:extLst xmlns:a="http://schemas.openxmlformats.org/drawingml/2006/main">
               <a:ext uri="{FF2B5EF4-FFF2-40B4-BE49-F238E27FC236}">
-                <a16:creationId xmlns:a16="http://schemas.microsoft.com/office/drawing/2014/main" id="{68C58182-B9AA-449A-BB34-A07723BB8B05}"/>
+                <a16:creationId xmlns:a16="http://schemas.microsoft.com/office/drawing/2014/main" id="{DAE136B0-8515-4497-ACAD-99730A18BDD4}"/>
               </a:ext>
             </a:extLst>
           </p:cNvPr>
@@ -3561,7 +3476,7 @@
           <p:cNvPr id="5" name="Shape 3">
             <a:extLst xmlns:a="http://schemas.openxmlformats.org/drawingml/2006/main">
               <a:ext uri="{FF2B5EF4-FFF2-40B4-BE49-F238E27FC236}">
-                <a16:creationId xmlns:a16="http://schemas.microsoft.com/office/drawing/2014/main" id="{098C6221-EF02-43C5-98B5-915D9F1CC56B}"/>
+                <a16:creationId xmlns:a16="http://schemas.microsoft.com/office/drawing/2014/main" id="{BCA4D4AB-D4E9-46F3-813E-E7EBA51408CF}"/>
               </a:ext>
             </a:extLst>
           </p:cNvPr>
@@ -3588,7 +3503,7 @@
           <p:cNvPr id="6" name="Text 4">
             <a:extLst xmlns:a="http://schemas.openxmlformats.org/drawingml/2006/main">
               <a:ext uri="{FF2B5EF4-FFF2-40B4-BE49-F238E27FC236}">
-                <a16:creationId xmlns:a16="http://schemas.microsoft.com/office/drawing/2014/main" id="{05B36A27-0E05-4DEE-87AC-7C67543427C4}"/>
+                <a16:creationId xmlns:a16="http://schemas.microsoft.com/office/drawing/2014/main" id="{9A6191EF-0082-4893-BD06-267D5B6932F0}"/>
               </a:ext>
             </a:extLst>
           </p:cNvPr>
@@ -3623,7 +3538,7 @@
                 <a:ea typeface="Calibri"/>
                 <a:cs typeface="Calibri"/>
               </a:rPr>
-              <a:t>IMPLEMENTATION AND EVIDENCE</a:t>
+              <a:t>WORK COMPLETED SO FAR</a:t>
             </a:r>
             <a:endParaRPr sz="1100"/>
           </a:p>
@@ -3634,7 +3549,7 @@
           <p:cNvPr id="9" name="Text 7">
             <a:extLst xmlns:a="http://schemas.openxmlformats.org/drawingml/2006/main">
               <a:ext uri="{FF2B5EF4-FFF2-40B4-BE49-F238E27FC236}">
-                <a16:creationId xmlns:a16="http://schemas.microsoft.com/office/drawing/2014/main" id="{FFB8CF88-2D91-411C-958A-8BE85BF38B8D}"/>
+                <a16:creationId xmlns:a16="http://schemas.microsoft.com/office/drawing/2014/main" id="{0C864146-F26E-44A9-8000-7E2DAFBC7990}"/>
               </a:ext>
             </a:extLst>
           </p:cNvPr>
@@ -3680,7 +3595,7 @@
           <p:cNvPr id="10" name="Text 8">
             <a:extLst xmlns:a="http://schemas.openxmlformats.org/drawingml/2006/main">
               <a:ext uri="{FF2B5EF4-FFF2-40B4-BE49-F238E27FC236}">
-                <a16:creationId xmlns:a16="http://schemas.microsoft.com/office/drawing/2014/main" id="{B3ADDB78-2973-4983-953F-7E3576F4D0C7}"/>
+                <a16:creationId xmlns:a16="http://schemas.microsoft.com/office/drawing/2014/main" id="{A5F7880C-F964-4462-B3BA-55C7BE719364}"/>
               </a:ext>
             </a:extLst>
           </p:cNvPr>
@@ -3726,7 +3641,7 @@
           <p:cNvPr id="11" name="">
             <a:extLst xmlns:a="http://schemas.openxmlformats.org/drawingml/2006/main">
               <a:ext uri="{FF2B5EF4-FFF2-40B4-BE49-F238E27FC236}">
-                <a16:creationId xmlns:a16="http://schemas.microsoft.com/office/drawing/2014/main" id="{35872F6C-D03E-4ED2-9A5A-3A662673CE24}"/>
+                <a16:creationId xmlns:a16="http://schemas.microsoft.com/office/drawing/2014/main" id="{E51954BB-8252-43B0-AC47-EB3B637C287F}"/>
               </a:ext>
             </a:extLst>
           </p:cNvPr>
@@ -3738,7 +3653,7 @@
         <p:spPr>
           <a:xfrm xmlns:a="http://schemas.openxmlformats.org/drawingml/2006/main">
             <a:off x="960120" y="2009775"/>
-            <a:ext cx="10271474" cy="628650"/>
+            <a:ext cx="10271474" cy="1714500"/>
           </a:xfrm>
           <a:prstGeom xmlns:a="http://schemas.openxmlformats.org/drawingml/2006/main" prst="rect">
             <a:avLst/>
@@ -3749,7 +3664,9 @@
           </a:ln>
         </p:spPr>
         <p:txBody>
-          <a:bodyPr xmlns:a="http://schemas.openxmlformats.org/drawingml/2006/main" lIns="0" tIns="0" rIns="0" bIns="0"/>
+          <a:bodyPr xmlns:a="http://schemas.openxmlformats.org/drawingml/2006/main" lIns="0" tIns="0" rIns="0" bIns="0">
+            <a:noAutofit/>
+          </a:bodyPr>
           <a:lstStyle xmlns:a="http://schemas.openxmlformats.org/drawingml/2006/main">
             <a:defPPr>
               <a:defRPr sz="1575">
@@ -3823,7 +3740,11 @@
             </a:lvl9pPr>
           </a:lstStyle>
           <a:p xmlns:a="http://schemas.openxmlformats.org/drawingml/2006/main">
-            <a:pPr>
+            <a:pPr marL="190500" indent="-101600">
+              <a:spcAft>
+                <a:spcPts val="800"/>
+              </a:spcAft>
+              <a:buChar char="•"/>
               <a:defRPr sz="1575">
                 <a:solidFill>
                   <a:srgbClr val="1A1A1A"/>
@@ -3836,11 +3757,15 @@
                   <a:srgbClr val="1A1A1A"/>
                 </a:solidFill>
               </a:rPr>
-              <a:t>Built: an agent that chooses tools, attack tests, a detector and a recipient gate.</a:t>
+              <a:t>Built the agent, document search, contact lookup and simulated email, plus both defenses.</a:t>
             </a:r>
           </a:p>
           <a:p xmlns:a="http://schemas.openxmlformats.org/drawingml/2006/main">
-            <a:pPr>
+            <a:pPr marL="190500" indent="-101600">
+              <a:spcAft>
+                <a:spcPts val="800"/>
+              </a:spcAft>
+              <a:buChar char="•"/>
               <a:defRPr sz="1575">
                 <a:solidFill>
                   <a:srgbClr val="1A1A1A"/>
@@ -3853,114 +3778,15 @@
                   <a:srgbClr val="1A1A1A"/>
                 </a:solidFill>
               </a:rPr>
-              <a:t>Recent work: approval before protected live sends and a search startup fix.</a:t>
+              <a:t>Prepared 23 custom attacks and adapted 200 attacks from Microsoft’s LLMail-Inject dataset.</a:t>
             </a:r>
           </a:p>
-        </p:txBody>
-      </p:sp>
-      <p:sp>
-        <p:nvSpPr>
-          <p:cNvPr id="12" name="">
-            <a:extLst xmlns:a="http://schemas.openxmlformats.org/drawingml/2006/main">
-              <a:ext uri="{FF2B5EF4-FFF2-40B4-BE49-F238E27FC236}">
-                <a16:creationId xmlns:a16="http://schemas.microsoft.com/office/drawing/2014/main" id="{CFECC48F-DCC1-4B9A-9540-ABF20495E020}"/>
-              </a:ext>
-            </a:extLst>
-          </p:cNvPr>
-          <p:cNvSpPr>
-            <a:spLocks xmlns:a="http://schemas.openxmlformats.org/drawingml/2006/main" noGrp="1"/>
-          </p:cNvSpPr>
-          <p:nvPr/>
-        </p:nvSpPr>
-        <p:spPr>
-          <a:xfrm xmlns:a="http://schemas.openxmlformats.org/drawingml/2006/main">
-            <a:off x="960120" y="2771775"/>
-            <a:ext cx="10271474" cy="628650"/>
-          </a:xfrm>
-          <a:prstGeom xmlns:a="http://schemas.openxmlformats.org/drawingml/2006/main" prst="rect">
-            <a:avLst/>
-          </a:prstGeom>
-          <a:noFill xmlns:a="http://schemas.openxmlformats.org/drawingml/2006/main"/>
-          <a:ln xmlns:a="http://schemas.openxmlformats.org/drawingml/2006/main" w="0">
-            <a:noFill/>
-          </a:ln>
-        </p:spPr>
-        <p:txBody>
-          <a:bodyPr xmlns:a="http://schemas.openxmlformats.org/drawingml/2006/main" lIns="0" tIns="0" rIns="0" bIns="0"/>
-          <a:lstStyle xmlns:a="http://schemas.openxmlformats.org/drawingml/2006/main">
-            <a:defPPr>
-              <a:defRPr sz="1575">
-                <a:solidFill>
-                  <a:srgbClr val="1A1A1A"/>
-                </a:solidFill>
-              </a:defRPr>
-            </a:defPPr>
-            <a:lvl1pPr>
-              <a:defRPr sz="1575">
-                <a:solidFill>
-                  <a:srgbClr val="1A1A1A"/>
-                </a:solidFill>
-              </a:defRPr>
-            </a:lvl1pPr>
-            <a:lvl2pPr>
-              <a:defRPr sz="1575">
-                <a:solidFill>
-                  <a:srgbClr val="1A1A1A"/>
-                </a:solidFill>
-              </a:defRPr>
-            </a:lvl2pPr>
-            <a:lvl3pPr>
-              <a:defRPr sz="1575">
-                <a:solidFill>
-                  <a:srgbClr val="1A1A1A"/>
-                </a:solidFill>
-              </a:defRPr>
-            </a:lvl3pPr>
-            <a:lvl4pPr>
-              <a:defRPr sz="1575">
-                <a:solidFill>
-                  <a:srgbClr val="1A1A1A"/>
-                </a:solidFill>
-              </a:defRPr>
-            </a:lvl4pPr>
-            <a:lvl5pPr>
-              <a:defRPr sz="1575">
-                <a:solidFill>
-                  <a:srgbClr val="1A1A1A"/>
-                </a:solidFill>
-              </a:defRPr>
-            </a:lvl5pPr>
-            <a:lvl6pPr>
-              <a:defRPr sz="1575">
-                <a:solidFill>
-                  <a:srgbClr val="1A1A1A"/>
-                </a:solidFill>
-              </a:defRPr>
-            </a:lvl6pPr>
-            <a:lvl7pPr>
-              <a:defRPr sz="1575">
-                <a:solidFill>
-                  <a:srgbClr val="1A1A1A"/>
-                </a:solidFill>
-              </a:defRPr>
-            </a:lvl7pPr>
-            <a:lvl8pPr>
-              <a:defRPr sz="1575">
-                <a:solidFill>
-                  <a:srgbClr val="1A1A1A"/>
-                </a:solidFill>
-              </a:defRPr>
-            </a:lvl8pPr>
-            <a:lvl9pPr>
-              <a:defRPr sz="1575">
-                <a:solidFill>
-                  <a:srgbClr val="1A1A1A"/>
-                </a:solidFill>
-              </a:defRPr>
-            </a:lvl9pPr>
-          </a:lstStyle>
           <a:p xmlns:a="http://schemas.openxmlformats.org/drawingml/2006/main">
-            <a:pPr>
+            <a:pPr marL="190500" indent="-101600">
+              <a:spcAft>
+                <a:spcPts val="800"/>
+              </a:spcAft>
+              <a:buChar char="•"/>
               <a:defRPr sz="1575">
                 <a:solidFill>
                   <a:srgbClr val="1A1A1A"/>
@@ -3973,11 +3799,15 @@
                   <a:srgbClr val="1A1A1A"/>
                 </a:solidFill>
               </a:rPr>
-              <a:t>Data: 23 custom attacks + 200 adapted from Microsoft’s LLMail-Inject dataset.</a:t>
+              <a:t>All 256 software checks pass. The table uses 10 custom attacks and 7 normal tasks, 3 tries each.</a:t>
             </a:r>
           </a:p>
           <a:p xmlns:a="http://schemas.openxmlformats.org/drawingml/2006/main">
-            <a:pPr>
+            <a:pPr marL="190500" indent="-101600">
+              <a:spcAft>
+                <a:spcPts val="800"/>
+              </a:spcAft>
+              <a:buChar char="•"/>
               <a:defRPr sz="1575">
                 <a:solidFill>
                   <a:srgbClr val="1A1A1A"/>
@@ -3990,17 +3820,17 @@
                   <a:srgbClr val="1A1A1A"/>
                 </a:solidFill>
               </a:rPr>
-              <a:t>Checks: 256 software checks pass. Main experiment: 10 custom attacks, 3 tries each.</a:t>
+              <a:t>Added approval before protected live sends and fixed a search startup problem. Full live testing remains.</a:t>
             </a:r>
           </a:p>
         </p:txBody>
       </p:sp>
       <p:graphicFrame>
         <p:nvGraphicFramePr>
-          <p:cNvPr id="13" name="">
+          <p:cNvPr id="12" name="">
             <a:extLst xmlns:a="http://schemas.openxmlformats.org/drawingml/2006/main">
               <a:ext uri="{FF2B5EF4-FFF2-40B4-BE49-F238E27FC236}">
-                <a16:creationId xmlns:a16="http://schemas.microsoft.com/office/drawing/2014/main" id="{B5FC41C4-90E0-4520-9550-F69B7C8D1338}"/>
+                <a16:creationId xmlns:a16="http://schemas.microsoft.com/office/drawing/2014/main" id="{094241D4-5C5A-4DF6-AAF5-69538DD53F5D}"/>
               </a:ext>
             </a:extLst>
           </p:cNvPr>
@@ -4579,10 +4409,10 @@
       </p:graphicFrame>
       <p:sp>
         <p:nvSpPr>
-          <p:cNvPr id="14" name="">
+          <p:cNvPr id="13" name="">
             <a:extLst xmlns:a="http://schemas.openxmlformats.org/drawingml/2006/main">
               <a:ext uri="{FF2B5EF4-FFF2-40B4-BE49-F238E27FC236}">
-                <a16:creationId xmlns:a16="http://schemas.microsoft.com/office/drawing/2014/main" id="{806BA041-D84B-4B9A-874F-0BC37D55615E}"/>
+                <a16:creationId xmlns:a16="http://schemas.microsoft.com/office/drawing/2014/main" id="{F70B362E-9A19-4E4F-A43B-E1A56B4494A3}"/>
               </a:ext>
             </a:extLst>
           </p:cNvPr>
@@ -4717,7 +4547,7 @@
     </p:spTree>
     <p:extLst>
       <p:ext uri="{BB962C8B-B14F-4D97-AF65-F5344CB8AC3E}">
-        <p14:creationId xmlns:p14="http://schemas.microsoft.com/office/powerpoint/2010/main" val="1815527912"/>
+        <p14:creationId xmlns:p14="http://schemas.microsoft.com/office/powerpoint/2010/main" val="1911586050"/>
       </p:ext>
     </p:extLst>
   </p:cSld>
@@ -4748,7 +4578,7 @@
           <p:cNvPr id="2" name="Text 0">
             <a:extLst xmlns:a="http://schemas.openxmlformats.org/drawingml/2006/main">
               <a:ext uri="{FF2B5EF4-FFF2-40B4-BE49-F238E27FC236}">
-                <a16:creationId xmlns:a16="http://schemas.microsoft.com/office/drawing/2014/main" id="{0C8DCF2D-86F6-4EA2-A0E6-91788646830A}"/>
+                <a16:creationId xmlns:a16="http://schemas.microsoft.com/office/drawing/2014/main" id="{ED1E8A83-5071-47E9-8B05-DD9E04C12652}"/>
               </a:ext>
             </a:extLst>
           </p:cNvPr>
@@ -4794,7 +4624,7 @@
           <p:cNvPr id="3" name="Text 1">
             <a:extLst xmlns:a="http://schemas.openxmlformats.org/drawingml/2006/main">
               <a:ext uri="{FF2B5EF4-FFF2-40B4-BE49-F238E27FC236}">
-                <a16:creationId xmlns:a16="http://schemas.microsoft.com/office/drawing/2014/main" id="{6ACEA33B-0445-4D72-BEED-5A608BD51F28}"/>
+                <a16:creationId xmlns:a16="http://schemas.microsoft.com/office/drawing/2014/main" id="{FAABD296-6E0F-444F-8231-7D90113F5D83}"/>
               </a:ext>
             </a:extLst>
           </p:cNvPr>
@@ -4840,7 +4670,7 @@
           <p:cNvPr id="4" name="Text 2">
             <a:extLst xmlns:a="http://schemas.openxmlformats.org/drawingml/2006/main">
               <a:ext uri="{FF2B5EF4-FFF2-40B4-BE49-F238E27FC236}">
-                <a16:creationId xmlns:a16="http://schemas.microsoft.com/office/drawing/2014/main" id="{0BC99978-A4A7-4D5C-9009-EB538AE070DB}"/>
+                <a16:creationId xmlns:a16="http://schemas.microsoft.com/office/drawing/2014/main" id="{BFA9E32A-1E1C-4FD7-B396-65B7449D72AA}"/>
               </a:ext>
             </a:extLst>
           </p:cNvPr>
@@ -4886,7 +4716,7 @@
           <p:cNvPr id="5" name="Shape 3">
             <a:extLst xmlns:a="http://schemas.openxmlformats.org/drawingml/2006/main">
               <a:ext uri="{FF2B5EF4-FFF2-40B4-BE49-F238E27FC236}">
-                <a16:creationId xmlns:a16="http://schemas.microsoft.com/office/drawing/2014/main" id="{A83256B2-19DB-4E66-9C2A-2A222D7B7D85}"/>
+                <a16:creationId xmlns:a16="http://schemas.microsoft.com/office/drawing/2014/main" id="{A5D7013A-147A-4564-AD6B-CFAABF1F7D92}"/>
               </a:ext>
             </a:extLst>
           </p:cNvPr>
@@ -4913,7 +4743,7 @@
           <p:cNvPr id="6" name="Text 4">
             <a:extLst xmlns:a="http://schemas.openxmlformats.org/drawingml/2006/main">
               <a:ext uri="{FF2B5EF4-FFF2-40B4-BE49-F238E27FC236}">
-                <a16:creationId xmlns:a16="http://schemas.microsoft.com/office/drawing/2014/main" id="{1301D2A5-236A-4F59-805A-978C7FB97A7D}"/>
+                <a16:creationId xmlns:a16="http://schemas.microsoft.com/office/drawing/2014/main" id="{2BDC5881-A86E-4744-B2C9-3DE0F74C3D43}"/>
               </a:ext>
             </a:extLst>
           </p:cNvPr>
@@ -4948,7 +4778,7 @@
                 <a:ea typeface="Calibri"/>
                 <a:cs typeface="Calibri"/>
               </a:rPr>
-              <a:t>TARGETS AND LIMITATIONS</a:t>
+              <a:t>GOALS AND FINAL DEMONSTRATION</a:t>
             </a:r>
             <a:endParaRPr sz="1100"/>
           </a:p>
@@ -4959,7 +4789,7 @@
           <p:cNvPr id="9" name="Text 7">
             <a:extLst xmlns:a="http://schemas.openxmlformats.org/drawingml/2006/main">
               <a:ext uri="{FF2B5EF4-FFF2-40B4-BE49-F238E27FC236}">
-                <a16:creationId xmlns:a16="http://schemas.microsoft.com/office/drawing/2014/main" id="{53EEEDB1-74EA-4077-8219-68D9CA087E8E}"/>
+                <a16:creationId xmlns:a16="http://schemas.microsoft.com/office/drawing/2014/main" id="{70EBA831-2BE7-4DE6-9A4E-6F7607F78AB7}"/>
               </a:ext>
             </a:extLst>
           </p:cNvPr>
@@ -5005,7 +4835,7 @@
           <p:cNvPr id="10" name="Text 8">
             <a:extLst xmlns:a="http://schemas.openxmlformats.org/drawingml/2006/main">
               <a:ext uri="{FF2B5EF4-FFF2-40B4-BE49-F238E27FC236}">
-                <a16:creationId xmlns:a16="http://schemas.microsoft.com/office/drawing/2014/main" id="{AB5A9C4F-E110-40F5-931F-30C01721E001}"/>
+                <a16:creationId xmlns:a16="http://schemas.microsoft.com/office/drawing/2014/main" id="{EC4CE369-B777-4CB3-8AC6-7E90F852C5B7}"/>
               </a:ext>
             </a:extLst>
           </p:cNvPr>
@@ -5051,7 +4881,7 @@
           <p:cNvPr id="11" name="">
             <a:extLst xmlns:a="http://schemas.openxmlformats.org/drawingml/2006/main">
               <a:ext uri="{FF2B5EF4-FFF2-40B4-BE49-F238E27FC236}">
-                <a16:creationId xmlns:a16="http://schemas.microsoft.com/office/drawing/2014/main" id="{E1EC82FB-C717-41ED-90C2-A965366A4A53}"/>
+                <a16:creationId xmlns:a16="http://schemas.microsoft.com/office/drawing/2014/main" id="{F04D8DA5-D898-4CBA-B382-9558BCF4B498}"/>
               </a:ext>
             </a:extLst>
           </p:cNvPr>
@@ -5063,7 +4893,7 @@
         <p:spPr>
           <a:xfrm xmlns:a="http://schemas.openxmlformats.org/drawingml/2006/main">
             <a:off x="960120" y="2009775"/>
-            <a:ext cx="10271474" cy="704850"/>
+            <a:ext cx="10271474" cy="1714500"/>
           </a:xfrm>
           <a:prstGeom xmlns:a="http://schemas.openxmlformats.org/drawingml/2006/main" prst="rect">
             <a:avLst/>
@@ -5074,73 +4904,75 @@
           </a:ln>
         </p:spPr>
         <p:txBody>
-          <a:bodyPr xmlns:a="http://schemas.openxmlformats.org/drawingml/2006/main" lIns="0" tIns="0" rIns="0" bIns="0"/>
+          <a:bodyPr xmlns:a="http://schemas.openxmlformats.org/drawingml/2006/main" lIns="0" tIns="0" rIns="0" bIns="0">
+            <a:noAutofit/>
+          </a:bodyPr>
           <a:lstStyle xmlns:a="http://schemas.openxmlformats.org/drawingml/2006/main">
             <a:defPPr>
-              <a:defRPr sz="1725">
+              <a:defRPr sz="1575">
                 <a:solidFill>
                   <a:srgbClr val="1A1A1A"/>
                 </a:solidFill>
               </a:defRPr>
             </a:defPPr>
             <a:lvl1pPr>
-              <a:defRPr sz="1725">
+              <a:defRPr sz="1575">
                 <a:solidFill>
                   <a:srgbClr val="1A1A1A"/>
                 </a:solidFill>
               </a:defRPr>
             </a:lvl1pPr>
             <a:lvl2pPr>
-              <a:defRPr sz="1725">
+              <a:defRPr sz="1575">
                 <a:solidFill>
                   <a:srgbClr val="1A1A1A"/>
                 </a:solidFill>
               </a:defRPr>
             </a:lvl2pPr>
             <a:lvl3pPr>
-              <a:defRPr sz="1725">
+              <a:defRPr sz="1575">
                 <a:solidFill>
                   <a:srgbClr val="1A1A1A"/>
                 </a:solidFill>
               </a:defRPr>
             </a:lvl3pPr>
             <a:lvl4pPr>
-              <a:defRPr sz="1725">
+              <a:defRPr sz="1575">
                 <a:solidFill>
                   <a:srgbClr val="1A1A1A"/>
                 </a:solidFill>
               </a:defRPr>
             </a:lvl4pPr>
             <a:lvl5pPr>
-              <a:defRPr sz="1725">
+              <a:defRPr sz="1575">
                 <a:solidFill>
                   <a:srgbClr val="1A1A1A"/>
                 </a:solidFill>
               </a:defRPr>
             </a:lvl5pPr>
             <a:lvl6pPr>
-              <a:defRPr sz="1725">
+              <a:defRPr sz="1575">
                 <a:solidFill>
                   <a:srgbClr val="1A1A1A"/>
                 </a:solidFill>
               </a:defRPr>
             </a:lvl6pPr>
             <a:lvl7pPr>
-              <a:defRPr sz="1725">
+              <a:defRPr sz="1575">
                 <a:solidFill>
                   <a:srgbClr val="1A1A1A"/>
                 </a:solidFill>
               </a:defRPr>
             </a:lvl7pPr>
             <a:lvl8pPr>
-              <a:defRPr sz="1725">
+              <a:defRPr sz="1575">
                 <a:solidFill>
                   <a:srgbClr val="1A1A1A"/>
                 </a:solidFill>
               </a:defRPr>
             </a:lvl8pPr>
             <a:lvl9pPr>
-              <a:defRPr sz="1725">
+              <a:defRPr sz="1575">
                 <a:solidFill>
                   <a:srgbClr val="1A1A1A"/>
                 </a:solidFill>
@@ -5148,184 +4980,97 @@
             </a:lvl9pPr>
           </a:lstStyle>
           <a:p xmlns:a="http://schemas.openxmlformats.org/drawingml/2006/main">
-            <a:pPr>
-              <a:defRPr sz="1725">
+            <a:pPr marL="190500" indent="-101600">
+              <a:spcAft>
+                <a:spcPts val="800"/>
+              </a:spcAft>
+              <a:buChar char="•"/>
+              <a:defRPr sz="1575">
                 <a:solidFill>
                   <a:srgbClr val="1A1A1A"/>
                 </a:solidFill>
               </a:defRPr>
             </a:pPr>
             <a:r>
-              <a:rPr sz="1725">
+              <a:rPr sz="1575">
                 <a:solidFill>
                   <a:srgbClr val="1A1A1A"/>
                 </a:solidFill>
               </a:rPr>
-              <a:t>The goal stays the same: fewer attacker-directed actions while the agent</a:t>
+              <a:t>Our goal remains to reduce attacker control while keeping the agent useful for normal tasks.</a:t>
             </a:r>
           </a:p>
           <a:p xmlns:a="http://schemas.openxmlformats.org/drawingml/2006/main">
-            <a:pPr>
-              <a:defRPr sz="1725">
+            <a:pPr marL="190500" indent="-101600">
+              <a:spcAft>
+                <a:spcPts val="800"/>
+              </a:spcAft>
+              <a:buChar char="•"/>
+              <a:defRPr sz="1575">
                 <a:solidFill>
                   <a:srgbClr val="1A1A1A"/>
                 </a:solidFill>
               </a:defRPr>
             </a:pPr>
             <a:r>
-              <a:rPr sz="1725">
+              <a:rPr sz="1575">
                 <a:solidFill>
                   <a:srgbClr val="1A1A1A"/>
                 </a:solidFill>
               </a:rPr>
-              <a:t>continues to help the user. Email is our controlled test case.</a:t>
-            </a:r>
-          </a:p>
-        </p:txBody>
-      </p:sp>
-      <p:sp>
-        <p:nvSpPr>
-          <p:cNvPr id="12" name="">
-            <a:extLst xmlns:a="http://schemas.openxmlformats.org/drawingml/2006/main">
-              <a:ext uri="{FF2B5EF4-FFF2-40B4-BE49-F238E27FC236}">
-                <a16:creationId xmlns:a16="http://schemas.microsoft.com/office/drawing/2014/main" id="{563DC31C-BDA8-4869-A0CA-7D2D02224E5B}"/>
-              </a:ext>
-            </a:extLst>
-          </p:cNvPr>
-          <p:cNvSpPr>
-            <a:spLocks xmlns:a="http://schemas.openxmlformats.org/drawingml/2006/main" noGrp="1"/>
-          </p:cNvSpPr>
-          <p:nvPr/>
-        </p:nvSpPr>
-        <p:spPr>
-          <a:xfrm xmlns:a="http://schemas.openxmlformats.org/drawingml/2006/main">
-            <a:off x="960120" y="2895600"/>
-            <a:ext cx="10271474" cy="666750"/>
-          </a:xfrm>
-          <a:prstGeom xmlns:a="http://schemas.openxmlformats.org/drawingml/2006/main" prst="rect">
-            <a:avLst/>
-          </a:prstGeom>
-          <a:noFill xmlns:a="http://schemas.openxmlformats.org/drawingml/2006/main"/>
-          <a:ln xmlns:a="http://schemas.openxmlformats.org/drawingml/2006/main" w="0">
-            <a:noFill/>
-          </a:ln>
-        </p:spPr>
-        <p:txBody>
-          <a:bodyPr xmlns:a="http://schemas.openxmlformats.org/drawingml/2006/main" lIns="0" tIns="0" rIns="0" bIns="0"/>
-          <a:lstStyle xmlns:a="http://schemas.openxmlformats.org/drawingml/2006/main">
-            <a:defPPr>
-              <a:defRPr sz="1650">
-                <a:solidFill>
-                  <a:srgbClr val="1A1A1A"/>
-                </a:solidFill>
-              </a:defRPr>
-            </a:defPPr>
-            <a:lvl1pPr>
-              <a:defRPr sz="1650">
-                <a:solidFill>
-                  <a:srgbClr val="1A1A1A"/>
-                </a:solidFill>
-              </a:defRPr>
-            </a:lvl1pPr>
-            <a:lvl2pPr>
-              <a:defRPr sz="1650">
-                <a:solidFill>
-                  <a:srgbClr val="1A1A1A"/>
-                </a:solidFill>
-              </a:defRPr>
-            </a:lvl2pPr>
-            <a:lvl3pPr>
-              <a:defRPr sz="1650">
-                <a:solidFill>
-                  <a:srgbClr val="1A1A1A"/>
-                </a:solidFill>
-              </a:defRPr>
-            </a:lvl3pPr>
-            <a:lvl4pPr>
-              <a:defRPr sz="1650">
-                <a:solidFill>
-                  <a:srgbClr val="1A1A1A"/>
-                </a:solidFill>
-              </a:defRPr>
-            </a:lvl4pPr>
-            <a:lvl5pPr>
-              <a:defRPr sz="1650">
-                <a:solidFill>
-                  <a:srgbClr val="1A1A1A"/>
-                </a:solidFill>
-              </a:defRPr>
-            </a:lvl5pPr>
-            <a:lvl6pPr>
-              <a:defRPr sz="1650">
-                <a:solidFill>
-                  <a:srgbClr val="1A1A1A"/>
-                </a:solidFill>
-              </a:defRPr>
-            </a:lvl6pPr>
-            <a:lvl7pPr>
-              <a:defRPr sz="1650">
-                <a:solidFill>
-                  <a:srgbClr val="1A1A1A"/>
-                </a:solidFill>
-              </a:defRPr>
-            </a:lvl7pPr>
-            <a:lvl8pPr>
-              <a:defRPr sz="1650">
-                <a:solidFill>
-                  <a:srgbClr val="1A1A1A"/>
-                </a:solidFill>
-              </a:defRPr>
-            </a:lvl8pPr>
-            <a:lvl9pPr>
-              <a:defRPr sz="1650">
-                <a:solidFill>
-                  <a:srgbClr val="1A1A1A"/>
-                </a:solidFill>
-              </a:defRPr>
-            </a:lvl9pPr>
-          </a:lstStyle>
-          <a:p xmlns:a="http://schemas.openxmlformats.org/drawingml/2006/main">
-            <a:pPr>
-              <a:defRPr sz="1650">
-                <a:solidFill>
-                  <a:srgbClr val="1A1A1A"/>
-                </a:solidFill>
-              </a:defRPr>
-            </a:pPr>
-            <a:r>
-              <a:rPr sz="1650">
-                <a:solidFill>
-                  <a:srgbClr val="1A1A1A"/>
-                </a:solidFill>
-              </a:rPr>
-              <a:t>Our combined target is below 5% attack success. The current main result is 10%.</a:t>
+              <a:t>We aim for less than 5% attack success with both defenses. The early result is 10%.</a:t>
             </a:r>
           </a:p>
           <a:p xmlns:a="http://schemas.openxmlformats.org/drawingml/2006/main">
-            <a:pPr>
-              <a:defRPr sz="1650">
+            <a:pPr marL="190500" indent="-101600">
+              <a:spcAft>
+                <a:spcPts val="800"/>
+              </a:spcAft>
+              <a:buChar char="•"/>
+              <a:defRPr sz="1575">
                 <a:solidFill>
                   <a:srgbClr val="1A1A1A"/>
                 </a:solidFill>
               </a:defRPr>
             </a:pPr>
             <a:r>
-              <a:rPr sz="1650">
+              <a:rPr sz="1575">
                 <a:solidFill>
                   <a:srgbClr val="1A1A1A"/>
                 </a:solidFill>
               </a:rPr>
-              <a:t>The latest approval step still needs a full attack evaluation.</a:t>
+              <a:t>The final demo will compare the same document attack with and without defenses.</a:t>
+            </a:r>
+          </a:p>
+          <a:p xmlns:a="http://schemas.openxmlformats.org/drawingml/2006/main">
+            <a:pPr marL="190500" indent="-101600">
+              <a:spcAft>
+                <a:spcPts val="800"/>
+              </a:spcAft>
+              <a:buChar char="•"/>
+              <a:defRPr sz="1575">
+                <a:solidFill>
+                  <a:srgbClr val="1A1A1A"/>
+                </a:solidFill>
+              </a:defRPr>
+            </a:pPr>
+            <a:r>
+              <a:rPr sz="1575">
+                <a:solidFill>
+                  <a:srgbClr val="1A1A1A"/>
+                </a:solidFill>
+              </a:rPr>
+              <a:t>We added user approval for protected email sends. This adds human control and still needs attack testing.</a:t>
             </a:r>
           </a:p>
         </p:txBody>
       </p:sp>
       <p:graphicFrame>
         <p:nvGraphicFramePr>
-          <p:cNvPr id="13" name="">
+          <p:cNvPr id="12" name="">
             <a:extLst xmlns:a="http://schemas.openxmlformats.org/drawingml/2006/main">
               <a:ext uri="{FF2B5EF4-FFF2-40B4-BE49-F238E27FC236}">
-                <a16:creationId xmlns:a16="http://schemas.microsoft.com/office/drawing/2014/main" id="{B35B831E-4A21-4EE0-B040-B3EDB9F36CE8}"/>
+                <a16:creationId xmlns:a16="http://schemas.microsoft.com/office/drawing/2014/main" id="{62AB6655-1E6D-4600-A34E-4EDA32296181}"/>
               </a:ext>
             </a:extLst>
           </p:cNvPr>
@@ -5733,7 +5478,7 @@
     </p:spTree>
     <p:extLst>
       <p:ext uri="{BB962C8B-B14F-4D97-AF65-F5344CB8AC3E}">
-        <p14:creationId xmlns:p14="http://schemas.microsoft.com/office/powerpoint/2010/main" val="1765548270"/>
+        <p14:creationId xmlns:p14="http://schemas.microsoft.com/office/powerpoint/2010/main" val="1768087217"/>
       </p:ext>
     </p:extLst>
   </p:cSld>
@@ -5764,7 +5509,7 @@
           <p:cNvPr id="2" name="Text 0">
             <a:extLst xmlns:a="http://schemas.openxmlformats.org/drawingml/2006/main">
               <a:ext uri="{FF2B5EF4-FFF2-40B4-BE49-F238E27FC236}">
-                <a16:creationId xmlns:a16="http://schemas.microsoft.com/office/drawing/2014/main" id="{A4CD31EA-4110-4269-9353-E87A375270E6}"/>
+                <a16:creationId xmlns:a16="http://schemas.microsoft.com/office/drawing/2014/main" id="{6EB327EA-AE74-43DD-B4E3-FE1E1F2F06AA}"/>
               </a:ext>
             </a:extLst>
           </p:cNvPr>
@@ -5810,7 +5555,7 @@
           <p:cNvPr id="3" name="Text 1">
             <a:extLst xmlns:a="http://schemas.openxmlformats.org/drawingml/2006/main">
               <a:ext uri="{FF2B5EF4-FFF2-40B4-BE49-F238E27FC236}">
-                <a16:creationId xmlns:a16="http://schemas.microsoft.com/office/drawing/2014/main" id="{BEDEC444-822A-49B7-89FD-78607E2C726B}"/>
+                <a16:creationId xmlns:a16="http://schemas.microsoft.com/office/drawing/2014/main" id="{23941D9B-3262-4072-B042-CA11ED128E2D}"/>
               </a:ext>
             </a:extLst>
           </p:cNvPr>
@@ -5856,7 +5601,7 @@
           <p:cNvPr id="4" name="Text 2">
             <a:extLst xmlns:a="http://schemas.openxmlformats.org/drawingml/2006/main">
               <a:ext uri="{FF2B5EF4-FFF2-40B4-BE49-F238E27FC236}">
-                <a16:creationId xmlns:a16="http://schemas.microsoft.com/office/drawing/2014/main" id="{11821CE6-B82D-4C25-A5EB-4F338A661097}"/>
+                <a16:creationId xmlns:a16="http://schemas.microsoft.com/office/drawing/2014/main" id="{658F4FD1-C41F-4962-99D7-82A31EDE3B42}"/>
               </a:ext>
             </a:extLst>
           </p:cNvPr>
@@ -5902,7 +5647,7 @@
           <p:cNvPr id="5" name="Shape 3">
             <a:extLst xmlns:a="http://schemas.openxmlformats.org/drawingml/2006/main">
               <a:ext uri="{FF2B5EF4-FFF2-40B4-BE49-F238E27FC236}">
-                <a16:creationId xmlns:a16="http://schemas.microsoft.com/office/drawing/2014/main" id="{3B54EFC9-384A-4495-A8E1-A04A748F6C2F}"/>
+                <a16:creationId xmlns:a16="http://schemas.microsoft.com/office/drawing/2014/main" id="{EAD0ABD1-13FE-44C0-AA65-463C3102693A}"/>
               </a:ext>
             </a:extLst>
           </p:cNvPr>
@@ -5929,7 +5674,7 @@
           <p:cNvPr id="6" name="Text 4">
             <a:extLst xmlns:a="http://schemas.openxmlformats.org/drawingml/2006/main">
               <a:ext uri="{FF2B5EF4-FFF2-40B4-BE49-F238E27FC236}">
-                <a16:creationId xmlns:a16="http://schemas.microsoft.com/office/drawing/2014/main" id="{DCD31AFE-1B38-4272-A89B-E1EDC78A9CE9}"/>
+                <a16:creationId xmlns:a16="http://schemas.microsoft.com/office/drawing/2014/main" id="{4CEA5CED-F80B-4812-8793-7F91D297F553}"/>
               </a:ext>
             </a:extLst>
           </p:cNvPr>
@@ -5964,7 +5709,7 @@
                 <a:ea typeface="Calibri"/>
                 <a:cs typeface="Calibri"/>
               </a:rPr>
-              <a:t>REVISED PLAN</a:t>
+              <a:t>COMPLETED WORK AND NEXT STEPS</a:t>
             </a:r>
             <a:endParaRPr sz="1100"/>
           </a:p>
@@ -5975,7 +5720,7 @@
           <p:cNvPr id="11" name="Table 0">
             <a:extLst xmlns:a="http://schemas.openxmlformats.org/drawingml/2006/main">
               <a:ext uri="{FF2B5EF4-FFF2-40B4-BE49-F238E27FC236}">
-                <a16:creationId xmlns:a16="http://schemas.microsoft.com/office/drawing/2014/main" id="{398AC651-363B-460B-A126-C0940CD0D35E}"/>
+                <a16:creationId xmlns:a16="http://schemas.microsoft.com/office/drawing/2014/main" id="{DC5E5405-3AB9-4282-B4BE-42D93B36DB1E}"/>
               </a:ext>
             </a:extLst>
           </p:cNvPr>
@@ -7427,7 +7172,7 @@
           <p:cNvPr id="9" name="Text 6">
             <a:extLst xmlns:a="http://schemas.openxmlformats.org/drawingml/2006/main">
               <a:ext uri="{FF2B5EF4-FFF2-40B4-BE49-F238E27FC236}">
-                <a16:creationId xmlns:a16="http://schemas.microsoft.com/office/drawing/2014/main" id="{4D77B4A3-9196-44B3-B070-1814DAB92956}"/>
+                <a16:creationId xmlns:a16="http://schemas.microsoft.com/office/drawing/2014/main" id="{D8D03489-2F3B-4453-8561-D030811A720E}"/>
               </a:ext>
             </a:extLst>
           </p:cNvPr>
@@ -7473,7 +7218,7 @@
           <p:cNvPr id="10" name="Text 7">
             <a:extLst xmlns:a="http://schemas.openxmlformats.org/drawingml/2006/main">
               <a:ext uri="{FF2B5EF4-FFF2-40B4-BE49-F238E27FC236}">
-                <a16:creationId xmlns:a16="http://schemas.microsoft.com/office/drawing/2014/main" id="{F2B11FB7-F81B-4E1C-A044-8BF5126BCA53}"/>
+                <a16:creationId xmlns:a16="http://schemas.microsoft.com/office/drawing/2014/main" id="{96F8AE3D-63F4-4D4B-A09C-32AE7F673C16}"/>
               </a:ext>
             </a:extLst>
           </p:cNvPr>
@@ -7519,7 +7264,7 @@
           <p:cNvPr id="12" name="">
             <a:extLst xmlns:a="http://schemas.openxmlformats.org/drawingml/2006/main">
               <a:ext uri="{FF2B5EF4-FFF2-40B4-BE49-F238E27FC236}">
-                <a16:creationId xmlns:a16="http://schemas.microsoft.com/office/drawing/2014/main" id="{4728C76D-B732-4C7C-8E9A-AF3CD68D6076}"/>
+                <a16:creationId xmlns:a16="http://schemas.microsoft.com/office/drawing/2014/main" id="{B4E0C080-21BA-4C79-BE12-D7083435B59C}"/>
               </a:ext>
             </a:extLst>
           </p:cNvPr>
@@ -7531,7 +7276,7 @@
         <p:spPr>
           <a:xfrm xmlns:a="http://schemas.openxmlformats.org/drawingml/2006/main">
             <a:off x="960120" y="2009775"/>
-            <a:ext cx="10271474" cy="647700"/>
+            <a:ext cx="10271474" cy="1714500"/>
           </a:xfrm>
           <a:prstGeom xmlns:a="http://schemas.openxmlformats.org/drawingml/2006/main" prst="rect">
             <a:avLst/>
@@ -7542,73 +7287,75 @@
           </a:ln>
         </p:spPr>
         <p:txBody>
-          <a:bodyPr xmlns:a="http://schemas.openxmlformats.org/drawingml/2006/main" lIns="0" tIns="0" rIns="0" bIns="0"/>
+          <a:bodyPr xmlns:a="http://schemas.openxmlformats.org/drawingml/2006/main" lIns="0" tIns="0" rIns="0" bIns="0">
+            <a:noAutofit/>
+          </a:bodyPr>
           <a:lstStyle xmlns:a="http://schemas.openxmlformats.org/drawingml/2006/main">
             <a:defPPr>
-              <a:defRPr sz="1650">
+              <a:defRPr sz="1575">
                 <a:solidFill>
                   <a:srgbClr val="1A1A1A"/>
                 </a:solidFill>
               </a:defRPr>
             </a:defPPr>
             <a:lvl1pPr>
-              <a:defRPr sz="1650">
+              <a:defRPr sz="1575">
                 <a:solidFill>
                   <a:srgbClr val="1A1A1A"/>
                 </a:solidFill>
               </a:defRPr>
             </a:lvl1pPr>
             <a:lvl2pPr>
-              <a:defRPr sz="1650">
+              <a:defRPr sz="1575">
                 <a:solidFill>
                   <a:srgbClr val="1A1A1A"/>
                 </a:solidFill>
               </a:defRPr>
             </a:lvl2pPr>
             <a:lvl3pPr>
-              <a:defRPr sz="1650">
+              <a:defRPr sz="1575">
                 <a:solidFill>
                   <a:srgbClr val="1A1A1A"/>
                 </a:solidFill>
               </a:defRPr>
             </a:lvl3pPr>
             <a:lvl4pPr>
-              <a:defRPr sz="1650">
+              <a:defRPr sz="1575">
                 <a:solidFill>
                   <a:srgbClr val="1A1A1A"/>
                 </a:solidFill>
               </a:defRPr>
             </a:lvl4pPr>
             <a:lvl5pPr>
-              <a:defRPr sz="1650">
+              <a:defRPr sz="1575">
                 <a:solidFill>
                   <a:srgbClr val="1A1A1A"/>
                 </a:solidFill>
               </a:defRPr>
             </a:lvl5pPr>
             <a:lvl6pPr>
-              <a:defRPr sz="1650">
+              <a:defRPr sz="1575">
                 <a:solidFill>
                   <a:srgbClr val="1A1A1A"/>
                 </a:solidFill>
               </a:defRPr>
             </a:lvl6pPr>
             <a:lvl7pPr>
-              <a:defRPr sz="1650">
+              <a:defRPr sz="1575">
                 <a:solidFill>
                   <a:srgbClr val="1A1A1A"/>
                 </a:solidFill>
               </a:defRPr>
             </a:lvl7pPr>
             <a:lvl8pPr>
-              <a:defRPr sz="1650">
+              <a:defRPr sz="1575">
                 <a:solidFill>
                   <a:srgbClr val="1A1A1A"/>
                 </a:solidFill>
               </a:defRPr>
             </a:lvl8pPr>
             <a:lvl9pPr>
-              <a:defRPr sz="1650">
+              <a:defRPr sz="1575">
                 <a:solidFill>
                   <a:srgbClr val="1A1A1A"/>
                 </a:solidFill>
@@ -7616,144 +7363,32 @@
             </a:lvl9pPr>
           </a:lstStyle>
           <a:p xmlns:a="http://schemas.openxmlformats.org/drawingml/2006/main">
-            <a:pPr>
-              <a:defRPr sz="1650">
+            <a:pPr marL="190500" indent="-101600">
+              <a:spcAft>
+                <a:spcPts val="800"/>
+              </a:spcAft>
+              <a:buChar char="•"/>
+              <a:defRPr sz="1575">
                 <a:solidFill>
                   <a:srgbClr val="1A1A1A"/>
                 </a:solidFill>
               </a:defRPr>
             </a:pPr>
             <a:r>
-              <a:rPr sz="1650">
+              <a:rPr sz="1575">
                 <a:solidFill>
                   <a:srgbClr val="1A1A1A"/>
                 </a:solidFill>
               </a:rPr>
-              <a:t>Completed: the core agent, two defenses and preliminary experiments.</a:t>
+              <a:t>Completed the core agent, both defenses, attack collection and early experiments.</a:t>
             </a:r>
           </a:p>
           <a:p xmlns:a="http://schemas.openxmlformats.org/drawingml/2006/main">
-            <a:pPr>
-              <a:defRPr sz="1650">
-                <a:solidFill>
-                  <a:srgbClr val="1A1A1A"/>
-                </a:solidFill>
-              </a:defRPr>
-            </a:pPr>
-            <a:r>
-              <a:rPr sz="1650">
-                <a:solidFill>
-                  <a:srgbClr val="1A1A1A"/>
-                </a:solidFill>
-              </a:rPr>
-              <a:t>Added: live email approval and local reliability checks.</a:t>
-            </a:r>
-          </a:p>
-        </p:txBody>
-      </p:sp>
-      <p:sp>
-        <p:nvSpPr>
-          <p:cNvPr id="13" name="">
-            <a:extLst xmlns:a="http://schemas.openxmlformats.org/drawingml/2006/main">
-              <a:ext uri="{FF2B5EF4-FFF2-40B4-BE49-F238E27FC236}">
-                <a16:creationId xmlns:a16="http://schemas.microsoft.com/office/drawing/2014/main" id="{330BE829-43F9-4F41-9C21-132A92AEECDE}"/>
-              </a:ext>
-            </a:extLst>
-          </p:cNvPr>
-          <p:cNvSpPr>
-            <a:spLocks xmlns:a="http://schemas.openxmlformats.org/drawingml/2006/main" noGrp="1"/>
-          </p:cNvSpPr>
-          <p:nvPr/>
-        </p:nvSpPr>
-        <p:spPr>
-          <a:xfrm xmlns:a="http://schemas.openxmlformats.org/drawingml/2006/main">
-            <a:off x="960120" y="2857500"/>
-            <a:ext cx="10271474" cy="647700"/>
-          </a:xfrm>
-          <a:prstGeom xmlns:a="http://schemas.openxmlformats.org/drawingml/2006/main" prst="rect">
-            <a:avLst/>
-          </a:prstGeom>
-          <a:noFill xmlns:a="http://schemas.openxmlformats.org/drawingml/2006/main"/>
-          <a:ln xmlns:a="http://schemas.openxmlformats.org/drawingml/2006/main" w="0">
-            <a:noFill/>
-          </a:ln>
-        </p:spPr>
-        <p:txBody>
-          <a:bodyPr xmlns:a="http://schemas.openxmlformats.org/drawingml/2006/main" lIns="0" tIns="0" rIns="0" bIns="0"/>
-          <a:lstStyle xmlns:a="http://schemas.openxmlformats.org/drawingml/2006/main">
-            <a:defPPr>
-              <a:defRPr sz="1575">
-                <a:solidFill>
-                  <a:srgbClr val="1A1A1A"/>
-                </a:solidFill>
-              </a:defRPr>
-            </a:defPPr>
-            <a:lvl1pPr>
-              <a:defRPr sz="1575">
-                <a:solidFill>
-                  <a:srgbClr val="1A1A1A"/>
-                </a:solidFill>
-              </a:defRPr>
-            </a:lvl1pPr>
-            <a:lvl2pPr>
-              <a:defRPr sz="1575">
-                <a:solidFill>
-                  <a:srgbClr val="1A1A1A"/>
-                </a:solidFill>
-              </a:defRPr>
-            </a:lvl2pPr>
-            <a:lvl3pPr>
-              <a:defRPr sz="1575">
-                <a:solidFill>
-                  <a:srgbClr val="1A1A1A"/>
-                </a:solidFill>
-              </a:defRPr>
-            </a:lvl3pPr>
-            <a:lvl4pPr>
-              <a:defRPr sz="1575">
-                <a:solidFill>
-                  <a:srgbClr val="1A1A1A"/>
-                </a:solidFill>
-              </a:defRPr>
-            </a:lvl4pPr>
-            <a:lvl5pPr>
-              <a:defRPr sz="1575">
-                <a:solidFill>
-                  <a:srgbClr val="1A1A1A"/>
-                </a:solidFill>
-              </a:defRPr>
-            </a:lvl5pPr>
-            <a:lvl6pPr>
-              <a:defRPr sz="1575">
-                <a:solidFill>
-                  <a:srgbClr val="1A1A1A"/>
-                </a:solidFill>
-              </a:defRPr>
-            </a:lvl6pPr>
-            <a:lvl7pPr>
-              <a:defRPr sz="1575">
-                <a:solidFill>
-                  <a:srgbClr val="1A1A1A"/>
-                </a:solidFill>
-              </a:defRPr>
-            </a:lvl7pPr>
-            <a:lvl8pPr>
-              <a:defRPr sz="1575">
-                <a:solidFill>
-                  <a:srgbClr val="1A1A1A"/>
-                </a:solidFill>
-              </a:defRPr>
-            </a:lvl8pPr>
-            <a:lvl9pPr>
-              <a:defRPr sz="1575">
-                <a:solidFill>
-                  <a:srgbClr val="1A1A1A"/>
-                </a:solidFill>
-              </a:defRPr>
-            </a:lvl9pPr>
-          </a:lstStyle>
-          <a:p xmlns:a="http://schemas.openxmlformats.org/drawingml/2006/main">
-            <a:pPr>
+            <a:pPr marL="190500" indent="-101600">
+              <a:spcAft>
+                <a:spcPts val="800"/>
+              </a:spcAft>
+              <a:buChar char="•"/>
               <a:defRPr sz="1575">
                 <a:solidFill>
                   <a:srgbClr val="1A1A1A"/>
@@ -7766,11 +7401,15 @@
                   <a:srgbClr val="1A1A1A"/>
                 </a:solidFill>
               </a:rPr>
-              <a:t>Remaining: check hosted models, rehearse the demo and evaluate the final system.</a:t>
+              <a:t>Added email approval and checked it locally. We also fixed a document search startup problem.</a:t>
             </a:r>
           </a:p>
           <a:p xmlns:a="http://schemas.openxmlformats.org/drawingml/2006/main">
-            <a:pPr>
+            <a:pPr marL="190500" indent="-101600">
+              <a:spcAft>
+                <a:spcPts val="800"/>
+              </a:spcAft>
+              <a:buChar char="•"/>
               <a:defRPr sz="1575">
                 <a:solidFill>
                   <a:srgbClr val="1A1A1A"/>
@@ -7783,7 +7422,28 @@
                   <a:srgbClr val="1A1A1A"/>
                 </a:solidFill>
               </a:rPr>
-              <a:t>The dates below are team targets. Confirm the course’s Week 14 deadline.</a:t>
+              <a:t>Still pending: a fresh hosted-model check, a full demo rehearsal and final testing on examples kept aside.</a:t>
+            </a:r>
+          </a:p>
+          <a:p xmlns:a="http://schemas.openxmlformats.org/drawingml/2006/main">
+            <a:pPr marL="190500" indent="-101600">
+              <a:spcAft>
+                <a:spcPts val="800"/>
+              </a:spcAft>
+              <a:buChar char="•"/>
+              <a:defRPr sz="1575">
+                <a:solidFill>
+                  <a:srgbClr val="1A1A1A"/>
+                </a:solidFill>
+              </a:defRPr>
+            </a:pPr>
+            <a:r>
+              <a:rPr sz="1575">
+                <a:solidFill>
+                  <a:srgbClr val="1A1A1A"/>
+                </a:solidFill>
+              </a:rPr>
+              <a:t>The dates below are proposed team targets. Confirm the official Week 14 deadline with the instructor.</a:t>
             </a:r>
           </a:p>
         </p:txBody>
@@ -7791,7 +7451,7 @@
     </p:spTree>
     <p:extLst>
       <p:ext uri="{BB962C8B-B14F-4D97-AF65-F5344CB8AC3E}">
-        <p14:creationId xmlns:p14="http://schemas.microsoft.com/office/powerpoint/2010/main" val="1481086393"/>
+        <p14:creationId xmlns:p14="http://schemas.microsoft.com/office/powerpoint/2010/main" val="1729042174"/>
       </p:ext>
     </p:extLst>
   </p:cSld>
